--- a/docs/content/wrangling_data/wrangling_data_lecture.pptx
+++ b/docs/content/wrangling_data/wrangling_data_lecture.pptx
@@ -40,6 +40,12 @@
     <p:sldId id="288" r:id="rId34"/>
     <p:sldId id="289" r:id="rId35"/>
     <p:sldId id="290" r:id="rId36"/>
+    <p:sldId id="291" r:id="rId37"/>
+    <p:sldId id="292" r:id="rId38"/>
+    <p:sldId id="293" r:id="rId39"/>
+    <p:sldId id="294" r:id="rId40"/>
+    <p:sldId id="295" r:id="rId41"/>
+    <p:sldId id="296" r:id="rId42"/>
   </p:sldIdLst>
   <p:sldSz cx="9144000" cy="5143500" type="screen16x9"/>
   <p:notesSz cx="6858000" cy="9144000"/>
@@ -3465,7 +3471,7 @@
               <a:rPr sz="2000">
                 <a:latin typeface="Courier"/>
               </a:rPr>
-              <a:t>n_s == "n" | length_mm &gt; 22</a:t>
+              <a:t>side == "shady" | needle_length_mm &gt; 18</a:t>
             </a:r>
             <a:r>
               <a:rPr sz="2000"/>
@@ -3477,7 +3483,7 @@
             </a:r>
             <a:r>
               <a:rPr sz="2000"/>
-              <a:t> the needle is longer than 22mm.</a:t>
+              <a:t> the needle is longer than 18 mm.</a:t>
             </a:r>
             <a:br/>
             <a:r>
@@ -3594,7 +3600,7 @@
                 </a:solidFill>
                 <a:latin typeface="Courier"/>
               </a:rPr>
-              <a:t>(n_s </a:t>
+              <a:t>(side </a:t>
             </a:r>
             <a:r>
               <a:rPr>
@@ -3621,7 +3627,7 @@
                 </a:solidFill>
                 <a:latin typeface="Courier"/>
               </a:rPr>
-              <a:t>"n"</a:t>
+              <a:t>"shady"</a:t>
             </a:r>
             <a:r>
               <a:rPr>
@@ -3648,7 +3654,7 @@
                 </a:solidFill>
                 <a:latin typeface="Courier"/>
               </a:rPr>
-              <a:t> length_mm </a:t>
+              <a:t> needle_length_mm </a:t>
             </a:r>
             <a:r>
               <a:rPr>
@@ -3675,7 +3681,7 @@
                 </a:solidFill>
                 <a:latin typeface="Courier"/>
               </a:rPr>
-              <a:t>22</a:t>
+              <a:t>18</a:t>
             </a:r>
             <a:r>
               <a:rPr>
@@ -3733,14 +3739,14 @@
                 <a:latin typeface="Courier"/>
               </a:rPr>
               <a:t># A tibble: 6 × 6
-  date    group       n_s   sun   tree_no length_mm
-  &lt;chr&gt;   &lt;chr&gt;       &lt;chr&gt; &lt;chr&gt;   &lt;dbl&gt;     &lt;dbl&gt;
-1 3/20/25 cephalopods n     shady       1        20
-2 3/20/25 cephalopods n     shady       1        21
-3 3/20/25 cephalopods n     shady       1        23
-4 3/20/25 cephalopods n     shady       1        25
-5 3/20/25 cephalopods n     shady       1        21
-6 3/20/25 cephalopods n     shady       1        16</a:t>
+  source_file             team  replicate side  needle_length_mm needle_width_mm
+  &lt;chr&gt;                   &lt;chr&gt;     &lt;dbl&gt; &lt;chr&gt;            &lt;dbl&gt;           &lt;dbl&gt;
+1 Bartell_Shingledecker_… grac…         1 sunny             18.4            0.79
+2 Bartell_Shingledecker_… grac…         6 sunny             19.2            0.99
+3 Bartell_Shingledecker_… grac…         1 shady             16.6            0.75
+4 Bartell_Shingledecker_… grac…         2 shady             17.0            0.84
+5 Bartell_Shingledecker_… grac…         3 shady             14.3            0.86
+6 Bartell_Shingledecker_… grac…         4 shady             15.6            0.98</a:t>
             </a:r>
           </a:p>
         </p:txBody>
@@ -3795,7 +3801,7 @@
             </a:r>
             <a:r>
               <a:rPr sz="2000"/>
-              <a:t>, not the pipe </a:t>
+              <a:t> (logical OR), not the pipe </a:t>
             </a:r>
             <a:r>
               <a:rPr sz="2000" b="1"/>
@@ -3809,21 +3815,28 @@
               <a:rPr sz="2000">
                 <a:latin typeface="Courier"/>
               </a:rPr>
-              <a:t>|&gt; or %&gt;%</a:t>
+              <a:t>|&gt;</a:t>
+            </a:r>
+            <a:r>
+              <a:rPr sz="2000"/>
+              <a:t> (or </a:t>
+            </a:r>
+            <a:r>
+              <a:rPr sz="2000">
+                <a:latin typeface="Courier"/>
+              </a:rPr>
+              <a:t>%&gt;%</a:t>
+            </a:r>
+            <a:r>
+              <a:rPr sz="2000"/>
+              <a:t>)</a:t>
             </a:r>
           </a:p>
           <a:p>
             <a:pPr lvl="0"/>
             <a:r>
               <a:rPr sz="2000"/>
-              <a:t>Look related but do completely different jobs</a:t>
-            </a:r>
-          </a:p>
-          <a:p>
-            <a:pPr lvl="0"/>
-            <a:r>
-              <a:rPr sz="2000"/>
-              <a:t>one is logical OR, the other chains steps together.</a:t>
+              <a:t>They look alike but do completely different jobs — one is logical OR, the other chains steps together.</a:t>
             </a:r>
           </a:p>
         </p:txBody>
@@ -3920,7 +3933,7 @@
                 </a:solidFill>
                 <a:latin typeface="Courier"/>
               </a:rPr>
-              <a:t># Keep rows where group is one of two named teams</a:t>
+              <a:t># Keep rows where team is one of two named teams</a:t>
             </a:r>
             <a:br/>
             <a:r>
@@ -3967,7 +3980,7 @@
                 </a:solidFill>
                 <a:latin typeface="Courier"/>
               </a:rPr>
-              <a:t>(group </a:t>
+              <a:t>(team </a:t>
             </a:r>
             <a:r>
               <a:rPr>
@@ -4012,7 +4025,7 @@
                 </a:solidFill>
                 <a:latin typeface="Courier"/>
               </a:rPr>
-              <a:t>"cephalopods"</a:t>
+              <a:t>"botany"</a:t>
             </a:r>
             <a:r>
               <a:rPr>
@@ -4030,7 +4043,7 @@
                 </a:solidFill>
                 <a:latin typeface="Courier"/>
               </a:rPr>
-              <a:t>"salmon"</a:t>
+              <a:t>"waterbugs"</a:t>
             </a:r>
             <a:r>
               <a:rPr>
@@ -4088,14 +4101,14 @@
                 <a:latin typeface="Courier"/>
               </a:rPr>
               <a:t># A tibble: 6 × 6
-  date    group       n_s   sun   tree_no length_mm
-  &lt;chr&gt;   &lt;chr&gt;       &lt;chr&gt; &lt;chr&gt;   &lt;dbl&gt;     &lt;dbl&gt;
-1 3/20/25 cephalopods n     shady       1        20
-2 3/20/25 cephalopods n     shady       1        21
-3 3/20/25 cephalopods n     shady       1        23
-4 3/20/25 cephalopods n     shady       1        25
-5 3/20/25 cephalopods n     shady       1        21
-6 3/20/25 cephalopods n     shady       1        16</a:t>
+  source_file             team  replicate side  needle_length_mm needle_width_mm
+  &lt;chr&gt;                   &lt;chr&gt;     &lt;dbl&gt; &lt;chr&gt;            &lt;dbl&gt;           &lt;dbl&gt;
+1 heal_thome_pineneedles… bota…         1 shady             16.5            0.65
+2 heal_thome_pineneedles… bota…         2 shady             20.7            0.77
+3 heal_thome_pineneedles… bota…         3 shady             17.6            0.94
+4 heal_thome_pineneedles… bota…         4 shady             15.1            0.72
+5 heal_thome_pineneedles… bota…         5 shady             17.6            0.79
+6 heal_thome_pineneedles… bota…         6 shady             15.3            0.9 </a:t>
             </a:r>
           </a:p>
           <a:p>
@@ -4156,7 +4169,7 @@
                 </a:solidFill>
                 <a:latin typeface="Courier"/>
               </a:rPr>
-              <a:t>(group </a:t>
+              <a:t>(team </a:t>
             </a:r>
             <a:r>
               <a:rPr>
@@ -4183,7 +4196,7 @@
                 </a:solidFill>
                 <a:latin typeface="Courier"/>
               </a:rPr>
-              <a:t>"cephalopods"</a:t>
+              <a:t>"botany"</a:t>
             </a:r>
             <a:r>
               <a:rPr>
@@ -4210,7 +4223,7 @@
                 </a:solidFill>
                 <a:latin typeface="Courier"/>
               </a:rPr>
-              <a:t> group </a:t>
+              <a:t> team </a:t>
             </a:r>
             <a:r>
               <a:rPr>
@@ -4237,7 +4250,7 @@
                 </a:solidFill>
                 <a:latin typeface="Courier"/>
               </a:rPr>
-              <a:t>"salmon"</a:t>
+              <a:t>"waterbugs"</a:t>
             </a:r>
             <a:r>
               <a:rPr>
@@ -4295,14 +4308,14 @@
                 <a:latin typeface="Courier"/>
               </a:rPr>
               <a:t># A tibble: 6 × 6
-  date    group       n_s   sun   tree_no length_mm
-  &lt;chr&gt;   &lt;chr&gt;       &lt;chr&gt; &lt;chr&gt;   &lt;dbl&gt;     &lt;dbl&gt;
-1 3/20/25 cephalopods n     shady       1        20
-2 3/20/25 cephalopods n     shady       1        21
-3 3/20/25 cephalopods n     shady       1        23
-4 3/20/25 cephalopods n     shady       1        25
-5 3/20/25 cephalopods n     shady       1        21
-6 3/20/25 cephalopods n     shady       1        16</a:t>
+  source_file             team  replicate side  needle_length_mm needle_width_mm
+  &lt;chr&gt;                   &lt;chr&gt;     &lt;dbl&gt; &lt;chr&gt;            &lt;dbl&gt;           &lt;dbl&gt;
+1 heal_thome_pineneedles… bota…         1 shady             16.5            0.65
+2 heal_thome_pineneedles… bota…         2 shady             20.7            0.77
+3 heal_thome_pineneedles… bota…         3 shady             17.6            0.94
+4 heal_thome_pineneedles… bota…         4 shady             15.1            0.72
+5 heal_thome_pineneedles… bota…         5 shady             17.6            0.79
+6 heal_thome_pineneedles… bota…         6 shady             15.3            0.9 </a:t>
             </a:r>
           </a:p>
         </p:txBody>
@@ -5241,7 +5254,7 @@
                 </a:solidFill>
                 <a:latin typeface="Courier"/>
               </a:rPr>
-              <a:t>(n_s, length_mm) </a:t>
+              <a:t>(side, needle_length_mm) </a:t>
             </a:r>
             <a:r>
               <a:rPr>
@@ -5289,14 +5302,14 @@
                 <a:latin typeface="Courier"/>
               </a:rPr>
               <a:t># A tibble: 6 × 2
-  n_s   length_mm
-  &lt;chr&gt;     &lt;dbl&gt;
-1 n            20
-2 n            21
-3 n            23
-4 n            25
-5 n            21
-6 n            16</a:t>
+  side  needle_length_mm
+  &lt;chr&gt;            &lt;dbl&gt;
+1 sunny             18.4
+2 sunny             12.5
+3 sunny             17.7
+4 sunny             14.0
+5 sunny             14.2
+6 sunny             19.2</a:t>
             </a:r>
           </a:p>
           <a:p>
@@ -5310,7 +5323,7 @@
                 </a:solidFill>
                 <a:latin typeface="Courier"/>
               </a:rPr>
-              <a:t># Drop the date column (minus sign)</a:t>
+              <a:t># Drop the provenance column we do not need (minus sign)</a:t>
             </a:r>
             <a:br/>
             <a:r>
@@ -5374,7 +5387,7 @@
                 </a:solidFill>
                 <a:latin typeface="Courier"/>
               </a:rPr>
-              <a:t>date) </a:t>
+              <a:t>source_file) </a:t>
             </a:r>
             <a:r>
               <a:rPr>
@@ -5422,14 +5435,14 @@
                 <a:latin typeface="Courier"/>
               </a:rPr>
               <a:t># A tibble: 6 × 5
-  group       n_s   sun   tree_no length_mm
-  &lt;chr&gt;       &lt;chr&gt; &lt;chr&gt;   &lt;dbl&gt;     &lt;dbl&gt;
-1 cephalopods n     shady       1        20
-2 cephalopods n     shady       1        21
-3 cephalopods n     shady       1        23
-4 cephalopods n     shady       1        25
-5 cephalopods n     shady       1        21
-6 cephalopods n     shady       1        16</a:t>
+  team       replicate side  needle_length_mm needle_width_mm
+  &lt;chr&gt;          &lt;dbl&gt; &lt;chr&gt;            &lt;dbl&gt;           &lt;dbl&gt;
+1 grace_jace         1 sunny             18.4            0.79
+2 grace_jace         2 sunny             12.5            0.99
+3 grace_jace         3 sunny             17.7            1.12
+4 grace_jace         4 sunny             14.0            0.94
+5 grace_jace         5 sunny             14.2            1   
+6 grace_jace         6 sunny             19.2            0.99</a:t>
             </a:r>
           </a:p>
           <a:p>
@@ -5722,15 +5735,15 @@
               <a:rPr>
                 <a:latin typeface="Courier"/>
               </a:rPr>
-              <a:t># A tibble: 6 × 4
-  n_s   sun   tree_no length_mm
-  &lt;chr&gt; &lt;chr&gt;   &lt;dbl&gt;     &lt;dbl&gt;
-1 n     shady       1        20
-2 n     shady       1        21
-3 n     shady       1        23
-4 n     shady       1        25
-5 n     shady       1        21
-6 n     shady       1        16</a:t>
+              <a:t># A tibble: 6 × 2
+  needle_length_mm needle_width_mm
+             &lt;dbl&gt;           &lt;dbl&gt;
+1             18.4            0.79
+2             12.5            0.99
+3             17.7            1.12
+4             14.0            0.94
+5             14.2            1   
+6             19.2            0.99</a:t>
             </a:r>
           </a:p>
         </p:txBody>
@@ -5764,7 +5777,11 @@
               <a:rPr>
                 <a:latin typeface="Courier"/>
               </a:rPr>
-              <a:t>starts_with("x") - super useful for similar units or types of data in variable</a:t>
+              <a:t>starts_with("needle")</a:t>
+            </a:r>
+            <a:r>
+              <a:rPr/>
+              <a:t> — super useful when related variables share a prefix</a:t>
             </a:r>
           </a:p>
           <a:p>
@@ -5782,7 +5799,7 @@
               <a:rPr>
                 <a:latin typeface="Courier"/>
               </a:rPr>
-              <a:t>contains("sun")</a:t>
+              <a:t>contains("needle")</a:t>
             </a:r>
           </a:p>
           <a:p>
@@ -5899,7 +5916,7 @@
               <a:rPr sz="2000">
                 <a:latin typeface="Courier"/>
               </a:rPr>
-              <a:t>length_mm / 10</a:t>
+              <a:t>needle_length_mm / 10</a:t>
             </a:r>
             <a:r>
               <a:rPr sz="2000"/>
@@ -5932,7 +5949,7 @@
               <a:rPr sz="2000">
                 <a:latin typeface="Courier"/>
               </a:rPr>
-              <a:t>length_mm</a:t>
+              <a:t>needle_length_mm</a:t>
             </a:r>
             <a:r>
               <a:rPr sz="2000"/>
@@ -6057,16 +6074,16 @@
                 </a:solidFill>
                 <a:latin typeface="Courier"/>
               </a:rPr>
-              <a:t>length_cm =</a:t>
-            </a:r>
-            <a:r>
-              <a:rPr>
-                <a:solidFill>
-                  <a:srgbClr val="003B4F"/>
-                </a:solidFill>
-                <a:latin typeface="Courier"/>
-              </a:rPr>
-              <a:t> length_mm </a:t>
+              <a:t>needle_length_cm =</a:t>
+            </a:r>
+            <a:r>
+              <a:rPr>
+                <a:solidFill>
+                  <a:srgbClr val="003B4F"/>
+                </a:solidFill>
+                <a:latin typeface="Courier"/>
+              </a:rPr>
+              <a:t> needle_length_mm </a:t>
             </a:r>
             <a:r>
               <a:rPr>
@@ -6151,14 +6168,15 @@
                 <a:latin typeface="Courier"/>
               </a:rPr>
               <a:t># A tibble: 6 × 7
-  date    group       n_s   sun   tree_no length_mm length_cm
-  &lt;chr&gt;   &lt;chr&gt;       &lt;chr&gt; &lt;chr&gt;   &lt;dbl&gt;     &lt;dbl&gt;     &lt;dbl&gt;
-1 3/20/25 cephalopods n     shady       1        20       2  
-2 3/20/25 cephalopods n     shady       1        21       2.1
-3 3/20/25 cephalopods n     shady       1        23       2.3
-4 3/20/25 cephalopods n     shady       1        25       2.5
-5 3/20/25 cephalopods n     shady       1        21       2.1
-6 3/20/25 cephalopods n     shady       1        16       1.6</a:t>
+  source_file             team  replicate side  needle_length_mm needle_width_mm
+  &lt;chr&gt;                   &lt;chr&gt;     &lt;dbl&gt; &lt;chr&gt;            &lt;dbl&gt;           &lt;dbl&gt;
+1 Bartell_Shingledecker_… grac…         1 sunny             18.4            0.79
+2 Bartell_Shingledecker_… grac…         2 sunny             12.5            0.99
+3 Bartell_Shingledecker_… grac…         3 sunny             17.7            1.12
+4 Bartell_Shingledecker_… grac…         4 sunny             14.0            0.94
+5 Bartell_Shingledecker_… grac…         5 sunny             14.2            1   
+6 Bartell_Shingledecker_… grac…         6 sunny             19.2            0.99
+# ℹ 1 more variable: needle_length_cm &lt;dbl&gt;</a:t>
             </a:r>
           </a:p>
         </p:txBody>
@@ -6227,7 +6245,7 @@
               <a:rPr sz="2000">
                 <a:latin typeface="Courier"/>
               </a:rPr>
-              <a:t>mutate(length_mm = round(length_mm, 1))</a:t>
+              <a:t>mutate(needle_length_mm = round(needle_length_mm, 1))</a:t>
             </a:r>
             <a:r>
               <a:rPr sz="2000"/>
@@ -6405,7 +6423,7 @@
                 </a:solidFill>
                 <a:latin typeface="Courier"/>
               </a:rPr>
-              <a:t>(length_mm)) </a:t>
+              <a:t>(needle_length_mm)) </a:t>
             </a:r>
             <a:r>
               <a:rPr>
@@ -6454,14 +6472,14 @@
                 <a:latin typeface="Courier"/>
               </a:rPr>
               <a:t># A tibble: 6 × 7
-  date    group       n_s   sun   tree_no length_mm log_length
-  &lt;chr&gt;   &lt;chr&gt;       &lt;chr&gt; &lt;chr&gt;   &lt;dbl&gt;     &lt;dbl&gt;      &lt;dbl&gt;
-1 3/20/25 cephalopods n     shady       1        20       3.00
-2 3/20/25 cephalopods n     shady       1        21       3.04
-3 3/20/25 cephalopods n     shady       1        23       3.14
-4 3/20/25 cephalopods n     shady       1        25       3.22
-5 3/20/25 cephalopods n     shady       1        21       3.04
-6 3/20/25 cephalopods n     shady       1        16       2.77</a:t>
+  source_file  team  replicate side  needle_length_mm needle_width_mm log_length
+  &lt;chr&gt;        &lt;chr&gt;     &lt;dbl&gt; &lt;chr&gt;            &lt;dbl&gt;           &lt;dbl&gt;      &lt;dbl&gt;
+1 Bartell_Shi… grac…         1 sunny             18.4            0.79       2.91
+2 Bartell_Shi… grac…         2 sunny             12.5            0.99       2.52
+3 Bartell_Shi… grac…         3 sunny             17.7            1.12       2.88
+4 Bartell_Shi… grac…         4 sunny             14.0            0.94       2.64
+5 Bartell_Shi… grac…         5 sunny             14.2            1          2.65
+6 Bartell_Shi… grac…         6 sunny             19.2            0.99       2.95</a:t>
             </a:r>
           </a:p>
           <a:p>
@@ -6541,16 +6559,16 @@
                 </a:solidFill>
                 <a:latin typeface="Courier"/>
               </a:rPr>
-              <a:t>length_cm  =</a:t>
-            </a:r>
-            <a:r>
-              <a:rPr>
-                <a:solidFill>
-                  <a:srgbClr val="003B4F"/>
-                </a:solidFill>
-                <a:latin typeface="Courier"/>
-              </a:rPr>
-              <a:t> length_mm </a:t>
+              <a:t>needle_length_cm  =</a:t>
+            </a:r>
+            <a:r>
+              <a:rPr>
+                <a:solidFill>
+                  <a:srgbClr val="003B4F"/>
+                </a:solidFill>
+                <a:latin typeface="Courier"/>
+              </a:rPr>
+              <a:t> needle_length_mm </a:t>
             </a:r>
             <a:r>
               <a:rPr>
@@ -6632,7 +6650,7 @@
                 </a:solidFill>
                 <a:latin typeface="Courier"/>
               </a:rPr>
-              <a:t>(length_mm </a:t>
+              <a:t>(needle_length_mm </a:t>
             </a:r>
             <a:r>
               <a:rPr>
@@ -6659,7 +6677,7 @@
                 </a:solidFill>
                 <a:latin typeface="Courier"/>
               </a:rPr>
-              <a:t>18</a:t>
+              <a:t>15</a:t>
             </a:r>
             <a:r>
               <a:rPr>
@@ -6763,14 +6781,15 @@
                 <a:latin typeface="Courier"/>
               </a:rPr>
               <a:t># A tibble: 6 × 8
-  date    group       n_s   sun   tree_no length_mm length_cm size_class
-  &lt;chr&gt;   &lt;chr&gt;       &lt;chr&gt; &lt;chr&gt;   &lt;dbl&gt;     &lt;dbl&gt;     &lt;dbl&gt; &lt;chr&gt;     
-1 3/20/25 cephalopods n     shady       1        20       2   long      
-2 3/20/25 cephalopods n     shady       1        21       2.1 long      
-3 3/20/25 cephalopods n     shady       1        23       2.3 long      
-4 3/20/25 cephalopods n     shady       1        25       2.5 long      
-5 3/20/25 cephalopods n     shady       1        21       2.1 long      
-6 3/20/25 cephalopods n     shady       1        16       1.6 short     </a:t>
+  source_file             team  replicate side  needle_length_mm needle_width_mm
+  &lt;chr&gt;                   &lt;chr&gt;     &lt;dbl&gt; &lt;chr&gt;            &lt;dbl&gt;           &lt;dbl&gt;
+1 Bartell_Shingledecker_… grac…         1 sunny             18.4            0.79
+2 Bartell_Shingledecker_… grac…         2 sunny             12.5            0.99
+3 Bartell_Shingledecker_… grac…         3 sunny             17.7            1.12
+4 Bartell_Shingledecker_… grac…         4 sunny             14.0            0.94
+5 Bartell_Shingledecker_… grac…         5 sunny             14.2            1   
+6 Bartell_Shingledecker_… grac…         6 sunny             19.2            0.99
+# ℹ 2 more variables: needle_length_cm &lt;dbl&gt;, size_class &lt;chr&gt;</a:t>
             </a:r>
           </a:p>
         </p:txBody>
@@ -6835,8 +6854,50 @@
           <a:p>
             <a:pPr lvl="0"/>
             <a:r>
-              <a:rPr sz="2000"/>
-              <a:t>Know what log you are doing log2 log10 or ln?????</a:t>
+              <a:rPr sz="2000" b="1"/>
+              <a:t>Know which log you are using.</a:t>
+            </a:r>
+            <a:r>
+              <a:rPr sz="2000"/>
+              <a:t> In R, </a:t>
+            </a:r>
+            <a:r>
+              <a:rPr sz="2000">
+                <a:latin typeface="Courier"/>
+              </a:rPr>
+              <a:t>log()</a:t>
+            </a:r>
+            <a:r>
+              <a:rPr sz="2000"/>
+              <a:t> is the </a:t>
+            </a:r>
+            <a:r>
+              <a:rPr sz="2000" i="1"/>
+              <a:t>natural</a:t>
+            </a:r>
+            <a:r>
+              <a:rPr sz="2000"/>
+              <a:t> log (ln, base e); </a:t>
+            </a:r>
+            <a:r>
+              <a:rPr sz="2000">
+                <a:latin typeface="Courier"/>
+              </a:rPr>
+              <a:t>log2()</a:t>
+            </a:r>
+            <a:r>
+              <a:rPr sz="2000"/>
+              <a:t> and </a:t>
+            </a:r>
+            <a:r>
+              <a:rPr sz="2000">
+                <a:latin typeface="Courier"/>
+              </a:rPr>
+              <a:t>log10()</a:t>
+            </a:r>
+            <a:r>
+              <a:rPr sz="2000"/>
+              <a:t> are the other two. Always say which one in your methods.</a:t>
             </a:r>
           </a:p>
         </p:txBody>
@@ -7026,13 +7087,17 @@
             </a:r>
             <a:r>
               <a:rPr/>
-              <a:t> , </a:t>
-            </a:r>
-            <a:r>
-              <a:rPr>
-                <a:latin typeface="Courier"/>
-              </a:rPr>
-              <a:t>outout/)</a:t>
+              <a:t>, </a:t>
+            </a:r>
+            <a:r>
+              <a:rPr>
+                <a:latin typeface="Courier"/>
+              </a:rPr>
+              <a:t>output/</a:t>
+            </a:r>
+            <a:r>
+              <a:rPr/>
+              <a:t>)</a:t>
             </a:r>
           </a:p>
           <a:p>
@@ -7045,7 +7110,7 @@
               <a:rPr>
                 <a:latin typeface="Courier"/>
               </a:rPr>
-              <a:t>pine_needles.csv</a:t>
+              <a:t>pine_data.csv</a:t>
             </a:r>
             <a:r>
               <a:rPr/>
@@ -7056,6 +7121,13 @@
                 <a:latin typeface="Courier"/>
               </a:rPr>
               <a:t>ggplot</a:t>
+            </a:r>
+          </a:p>
+          <a:p>
+            <a:pPr lvl="0"/>
+            <a:r>
+              <a:rPr/>
+              <a:t>Saw why 64 rows is not 64 independent observations</a:t>
             </a:r>
           </a:p>
           <a:p>
@@ -7339,7 +7411,7 @@
               <a:rPr sz="2000">
                 <a:latin typeface="Courier"/>
               </a:rPr>
-              <a:t>length_mm</a:t>
+              <a:t>needle_length_mm</a:t>
             </a:r>
             <a:r>
               <a:rPr sz="2000"/>
@@ -7353,7 +7425,7 @@
             </a:r>
             <a:r>
               <a:rPr sz="2000"/>
-              <a:t>, </a:t>
+              <a:t> (&lt; 13), </a:t>
             </a:r>
             <a:r>
               <a:rPr sz="2000">
@@ -7363,7 +7435,7 @@
             </a:r>
             <a:r>
               <a:rPr sz="2000"/>
-              <a:t>, and </a:t>
+              <a:t> (&lt; 16), and </a:t>
             </a:r>
             <a:r>
               <a:rPr sz="2000">
@@ -7373,23 +7445,23 @@
             </a:r>
             <a:r>
               <a:rPr sz="2000"/>
-              <a:t>. Needle 1 in the data is 20mm. Which bin does it land in — and does that depend on whether the cutoff is </a:t>
+              <a:t>. The first needle in the data is 18.44 mm. Which bin does it land in — and would that change if the cutoffs used </a:t>
             </a:r>
             <a:r>
               <a:rPr sz="2000">
                 <a:latin typeface="Courier"/>
               </a:rPr>
+              <a:t>&lt;=</a:t>
+            </a:r>
+            <a:r>
+              <a:rPr sz="2000"/>
+              <a:t> instead of </a:t>
+            </a:r>
+            <a:r>
+              <a:rPr sz="2000">
+                <a:latin typeface="Courier"/>
+              </a:rPr>
               <a:t>&lt;</a:t>
-            </a:r>
-            <a:r>
-              <a:rPr sz="2000"/>
-              <a:t> or </a:t>
-            </a:r>
-            <a:r>
-              <a:rPr sz="2000">
-                <a:latin typeface="Courier"/>
-              </a:rPr>
-              <a:t>&lt;=</a:t>
             </a:r>
             <a:r>
               <a:rPr sz="2000"/>
@@ -7538,7 +7610,7 @@
                 </a:solidFill>
                 <a:latin typeface="Courier"/>
               </a:rPr>
-              <a:t>      length_mm </a:t>
+              <a:t>      needle_length_mm </a:t>
             </a:r>
             <a:r>
               <a:rPr>
@@ -7565,89 +7637,89 @@
                 </a:solidFill>
                 <a:latin typeface="Courier"/>
               </a:rPr>
+              <a:t>13</a:t>
+            </a:r>
+            <a:r>
+              <a:rPr>
+                <a:solidFill>
+                  <a:srgbClr val="003B4F"/>
+                </a:solidFill>
+                <a:latin typeface="Courier"/>
+              </a:rPr>
+              <a:t> </a:t>
+            </a:r>
+            <a:r>
+              <a:rPr>
+                <a:solidFill>
+                  <a:srgbClr val="5E5E5E"/>
+                </a:solidFill>
+                <a:latin typeface="Courier"/>
+              </a:rPr>
+              <a:t>~</a:t>
+            </a:r>
+            <a:r>
+              <a:rPr>
+                <a:solidFill>
+                  <a:srgbClr val="003B4F"/>
+                </a:solidFill>
+                <a:latin typeface="Courier"/>
+              </a:rPr>
+              <a:t> </a:t>
+            </a:r>
+            <a:r>
+              <a:rPr>
+                <a:solidFill>
+                  <a:srgbClr val="20794D"/>
+                </a:solidFill>
+                <a:latin typeface="Courier"/>
+              </a:rPr>
+              <a:t>"short"</a:t>
+            </a:r>
+            <a:r>
+              <a:rPr>
+                <a:solidFill>
+                  <a:srgbClr val="003B4F"/>
+                </a:solidFill>
+                <a:latin typeface="Courier"/>
+              </a:rPr>
+              <a:t>,</a:t>
+            </a:r>
+            <a:br/>
+            <a:r>
+              <a:rPr>
+                <a:solidFill>
+                  <a:srgbClr val="003B4F"/>
+                </a:solidFill>
+                <a:latin typeface="Courier"/>
+              </a:rPr>
+              <a:t>      needle_length_mm </a:t>
+            </a:r>
+            <a:r>
+              <a:rPr>
+                <a:solidFill>
+                  <a:srgbClr val="5E5E5E"/>
+                </a:solidFill>
+                <a:latin typeface="Courier"/>
+              </a:rPr>
+              <a:t>&lt;</a:t>
+            </a:r>
+            <a:r>
+              <a:rPr>
+                <a:solidFill>
+                  <a:srgbClr val="003B4F"/>
+                </a:solidFill>
+                <a:latin typeface="Courier"/>
+              </a:rPr>
+              <a:t> </a:t>
+            </a:r>
+            <a:r>
+              <a:rPr>
+                <a:solidFill>
+                  <a:srgbClr val="AD0000"/>
+                </a:solidFill>
+                <a:latin typeface="Courier"/>
+              </a:rPr>
               <a:t>16</a:t>
-            </a:r>
-            <a:r>
-              <a:rPr>
-                <a:solidFill>
-                  <a:srgbClr val="003B4F"/>
-                </a:solidFill>
-                <a:latin typeface="Courier"/>
-              </a:rPr>
-              <a:t> </a:t>
-            </a:r>
-            <a:r>
-              <a:rPr>
-                <a:solidFill>
-                  <a:srgbClr val="5E5E5E"/>
-                </a:solidFill>
-                <a:latin typeface="Courier"/>
-              </a:rPr>
-              <a:t>~</a:t>
-            </a:r>
-            <a:r>
-              <a:rPr>
-                <a:solidFill>
-                  <a:srgbClr val="003B4F"/>
-                </a:solidFill>
-                <a:latin typeface="Courier"/>
-              </a:rPr>
-              <a:t> </a:t>
-            </a:r>
-            <a:r>
-              <a:rPr>
-                <a:solidFill>
-                  <a:srgbClr val="20794D"/>
-                </a:solidFill>
-                <a:latin typeface="Courier"/>
-              </a:rPr>
-              <a:t>"short"</a:t>
-            </a:r>
-            <a:r>
-              <a:rPr>
-                <a:solidFill>
-                  <a:srgbClr val="003B4F"/>
-                </a:solidFill>
-                <a:latin typeface="Courier"/>
-              </a:rPr>
-              <a:t>,</a:t>
-            </a:r>
-            <a:br/>
-            <a:r>
-              <a:rPr>
-                <a:solidFill>
-                  <a:srgbClr val="003B4F"/>
-                </a:solidFill>
-                <a:latin typeface="Courier"/>
-              </a:rPr>
-              <a:t>      length_mm </a:t>
-            </a:r>
-            <a:r>
-              <a:rPr>
-                <a:solidFill>
-                  <a:srgbClr val="5E5E5E"/>
-                </a:solidFill>
-                <a:latin typeface="Courier"/>
-              </a:rPr>
-              <a:t>&lt;</a:t>
-            </a:r>
-            <a:r>
-              <a:rPr>
-                <a:solidFill>
-                  <a:srgbClr val="003B4F"/>
-                </a:solidFill>
-                <a:latin typeface="Courier"/>
-              </a:rPr>
-              <a:t> </a:t>
-            </a:r>
-            <a:r>
-              <a:rPr>
-                <a:solidFill>
-                  <a:srgbClr val="AD0000"/>
-                </a:solidFill>
-                <a:latin typeface="Courier"/>
-              </a:rPr>
-              <a:t>20</a:t>
             </a:r>
             <a:r>
               <a:rPr>
@@ -7818,9 +7890,9 @@
               <a:t># A tibble: 3 × 2
   size_class     n
   &lt;chr&gt;      &lt;int&gt;
-1 long          16
-2 medium        17
-3 short         15</a:t>
+1 long          21
+2 medium        25
+3 short         18</a:t>
             </a:r>
           </a:p>
         </p:txBody>
@@ -7906,7 +7978,7 @@
               <a:rPr sz="2000">
                 <a:latin typeface="Courier"/>
               </a:rPr>
-              <a:t>length_mm &lt; 16</a:t>
+              <a:t>needle_length_mm &lt; 13</a:t>
             </a:r>
             <a:r>
               <a:rPr sz="2000"/>
@@ -8110,7 +8182,7 @@
                 </a:solidFill>
                 <a:latin typeface="Courier"/>
               </a:rPr>
-              <a:t>      length_mm </a:t>
+              <a:t>      needle_length_mm </a:t>
             </a:r>
             <a:r>
               <a:rPr>
@@ -8137,89 +8209,89 @@
                 </a:solidFill>
                 <a:latin typeface="Courier"/>
               </a:rPr>
+              <a:t>13</a:t>
+            </a:r>
+            <a:r>
+              <a:rPr>
+                <a:solidFill>
+                  <a:srgbClr val="003B4F"/>
+                </a:solidFill>
+                <a:latin typeface="Courier"/>
+              </a:rPr>
+              <a:t> </a:t>
+            </a:r>
+            <a:r>
+              <a:rPr>
+                <a:solidFill>
+                  <a:srgbClr val="5E5E5E"/>
+                </a:solidFill>
+                <a:latin typeface="Courier"/>
+              </a:rPr>
+              <a:t>~</a:t>
+            </a:r>
+            <a:r>
+              <a:rPr>
+                <a:solidFill>
+                  <a:srgbClr val="003B4F"/>
+                </a:solidFill>
+                <a:latin typeface="Courier"/>
+              </a:rPr>
+              <a:t> </a:t>
+            </a:r>
+            <a:r>
+              <a:rPr>
+                <a:solidFill>
+                  <a:srgbClr val="20794D"/>
+                </a:solidFill>
+                <a:latin typeface="Courier"/>
+              </a:rPr>
+              <a:t>"short"</a:t>
+            </a:r>
+            <a:r>
+              <a:rPr>
+                <a:solidFill>
+                  <a:srgbClr val="003B4F"/>
+                </a:solidFill>
+                <a:latin typeface="Courier"/>
+              </a:rPr>
+              <a:t>,</a:t>
+            </a:r>
+            <a:br/>
+            <a:r>
+              <a:rPr>
+                <a:solidFill>
+                  <a:srgbClr val="003B4F"/>
+                </a:solidFill>
+                <a:latin typeface="Courier"/>
+              </a:rPr>
+              <a:t>      needle_length_mm </a:t>
+            </a:r>
+            <a:r>
+              <a:rPr>
+                <a:solidFill>
+                  <a:srgbClr val="5E5E5E"/>
+                </a:solidFill>
+                <a:latin typeface="Courier"/>
+              </a:rPr>
+              <a:t>&lt;</a:t>
+            </a:r>
+            <a:r>
+              <a:rPr>
+                <a:solidFill>
+                  <a:srgbClr val="003B4F"/>
+                </a:solidFill>
+                <a:latin typeface="Courier"/>
+              </a:rPr>
+              <a:t> </a:t>
+            </a:r>
+            <a:r>
+              <a:rPr>
+                <a:solidFill>
+                  <a:srgbClr val="AD0000"/>
+                </a:solidFill>
+                <a:latin typeface="Courier"/>
+              </a:rPr>
               <a:t>16</a:t>
-            </a:r>
-            <a:r>
-              <a:rPr>
-                <a:solidFill>
-                  <a:srgbClr val="003B4F"/>
-                </a:solidFill>
-                <a:latin typeface="Courier"/>
-              </a:rPr>
-              <a:t> </a:t>
-            </a:r>
-            <a:r>
-              <a:rPr>
-                <a:solidFill>
-                  <a:srgbClr val="5E5E5E"/>
-                </a:solidFill>
-                <a:latin typeface="Courier"/>
-              </a:rPr>
-              <a:t>~</a:t>
-            </a:r>
-            <a:r>
-              <a:rPr>
-                <a:solidFill>
-                  <a:srgbClr val="003B4F"/>
-                </a:solidFill>
-                <a:latin typeface="Courier"/>
-              </a:rPr>
-              <a:t> </a:t>
-            </a:r>
-            <a:r>
-              <a:rPr>
-                <a:solidFill>
-                  <a:srgbClr val="20794D"/>
-                </a:solidFill>
-                <a:latin typeface="Courier"/>
-              </a:rPr>
-              <a:t>"short"</a:t>
-            </a:r>
-            <a:r>
-              <a:rPr>
-                <a:solidFill>
-                  <a:srgbClr val="003B4F"/>
-                </a:solidFill>
-                <a:latin typeface="Courier"/>
-              </a:rPr>
-              <a:t>,</a:t>
-            </a:r>
-            <a:br/>
-            <a:r>
-              <a:rPr>
-                <a:solidFill>
-                  <a:srgbClr val="003B4F"/>
-                </a:solidFill>
-                <a:latin typeface="Courier"/>
-              </a:rPr>
-              <a:t>      length_mm </a:t>
-            </a:r>
-            <a:r>
-              <a:rPr>
-                <a:solidFill>
-                  <a:srgbClr val="5E5E5E"/>
-                </a:solidFill>
-                <a:latin typeface="Courier"/>
-              </a:rPr>
-              <a:t>&lt;</a:t>
-            </a:r>
-            <a:r>
-              <a:rPr>
-                <a:solidFill>
-                  <a:srgbClr val="003B4F"/>
-                </a:solidFill>
-                <a:latin typeface="Courier"/>
-              </a:rPr>
-              <a:t> </a:t>
-            </a:r>
-            <a:r>
-              <a:rPr>
-                <a:solidFill>
-                  <a:srgbClr val="AD0000"/>
-                </a:solidFill>
-                <a:latin typeface="Courier"/>
-              </a:rPr>
-              <a:t>20</a:t>
             </a:r>
             <a:r>
               <a:rPr>
@@ -8345,9 +8417,9 @@
               <a:t># A tibble: 3 × 2
   size_class     n
   &lt;chr&gt;      &lt;int&gt;
-1 medium        17
-2 short         15
-3 &lt;NA&gt;          16</a:t>
+1 medium        25
+2 short         18
+3 &lt;NA&gt;          21</a:t>
             </a:r>
           </a:p>
         </p:txBody>
@@ -8400,7 +8472,7 @@
             </a:r>
             <a:r>
               <a:rPr sz="2000"/>
-              <a:t> line and every “long” needle silently becomes </a:t>
+              <a:t> line and all 21 “long” needles silently become </a:t>
             </a:r>
             <a:r>
               <a:rPr sz="2000">
@@ -8624,7 +8696,7 @@
                 </a:solidFill>
                 <a:latin typeface="Courier"/>
               </a:rPr>
-              <a:t>      group </a:t>
+              <a:t>      team </a:t>
             </a:r>
             <a:r>
               <a:rPr>
@@ -8651,7 +8723,25 @@
                 </a:solidFill>
                 <a:latin typeface="Courier"/>
               </a:rPr>
-              <a:t>"cephalopods"</a:t>
+              <a:t>"botany"</a:t>
+            </a:r>
+            <a:r>
+              <a:rPr>
+                <a:solidFill>
+                  <a:srgbClr val="003B4F"/>
+                </a:solidFill>
+                <a:latin typeface="Courier"/>
+              </a:rPr>
+              <a:t>     </a:t>
+            </a:r>
+            <a:r>
+              <a:rPr>
+                <a:solidFill>
+                  <a:srgbClr val="5E5E5E"/>
+                </a:solidFill>
+                <a:latin typeface="Courier"/>
+              </a:rPr>
+              <a:t>~</a:t>
             </a:r>
             <a:r>
               <a:rPr>
@@ -8665,10 +8755,74 @@
             <a:r>
               <a:rPr>
                 <a:solidFill>
+                  <a:srgbClr val="20794D"/>
+                </a:solidFill>
+                <a:latin typeface="Courier"/>
+              </a:rPr>
+              <a:t>"BOT"</a:t>
+            </a:r>
+            <a:r>
+              <a:rPr>
+                <a:solidFill>
+                  <a:srgbClr val="003B4F"/>
+                </a:solidFill>
+                <a:latin typeface="Courier"/>
+              </a:rPr>
+              <a:t>,</a:t>
+            </a:r>
+            <a:br/>
+            <a:r>
+              <a:rPr>
+                <a:solidFill>
+                  <a:srgbClr val="003B4F"/>
+                </a:solidFill>
+                <a:latin typeface="Courier"/>
+              </a:rPr>
+              <a:t>      team </a:t>
+            </a:r>
+            <a:r>
+              <a:rPr>
+                <a:solidFill>
                   <a:srgbClr val="5E5E5E"/>
                 </a:solidFill>
                 <a:latin typeface="Courier"/>
               </a:rPr>
+              <a:t>==</a:t>
+            </a:r>
+            <a:r>
+              <a:rPr>
+                <a:solidFill>
+                  <a:srgbClr val="003B4F"/>
+                </a:solidFill>
+                <a:latin typeface="Courier"/>
+              </a:rPr>
+              <a:t> </a:t>
+            </a:r>
+            <a:r>
+              <a:rPr>
+                <a:solidFill>
+                  <a:srgbClr val="20794D"/>
+                </a:solidFill>
+                <a:latin typeface="Courier"/>
+              </a:rPr>
+              <a:t>"grace_jace"</a:t>
+            </a:r>
+            <a:r>
+              <a:rPr>
+                <a:solidFill>
+                  <a:srgbClr val="003B4F"/>
+                </a:solidFill>
+                <a:latin typeface="Courier"/>
+              </a:rPr>
+              <a:t> </a:t>
+            </a:r>
+            <a:r>
+              <a:rPr>
+                <a:solidFill>
+                  <a:srgbClr val="5E5E5E"/>
+                </a:solidFill>
+                <a:latin typeface="Courier"/>
+              </a:rPr>
               <a:t>~</a:t>
             </a:r>
             <a:r>
@@ -8687,7 +8841,7 @@
                 </a:solidFill>
                 <a:latin typeface="Courier"/>
               </a:rPr>
-              <a:t>"CEPH"</a:t>
+              <a:t>"GRJ"</a:t>
             </a:r>
             <a:r>
               <a:rPr>
@@ -8706,7 +8860,7 @@
                 </a:solidFill>
                 <a:latin typeface="Courier"/>
               </a:rPr>
-              <a:t>      group </a:t>
+              <a:t>      team </a:t>
             </a:r>
             <a:r>
               <a:rPr>
@@ -8733,8 +8887,136 @@
                 </a:solidFill>
                 <a:latin typeface="Courier"/>
               </a:rPr>
-              <a:t>"salmon"</a:t>
-            </a:r>
+              <a:t>"one"</a:t>
+            </a:r>
+            <a:r>
+              <a:rPr>
+                <a:solidFill>
+                  <a:srgbClr val="003B4F"/>
+                </a:solidFill>
+                <a:latin typeface="Courier"/>
+              </a:rPr>
+              <a:t>        </a:t>
+            </a:r>
+            <a:r>
+              <a:rPr>
+                <a:solidFill>
+                  <a:srgbClr val="5E5E5E"/>
+                </a:solidFill>
+                <a:latin typeface="Courier"/>
+              </a:rPr>
+              <a:t>~</a:t>
+            </a:r>
+            <a:r>
+              <a:rPr>
+                <a:solidFill>
+                  <a:srgbClr val="003B4F"/>
+                </a:solidFill>
+                <a:latin typeface="Courier"/>
+              </a:rPr>
+              <a:t> </a:t>
+            </a:r>
+            <a:r>
+              <a:rPr>
+                <a:solidFill>
+                  <a:srgbClr val="20794D"/>
+                </a:solidFill>
+                <a:latin typeface="Courier"/>
+              </a:rPr>
+              <a:t>"ONE"</a:t>
+            </a:r>
+            <a:r>
+              <a:rPr>
+                <a:solidFill>
+                  <a:srgbClr val="003B4F"/>
+                </a:solidFill>
+                <a:latin typeface="Courier"/>
+              </a:rPr>
+              <a:t>,</a:t>
+            </a:r>
+            <a:br/>
+            <a:r>
+              <a:rPr>
+                <a:solidFill>
+                  <a:srgbClr val="003B4F"/>
+                </a:solidFill>
+                <a:latin typeface="Courier"/>
+              </a:rPr>
+              <a:t>      team </a:t>
+            </a:r>
+            <a:r>
+              <a:rPr>
+                <a:solidFill>
+                  <a:srgbClr val="5E5E5E"/>
+                </a:solidFill>
+                <a:latin typeface="Courier"/>
+              </a:rPr>
+              <a:t>==</a:t>
+            </a:r>
+            <a:r>
+              <a:rPr>
+                <a:solidFill>
+                  <a:srgbClr val="003B4F"/>
+                </a:solidFill>
+                <a:latin typeface="Courier"/>
+              </a:rPr>
+              <a:t> </a:t>
+            </a:r>
+            <a:r>
+              <a:rPr>
+                <a:solidFill>
+                  <a:srgbClr val="20794D"/>
+                </a:solidFill>
+                <a:latin typeface="Courier"/>
+              </a:rPr>
+              <a:t>"waterbugs"</a:t>
+            </a:r>
+            <a:r>
+              <a:rPr>
+                <a:solidFill>
+                  <a:srgbClr val="003B4F"/>
+                </a:solidFill>
+                <a:latin typeface="Courier"/>
+              </a:rPr>
+              <a:t>  </a:t>
+            </a:r>
+            <a:r>
+              <a:rPr>
+                <a:solidFill>
+                  <a:srgbClr val="5E5E5E"/>
+                </a:solidFill>
+                <a:latin typeface="Courier"/>
+              </a:rPr>
+              <a:t>~</a:t>
+            </a:r>
+            <a:r>
+              <a:rPr>
+                <a:solidFill>
+                  <a:srgbClr val="003B4F"/>
+                </a:solidFill>
+                <a:latin typeface="Courier"/>
+              </a:rPr>
+              <a:t> </a:t>
+            </a:r>
+            <a:r>
+              <a:rPr>
+                <a:solidFill>
+                  <a:srgbClr val="20794D"/>
+                </a:solidFill>
+                <a:latin typeface="Courier"/>
+              </a:rPr>
+              <a:t>"WBG"</a:t>
+            </a:r>
+            <a:r>
+              <a:rPr>
+                <a:solidFill>
+                  <a:srgbClr val="003B4F"/>
+                </a:solidFill>
+                <a:latin typeface="Courier"/>
+              </a:rPr>
+              <a:t>,</a:t>
+            </a:r>
+            <a:br/>
             <a:r>
               <a:rPr>
                 <a:solidFill>
@@ -8747,6 +9029,24 @@
             <a:r>
               <a:rPr>
                 <a:solidFill>
+                  <a:srgbClr val="8F5902"/>
+                </a:solidFill>
+                <a:latin typeface="Courier"/>
+              </a:rPr>
+              <a:t>TRUE</a:t>
+            </a:r>
+            <a:r>
+              <a:rPr>
+                <a:solidFill>
+                  <a:srgbClr val="003B4F"/>
+                </a:solidFill>
+                <a:latin typeface="Courier"/>
+              </a:rPr>
+              <a:t>                 </a:t>
+            </a:r>
+            <a:r>
+              <a:rPr>
+                <a:solidFill>
                   <a:srgbClr val="5E5E5E"/>
                 </a:solidFill>
                 <a:latin typeface="Courier"/>
@@ -8769,16 +9069,7 @@
                 </a:solidFill>
                 <a:latin typeface="Courier"/>
               </a:rPr>
-              <a:t>"SALM"</a:t>
-            </a:r>
-            <a:r>
-              <a:rPr>
-                <a:solidFill>
-                  <a:srgbClr val="003B4F"/>
-                </a:solidFill>
-                <a:latin typeface="Courier"/>
-              </a:rPr>
-              <a:t>,</a:t>
+              <a:t>"UNK"</a:t>
             </a:r>
             <a:br/>
             <a:r>
@@ -8788,7 +9079,17 @@
                 </a:solidFill>
                 <a:latin typeface="Courier"/>
               </a:rPr>
-              <a:t>      group </a:t>
+              <a:t>    )</a:t>
+            </a:r>
+            <a:br/>
+            <a:r>
+              <a:rPr>
+                <a:solidFill>
+                  <a:srgbClr val="003B4F"/>
+                </a:solidFill>
+                <a:latin typeface="Courier"/>
+              </a:rPr>
+              <a:t>  ) </a:t>
             </a:r>
             <a:r>
               <a:rPr>
@@ -8797,70 +9098,7 @@
                 </a:solidFill>
                 <a:latin typeface="Courier"/>
               </a:rPr>
-              <a:t>==</a:t>
-            </a:r>
-            <a:r>
-              <a:rPr>
-                <a:solidFill>
-                  <a:srgbClr val="003B4F"/>
-                </a:solidFill>
-                <a:latin typeface="Courier"/>
-              </a:rPr>
-              <a:t> </a:t>
-            </a:r>
-            <a:r>
-              <a:rPr>
-                <a:solidFill>
-                  <a:srgbClr val="20794D"/>
-                </a:solidFill>
-                <a:latin typeface="Courier"/>
-              </a:rPr>
-              <a:t>"crayfish"</a:t>
-            </a:r>
-            <a:r>
-              <a:rPr>
-                <a:solidFill>
-                  <a:srgbClr val="003B4F"/>
-                </a:solidFill>
-                <a:latin typeface="Courier"/>
-              </a:rPr>
-              <a:t>    </a:t>
-            </a:r>
-            <a:r>
-              <a:rPr>
-                <a:solidFill>
-                  <a:srgbClr val="5E5E5E"/>
-                </a:solidFill>
-                <a:latin typeface="Courier"/>
-              </a:rPr>
-              <a:t>~</a:t>
-            </a:r>
-            <a:r>
-              <a:rPr>
-                <a:solidFill>
-                  <a:srgbClr val="003B4F"/>
-                </a:solidFill>
-                <a:latin typeface="Courier"/>
-              </a:rPr>
-              <a:t> </a:t>
-            </a:r>
-            <a:r>
-              <a:rPr>
-                <a:solidFill>
-                  <a:srgbClr val="20794D"/>
-                </a:solidFill>
-                <a:latin typeface="Courier"/>
-              </a:rPr>
-              <a:t>"CRAY"</a:t>
-            </a:r>
-            <a:r>
-              <a:rPr>
-                <a:solidFill>
-                  <a:srgbClr val="003B4F"/>
-                </a:solidFill>
-                <a:latin typeface="Courier"/>
-              </a:rPr>
-              <a:t>,</a:t>
+              <a:t>|&gt;</a:t>
             </a:r>
             <a:br/>
             <a:r>
@@ -8870,172 +9108,6 @@
                 </a:solidFill>
                 <a:latin typeface="Courier"/>
               </a:rPr>
-              <a:t>      group </a:t>
-            </a:r>
-            <a:r>
-              <a:rPr>
-                <a:solidFill>
-                  <a:srgbClr val="5E5E5E"/>
-                </a:solidFill>
-                <a:latin typeface="Courier"/>
-              </a:rPr>
-              <a:t>==</a:t>
-            </a:r>
-            <a:r>
-              <a:rPr>
-                <a:solidFill>
-                  <a:srgbClr val="003B4F"/>
-                </a:solidFill>
-                <a:latin typeface="Courier"/>
-              </a:rPr>
-              <a:t> </a:t>
-            </a:r>
-            <a:r>
-              <a:rPr>
-                <a:solidFill>
-                  <a:srgbClr val="20794D"/>
-                </a:solidFill>
-                <a:latin typeface="Courier"/>
-              </a:rPr>
-              <a:t>"snail"</a:t>
-            </a:r>
-            <a:r>
-              <a:rPr>
-                <a:solidFill>
-                  <a:srgbClr val="003B4F"/>
-                </a:solidFill>
-                <a:latin typeface="Courier"/>
-              </a:rPr>
-              <a:t>       </a:t>
-            </a:r>
-            <a:r>
-              <a:rPr>
-                <a:solidFill>
-                  <a:srgbClr val="5E5E5E"/>
-                </a:solidFill>
-                <a:latin typeface="Courier"/>
-              </a:rPr>
-              <a:t>~</a:t>
-            </a:r>
-            <a:r>
-              <a:rPr>
-                <a:solidFill>
-                  <a:srgbClr val="003B4F"/>
-                </a:solidFill>
-                <a:latin typeface="Courier"/>
-              </a:rPr>
-              <a:t> </a:t>
-            </a:r>
-            <a:r>
-              <a:rPr>
-                <a:solidFill>
-                  <a:srgbClr val="20794D"/>
-                </a:solidFill>
-                <a:latin typeface="Courier"/>
-              </a:rPr>
-              <a:t>"SNAI"</a:t>
-            </a:r>
-            <a:r>
-              <a:rPr>
-                <a:solidFill>
-                  <a:srgbClr val="003B4F"/>
-                </a:solidFill>
-                <a:latin typeface="Courier"/>
-              </a:rPr>
-              <a:t>,</a:t>
-            </a:r>
-            <a:br/>
-            <a:r>
-              <a:rPr>
-                <a:solidFill>
-                  <a:srgbClr val="003B4F"/>
-                </a:solidFill>
-                <a:latin typeface="Courier"/>
-              </a:rPr>
-              <a:t>      </a:t>
-            </a:r>
-            <a:r>
-              <a:rPr>
-                <a:solidFill>
-                  <a:srgbClr val="8F5902"/>
-                </a:solidFill>
-                <a:latin typeface="Courier"/>
-              </a:rPr>
-              <a:t>TRUE</a:t>
-            </a:r>
-            <a:r>
-              <a:rPr>
-                <a:solidFill>
-                  <a:srgbClr val="003B4F"/>
-                </a:solidFill>
-                <a:latin typeface="Courier"/>
-              </a:rPr>
-              <a:t>                   </a:t>
-            </a:r>
-            <a:r>
-              <a:rPr>
-                <a:solidFill>
-                  <a:srgbClr val="5E5E5E"/>
-                </a:solidFill>
-                <a:latin typeface="Courier"/>
-              </a:rPr>
-              <a:t>~</a:t>
-            </a:r>
-            <a:r>
-              <a:rPr>
-                <a:solidFill>
-                  <a:srgbClr val="003B4F"/>
-                </a:solidFill>
-                <a:latin typeface="Courier"/>
-              </a:rPr>
-              <a:t> </a:t>
-            </a:r>
-            <a:r>
-              <a:rPr>
-                <a:solidFill>
-                  <a:srgbClr val="20794D"/>
-                </a:solidFill>
-                <a:latin typeface="Courier"/>
-              </a:rPr>
-              <a:t>"UNK"</a:t>
-            </a:r>
-            <a:br/>
-            <a:r>
-              <a:rPr>
-                <a:solidFill>
-                  <a:srgbClr val="003B4F"/>
-                </a:solidFill>
-                <a:latin typeface="Courier"/>
-              </a:rPr>
-              <a:t>    )</a:t>
-            </a:r>
-            <a:br/>
-            <a:r>
-              <a:rPr>
-                <a:solidFill>
-                  <a:srgbClr val="003B4F"/>
-                </a:solidFill>
-                <a:latin typeface="Courier"/>
-              </a:rPr>
-              <a:t>  ) </a:t>
-            </a:r>
-            <a:r>
-              <a:rPr>
-                <a:solidFill>
-                  <a:srgbClr val="5E5E5E"/>
-                </a:solidFill>
-                <a:latin typeface="Courier"/>
-              </a:rPr>
-              <a:t>|&gt;</a:t>
-            </a:r>
-            <a:br/>
-            <a:r>
-              <a:rPr>
-                <a:solidFill>
-                  <a:srgbClr val="003B4F"/>
-                </a:solidFill>
-                <a:latin typeface="Courier"/>
-              </a:rPr>
               <a:t>  </a:t>
             </a:r>
             <a:r>
@@ -9054,7 +9126,7 @@
                 </a:solidFill>
                 <a:latin typeface="Courier"/>
               </a:rPr>
-              <a:t>(group, team_code)</a:t>
+              <a:t>(team, team_code)</a:t>
             </a:r>
           </a:p>
           <a:p>
@@ -9066,12 +9138,12 @@
                 <a:latin typeface="Courier"/>
               </a:rPr>
               <a:t># A tibble: 4 × 2
-  group       team_code
-  &lt;chr&gt;       &lt;chr&gt;    
-1 cephalopods CEPH     
-2 salmon      SALM     
-3 crayfish    CRAY     
-4 snail       SNAI     </a:t>
+  team       team_code
+  &lt;chr&gt;      &lt;chr&gt;    
+1 grace_jace GRJ      
+2 botany     BOT      
+3 one        ONE      
+4 waterbugs  WBG      </a:t>
             </a:r>
           </a:p>
         </p:txBody>
@@ -9336,7 +9408,7 @@
                 </a:solidFill>
                 <a:latin typeface="Courier"/>
               </a:rPr>
-              <a:t>(length_mm)</a:t>
+              <a:t>(needle_length_mm)</a:t>
             </a:r>
           </a:p>
           <a:p>
@@ -9347,20 +9419,20 @@
               <a:rPr>
                 <a:latin typeface="Courier"/>
               </a:rPr>
-              <a:t># A tibble: 48 × 6
-   date    group       n_s   sun   tree_no length_mm
-   &lt;chr&gt;   &lt;chr&gt;       &lt;chr&gt; &lt;chr&gt;   &lt;dbl&gt;     &lt;dbl&gt;
- 1 3/20/25 salmon      s     sunny       2        12
- 2 3/20/25 salmon      s     sunny       2        12
- 3 3/20/25 salmon      s     sunny       2        12
- 4 3/20/25 cephalopods s     sunny       1        13
- 5 3/20/25 salmon      s     sunny       2        13
- 6 3/20/25 crayfish    s     sunny       3        13
- 7 3/20/25 cephalopods s     sunny       1        14
- 8 3/20/25 salmon      s     sunny       2        14
- 9 3/20/25 salmon      s     sunny       2        14
-10 3/20/25 crayfish    s     sunny       3        14
-# ℹ 38 more rows</a:t>
+              <a:t># A tibble: 64 × 6
+   source_file            team  replicate side  needle_length_mm needle_width_mm
+   &lt;chr&gt;                  &lt;chr&gt;     &lt;dbl&gt; &lt;chr&gt;            &lt;dbl&gt;           &lt;dbl&gt;
+ 1 Needle_Length_Suhr:Bu… wate…         2 shady             7.23            1.16
+ 2 Needle_Length_Suhr:Bu… wate…         1 shady            10.5             1.22
+ 3 Kehr_and_Baalke.csv    one           8 shady            10.6             0.98
+ 4 Needle_Length_Suhr:Bu… wate…         2 sunny            10.7             1.08
+ 5 Bartell_Shingledecker… grac…         7 sunny            10.9             0.81
+ 6 Needle_Length_Suhr:Bu… wate…         7 shady            11.3             1.13
+ 7 Kehr_and_Baalke.csv    one           4 sunny            11.4             1.17
+ 8 Kehr_and_Baalke.csv    one           1 shady            11.5             1.11
+ 9 heal_thome_pineneedle… bota…         8 shady            11.6             0.66
+10 Needle_Length_Suhr:Bu… wate…         3 shady            11.6             1.27
+# ℹ 54 more rows</a:t>
             </a:r>
           </a:p>
           <a:p>
@@ -9438,7 +9510,7 @@
                 </a:solidFill>
                 <a:latin typeface="Courier"/>
               </a:rPr>
-              <a:t>(length_mm))</a:t>
+              <a:t>(needle_length_mm))</a:t>
             </a:r>
           </a:p>
           <a:p>
@@ -9449,20 +9521,20 @@
               <a:rPr>
                 <a:latin typeface="Courier"/>
               </a:rPr>
-              <a:t># A tibble: 48 × 6
-   date    group       n_s   sun   tree_no length_mm
-   &lt;chr&gt;   &lt;chr&gt;       &lt;chr&gt; &lt;chr&gt;   &lt;dbl&gt;     &lt;dbl&gt;
- 1 3/20/25 cephalopods n     shady       1        25
- 2 3/20/25 crayfish    n     shady       3        25
- 3 3/20/25 cephalopods n     shady       1        23
- 4 3/20/25 salmon      n     shady       2        23
- 5 3/20/25 crayfish    n     shady       3        23
- 6 3/20/25 snail       n     shady       4        23
- 7 3/20/25 cephalopods n     shady       1        21
- 8 3/20/25 cephalopods n     shady       1        21
- 9 3/20/25 salmon      n     shady       2        21
-10 3/20/25 crayfish    n     shady       3        21
-# ℹ 38 more rows</a:t>
+              <a:t># A tibble: 64 × 6
+   source_file            team  replicate side  needle_length_mm needle_width_mm
+   &lt;chr&gt;                  &lt;chr&gt;     &lt;dbl&gt; &lt;chr&gt;            &lt;dbl&gt;           &lt;dbl&gt;
+ 1 heal_thome_pineneedle… bota…         2 shady             20.7            0.77
+ 2 Needle_Length_Suhr:Bu… wate…         3 sunny             19.5            1.58
+ 3 Bartell_Shingledecker… grac…         6 sunny             19.2            0.99
+ 4 heal_thome_pineneedle… bota…         8 sunny             18.8            1.12
+ 5 heal_thome_pineneedle… bota…         2 sunny             18.7            1.07
+ 6 heal_thome_pineneedle… bota…         6 sunny             18.5            1.18
+ 7 Bartell_Shingledecker… grac…         1 sunny             18.4            0.79
+ 8 Bartell_Shingledecker… grac…         7 shady             17.9            0.69
+ 9 Bartell_Shingledecker… grac…         3 sunny             17.7            1.12
+10 Kehr_and_Baalke.csv    one           5 shady             17.7            1   
+# ℹ 54 more rows</a:t>
             </a:r>
           </a:p>
         </p:txBody>
@@ -9643,7 +9715,7 @@
                 </a:solidFill>
                 <a:latin typeface="Courier"/>
               </a:rPr>
-              <a:t>(n_s, </a:t>
+              <a:t>(side, </a:t>
             </a:r>
             <a:r>
               <a:rPr>
@@ -9661,7 +9733,7 @@
                 </a:solidFill>
                 <a:latin typeface="Courier"/>
               </a:rPr>
-              <a:t>(length_mm))</a:t>
+              <a:t>(needle_length_mm))</a:t>
             </a:r>
           </a:p>
           <a:p>
@@ -9672,20 +9744,20 @@
               <a:rPr>
                 <a:latin typeface="Courier"/>
               </a:rPr>
-              <a:t># A tibble: 48 × 6
-   date    group       n_s   sun   tree_no length_mm
-   &lt;chr&gt;   &lt;chr&gt;       &lt;chr&gt; &lt;chr&gt;   &lt;dbl&gt;     &lt;dbl&gt;
- 1 3/20/25 cephalopods n     shady       1        25
- 2 3/20/25 crayfish    n     shady       3        25
- 3 3/20/25 cephalopods n     shady       1        23
- 4 3/20/25 salmon      n     shady       2        23
- 5 3/20/25 crayfish    n     shady       3        23
- 6 3/20/25 snail       n     shady       4        23
- 7 3/20/25 cephalopods n     shady       1        21
- 8 3/20/25 cephalopods n     shady       1        21
- 9 3/20/25 salmon      n     shady       2        21
-10 3/20/25 crayfish    n     shady       3        21
-# ℹ 38 more rows</a:t>
+              <a:t># A tibble: 64 × 6
+   source_file            team  replicate side  needle_length_mm needle_width_mm
+   &lt;chr&gt;                  &lt;chr&gt;     &lt;dbl&gt; &lt;chr&gt;            &lt;dbl&gt;           &lt;dbl&gt;
+ 1 heal_thome_pineneedle… bota…         2 shady             20.7            0.77
+ 2 Bartell_Shingledecker… grac…         7 shady             17.9            0.69
+ 3 Kehr_and_Baalke.csv    one           5 shady             17.7            1   
+ 4 heal_thome_pineneedle… bota…         5 shady             17.6            0.79
+ 5 heal_thome_pineneedle… bota…         3 shady             17.6            0.94
+ 6 Bartell_Shingledecker… grac…         2 shady             17.0            0.84
+ 7 Bartell_Shingledecker… grac…         1 shady             16.6            0.75
+ 8 heal_thome_pineneedle… bota…         1 shady             16.5            0.65
+ 9 Bartell_Shingledecker… grac…         4 shady             15.6            0.98
+10 heal_thome_pineneedle… bota…         6 shady             15.3            0.9 
+# ℹ 54 more rows</a:t>
             </a:r>
           </a:p>
         </p:txBody>
@@ -9870,7 +9942,7 @@
                 </a:solidFill>
                 <a:latin typeface="Courier"/>
               </a:rPr>
-              <a:t>(length_mm </a:t>
+              <a:t>(needle_length_mm </a:t>
             </a:r>
             <a:r>
               <a:rPr>
@@ -9961,7 +10033,7 @@
                 </a:solidFill>
                 <a:latin typeface="Courier"/>
               </a:rPr>
-              <a:t>(group, n_s, sun, length_mm) </a:t>
+              <a:t>(team, side, needle_length_mm, needle_width_mm) </a:t>
             </a:r>
             <a:r>
               <a:rPr>
@@ -9979,16 +10051,108 @@
                 </a:solidFill>
                 <a:latin typeface="Courier"/>
               </a:rPr>
+              <a:t>  </a:t>
+            </a:r>
+            <a:r>
+              <a:rPr>
+                <a:solidFill>
+                  <a:srgbClr val="5E5E5E"/>
+                </a:solidFill>
+                <a:latin typeface="Courier"/>
+              </a:rPr>
+              <a:t># keep what we need</a:t>
+            </a:r>
+            <a:br/>
+            <a:r>
+              <a:rPr>
+                <a:solidFill>
+                  <a:srgbClr val="003B4F"/>
+                </a:solidFill>
+                <a:latin typeface="Courier"/>
+              </a:rPr>
+              <a:t>  </a:t>
+            </a:r>
+            <a:r>
+              <a:rPr>
+                <a:solidFill>
+                  <a:srgbClr val="4758AB"/>
+                </a:solidFill>
+                <a:latin typeface="Courier"/>
+              </a:rPr>
+              <a:t>mutate</a:t>
+            </a:r>
+            <a:r>
+              <a:rPr>
+                <a:solidFill>
+                  <a:srgbClr val="003B4F"/>
+                </a:solidFill>
+                <a:latin typeface="Courier"/>
+              </a:rPr>
+              <a:t>(</a:t>
+            </a:r>
+            <a:br/>
+            <a:r>
+              <a:rPr>
+                <a:solidFill>
+                  <a:srgbClr val="003B4F"/>
+                </a:solidFill>
+                <a:latin typeface="Courier"/>
+              </a:rPr>
               <a:t>    </a:t>
             </a:r>
             <a:r>
               <a:rPr>
                 <a:solidFill>
+                  <a:srgbClr val="657422"/>
+                </a:solidFill>
+                <a:latin typeface="Courier"/>
+              </a:rPr>
+              <a:t>needle_length_cm  =</a:t>
+            </a:r>
+            <a:r>
+              <a:rPr>
+                <a:solidFill>
+                  <a:srgbClr val="003B4F"/>
+                </a:solidFill>
+                <a:latin typeface="Courier"/>
+              </a:rPr>
+              <a:t> needle_length_mm </a:t>
+            </a:r>
+            <a:r>
+              <a:rPr>
+                <a:solidFill>
                   <a:srgbClr val="5E5E5E"/>
                 </a:solidFill>
                 <a:latin typeface="Courier"/>
               </a:rPr>
-              <a:t># keep what we need</a:t>
+              <a:t>/</a:t>
+            </a:r>
+            <a:r>
+              <a:rPr>
+                <a:solidFill>
+                  <a:srgbClr val="003B4F"/>
+                </a:solidFill>
+                <a:latin typeface="Courier"/>
+              </a:rPr>
+              <a:t> </a:t>
+            </a:r>
+            <a:r>
+              <a:rPr>
+                <a:solidFill>
+                  <a:srgbClr val="AD0000"/>
+                </a:solidFill>
+                <a:latin typeface="Courier"/>
+              </a:rPr>
+              <a:t>10</a:t>
+            </a:r>
+            <a:r>
+              <a:rPr>
+                <a:solidFill>
+                  <a:srgbClr val="003B4F"/>
+                </a:solidFill>
+                <a:latin typeface="Courier"/>
+              </a:rPr>
+              <a:t>,</a:t>
             </a:r>
             <a:br/>
             <a:r>
@@ -9998,6 +10162,346 @@
                 </a:solidFill>
                 <a:latin typeface="Courier"/>
               </a:rPr>
+              <a:t>    </a:t>
+            </a:r>
+            <a:r>
+              <a:rPr>
+                <a:solidFill>
+                  <a:srgbClr val="657422"/>
+                </a:solidFill>
+                <a:latin typeface="Courier"/>
+              </a:rPr>
+              <a:t>log_length =</a:t>
+            </a:r>
+            <a:r>
+              <a:rPr>
+                <a:solidFill>
+                  <a:srgbClr val="003B4F"/>
+                </a:solidFill>
+                <a:latin typeface="Courier"/>
+              </a:rPr>
+              <a:t> </a:t>
+            </a:r>
+            <a:r>
+              <a:rPr>
+                <a:solidFill>
+                  <a:srgbClr val="4758AB"/>
+                </a:solidFill>
+                <a:latin typeface="Courier"/>
+              </a:rPr>
+              <a:t>log</a:t>
+            </a:r>
+            <a:r>
+              <a:rPr>
+                <a:solidFill>
+                  <a:srgbClr val="003B4F"/>
+                </a:solidFill>
+                <a:latin typeface="Courier"/>
+              </a:rPr>
+              <a:t>(needle_length_mm),</a:t>
+            </a:r>
+            <a:br/>
+            <a:r>
+              <a:rPr>
+                <a:solidFill>
+                  <a:srgbClr val="003B4F"/>
+                </a:solidFill>
+                <a:latin typeface="Courier"/>
+              </a:rPr>
+              <a:t>    </a:t>
+            </a:r>
+            <a:r>
+              <a:rPr>
+                <a:solidFill>
+                  <a:srgbClr val="657422"/>
+                </a:solidFill>
+                <a:latin typeface="Courier"/>
+              </a:rPr>
+              <a:t>size_class =</a:t>
+            </a:r>
+            <a:r>
+              <a:rPr>
+                <a:solidFill>
+                  <a:srgbClr val="003B4F"/>
+                </a:solidFill>
+                <a:latin typeface="Courier"/>
+              </a:rPr>
+              <a:t> </a:t>
+            </a:r>
+            <a:r>
+              <a:rPr>
+                <a:solidFill>
+                  <a:srgbClr val="4758AB"/>
+                </a:solidFill>
+                <a:latin typeface="Courier"/>
+              </a:rPr>
+              <a:t>case_when</a:t>
+            </a:r>
+            <a:r>
+              <a:rPr>
+                <a:solidFill>
+                  <a:srgbClr val="003B4F"/>
+                </a:solidFill>
+                <a:latin typeface="Courier"/>
+              </a:rPr>
+              <a:t>(</a:t>
+            </a:r>
+            <a:br/>
+            <a:r>
+              <a:rPr>
+                <a:solidFill>
+                  <a:srgbClr val="003B4F"/>
+                </a:solidFill>
+                <a:latin typeface="Courier"/>
+              </a:rPr>
+              <a:t>      needle_length_mm </a:t>
+            </a:r>
+            <a:r>
+              <a:rPr>
+                <a:solidFill>
+                  <a:srgbClr val="5E5E5E"/>
+                </a:solidFill>
+                <a:latin typeface="Courier"/>
+              </a:rPr>
+              <a:t>&lt;</a:t>
+            </a:r>
+            <a:r>
+              <a:rPr>
+                <a:solidFill>
+                  <a:srgbClr val="003B4F"/>
+                </a:solidFill>
+                <a:latin typeface="Courier"/>
+              </a:rPr>
+              <a:t> </a:t>
+            </a:r>
+            <a:r>
+              <a:rPr>
+                <a:solidFill>
+                  <a:srgbClr val="AD0000"/>
+                </a:solidFill>
+                <a:latin typeface="Courier"/>
+              </a:rPr>
+              <a:t>13</a:t>
+            </a:r>
+            <a:r>
+              <a:rPr>
+                <a:solidFill>
+                  <a:srgbClr val="003B4F"/>
+                </a:solidFill>
+                <a:latin typeface="Courier"/>
+              </a:rPr>
+              <a:t> </a:t>
+            </a:r>
+            <a:r>
+              <a:rPr>
+                <a:solidFill>
+                  <a:srgbClr val="5E5E5E"/>
+                </a:solidFill>
+                <a:latin typeface="Courier"/>
+              </a:rPr>
+              <a:t>~</a:t>
+            </a:r>
+            <a:r>
+              <a:rPr>
+                <a:solidFill>
+                  <a:srgbClr val="003B4F"/>
+                </a:solidFill>
+                <a:latin typeface="Courier"/>
+              </a:rPr>
+              <a:t> </a:t>
+            </a:r>
+            <a:r>
+              <a:rPr>
+                <a:solidFill>
+                  <a:srgbClr val="20794D"/>
+                </a:solidFill>
+                <a:latin typeface="Courier"/>
+              </a:rPr>
+              <a:t>"short"</a:t>
+            </a:r>
+            <a:r>
+              <a:rPr>
+                <a:solidFill>
+                  <a:srgbClr val="003B4F"/>
+                </a:solidFill>
+                <a:latin typeface="Courier"/>
+              </a:rPr>
+              <a:t>,</a:t>
+            </a:r>
+            <a:br/>
+            <a:r>
+              <a:rPr>
+                <a:solidFill>
+                  <a:srgbClr val="003B4F"/>
+                </a:solidFill>
+                <a:latin typeface="Courier"/>
+              </a:rPr>
+              <a:t>      needle_length_mm </a:t>
+            </a:r>
+            <a:r>
+              <a:rPr>
+                <a:solidFill>
+                  <a:srgbClr val="5E5E5E"/>
+                </a:solidFill>
+                <a:latin typeface="Courier"/>
+              </a:rPr>
+              <a:t>&lt;</a:t>
+            </a:r>
+            <a:r>
+              <a:rPr>
+                <a:solidFill>
+                  <a:srgbClr val="003B4F"/>
+                </a:solidFill>
+                <a:latin typeface="Courier"/>
+              </a:rPr>
+              <a:t> </a:t>
+            </a:r>
+            <a:r>
+              <a:rPr>
+                <a:solidFill>
+                  <a:srgbClr val="AD0000"/>
+                </a:solidFill>
+                <a:latin typeface="Courier"/>
+              </a:rPr>
+              <a:t>16</a:t>
+            </a:r>
+            <a:r>
+              <a:rPr>
+                <a:solidFill>
+                  <a:srgbClr val="003B4F"/>
+                </a:solidFill>
+                <a:latin typeface="Courier"/>
+              </a:rPr>
+              <a:t> </a:t>
+            </a:r>
+            <a:r>
+              <a:rPr>
+                <a:solidFill>
+                  <a:srgbClr val="5E5E5E"/>
+                </a:solidFill>
+                <a:latin typeface="Courier"/>
+              </a:rPr>
+              <a:t>~</a:t>
+            </a:r>
+            <a:r>
+              <a:rPr>
+                <a:solidFill>
+                  <a:srgbClr val="003B4F"/>
+                </a:solidFill>
+                <a:latin typeface="Courier"/>
+              </a:rPr>
+              <a:t> </a:t>
+            </a:r>
+            <a:r>
+              <a:rPr>
+                <a:solidFill>
+                  <a:srgbClr val="20794D"/>
+                </a:solidFill>
+                <a:latin typeface="Courier"/>
+              </a:rPr>
+              <a:t>"medium"</a:t>
+            </a:r>
+            <a:r>
+              <a:rPr>
+                <a:solidFill>
+                  <a:srgbClr val="003B4F"/>
+                </a:solidFill>
+                <a:latin typeface="Courier"/>
+              </a:rPr>
+              <a:t>,</a:t>
+            </a:r>
+            <a:br/>
+            <a:r>
+              <a:rPr>
+                <a:solidFill>
+                  <a:srgbClr val="003B4F"/>
+                </a:solidFill>
+                <a:latin typeface="Courier"/>
+              </a:rPr>
+              <a:t>      </a:t>
+            </a:r>
+            <a:r>
+              <a:rPr>
+                <a:solidFill>
+                  <a:srgbClr val="8F5902"/>
+                </a:solidFill>
+                <a:latin typeface="Courier"/>
+              </a:rPr>
+              <a:t>TRUE</a:t>
+            </a:r>
+            <a:r>
+              <a:rPr>
+                <a:solidFill>
+                  <a:srgbClr val="003B4F"/>
+                </a:solidFill>
+                <a:latin typeface="Courier"/>
+              </a:rPr>
+              <a:t>                  </a:t>
+            </a:r>
+            <a:r>
+              <a:rPr>
+                <a:solidFill>
+                  <a:srgbClr val="5E5E5E"/>
+                </a:solidFill>
+                <a:latin typeface="Courier"/>
+              </a:rPr>
+              <a:t>~</a:t>
+            </a:r>
+            <a:r>
+              <a:rPr>
+                <a:solidFill>
+                  <a:srgbClr val="003B4F"/>
+                </a:solidFill>
+                <a:latin typeface="Courier"/>
+              </a:rPr>
+              <a:t> </a:t>
+            </a:r>
+            <a:r>
+              <a:rPr>
+                <a:solidFill>
+                  <a:srgbClr val="20794D"/>
+                </a:solidFill>
+                <a:latin typeface="Courier"/>
+              </a:rPr>
+              <a:t>"long"</a:t>
+            </a:r>
+            <a:br/>
+            <a:r>
+              <a:rPr>
+                <a:solidFill>
+                  <a:srgbClr val="003B4F"/>
+                </a:solidFill>
+                <a:latin typeface="Courier"/>
+              </a:rPr>
+              <a:t>    )</a:t>
+            </a:r>
+            <a:br/>
+            <a:r>
+              <a:rPr>
+                <a:solidFill>
+                  <a:srgbClr val="003B4F"/>
+                </a:solidFill>
+                <a:latin typeface="Courier"/>
+              </a:rPr>
+              <a:t>  ) </a:t>
+            </a:r>
+            <a:r>
+              <a:rPr>
+                <a:solidFill>
+                  <a:srgbClr val="5E5E5E"/>
+                </a:solidFill>
+                <a:latin typeface="Courier"/>
+              </a:rPr>
+              <a:t>|&gt;</a:t>
+            </a:r>
+            <a:br/>
+            <a:r>
+              <a:rPr>
+                <a:solidFill>
+                  <a:srgbClr val="003B4F"/>
+                </a:solidFill>
+                <a:latin typeface="Courier"/>
+              </a:rPr>
               <a:t>  </a:t>
             </a:r>
             <a:r>
@@ -10007,108 +10511,16 @@
                 </a:solidFill>
                 <a:latin typeface="Courier"/>
               </a:rPr>
-              <a:t>mutate</a:t>
-            </a:r>
-            <a:r>
-              <a:rPr>
-                <a:solidFill>
-                  <a:srgbClr val="003B4F"/>
-                </a:solidFill>
-                <a:latin typeface="Courier"/>
-              </a:rPr>
-              <a:t>(</a:t>
-            </a:r>
-            <a:br/>
-            <a:r>
-              <a:rPr>
-                <a:solidFill>
-                  <a:srgbClr val="003B4F"/>
-                </a:solidFill>
-                <a:latin typeface="Courier"/>
-              </a:rPr>
-              <a:t>    </a:t>
-            </a:r>
-            <a:r>
-              <a:rPr>
-                <a:solidFill>
-                  <a:srgbClr val="657422"/>
-                </a:solidFill>
-                <a:latin typeface="Courier"/>
-              </a:rPr>
-              <a:t>length_cm  =</a:t>
-            </a:r>
-            <a:r>
-              <a:rPr>
-                <a:solidFill>
-                  <a:srgbClr val="003B4F"/>
-                </a:solidFill>
-                <a:latin typeface="Courier"/>
-              </a:rPr>
-              <a:t> length_mm </a:t>
-            </a:r>
-            <a:r>
-              <a:rPr>
-                <a:solidFill>
-                  <a:srgbClr val="5E5E5E"/>
-                </a:solidFill>
-                <a:latin typeface="Courier"/>
-              </a:rPr>
-              <a:t>/</a:t>
-            </a:r>
-            <a:r>
-              <a:rPr>
-                <a:solidFill>
-                  <a:srgbClr val="003B4F"/>
-                </a:solidFill>
-                <a:latin typeface="Courier"/>
-              </a:rPr>
-              <a:t> </a:t>
-            </a:r>
-            <a:r>
-              <a:rPr>
-                <a:solidFill>
-                  <a:srgbClr val="AD0000"/>
-                </a:solidFill>
-                <a:latin typeface="Courier"/>
-              </a:rPr>
-              <a:t>10</a:t>
-            </a:r>
-            <a:r>
-              <a:rPr>
-                <a:solidFill>
-                  <a:srgbClr val="003B4F"/>
-                </a:solidFill>
-                <a:latin typeface="Courier"/>
-              </a:rPr>
-              <a:t>,</a:t>
-            </a:r>
-            <a:br/>
-            <a:r>
-              <a:rPr>
-                <a:solidFill>
-                  <a:srgbClr val="003B4F"/>
-                </a:solidFill>
-                <a:latin typeface="Courier"/>
-              </a:rPr>
-              <a:t>    </a:t>
-            </a:r>
-            <a:r>
-              <a:rPr>
-                <a:solidFill>
-                  <a:srgbClr val="657422"/>
-                </a:solidFill>
-                <a:latin typeface="Courier"/>
-              </a:rPr>
-              <a:t>log_length =</a:t>
-            </a:r>
-            <a:r>
-              <a:rPr>
-                <a:solidFill>
-                  <a:srgbClr val="003B4F"/>
-                </a:solidFill>
-                <a:latin typeface="Courier"/>
-              </a:rPr>
-              <a:t> </a:t>
+              <a:t>arrange</a:t>
+            </a:r>
+            <a:r>
+              <a:rPr>
+                <a:solidFill>
+                  <a:srgbClr val="003B4F"/>
+                </a:solidFill>
+                <a:latin typeface="Courier"/>
+              </a:rPr>
+              <a:t>(side, </a:t>
             </a:r>
             <a:r>
               <a:rPr>
@@ -10117,346 +10529,6 @@
                 </a:solidFill>
                 <a:latin typeface="Courier"/>
               </a:rPr>
-              <a:t>log</a:t>
-            </a:r>
-            <a:r>
-              <a:rPr>
-                <a:solidFill>
-                  <a:srgbClr val="003B4F"/>
-                </a:solidFill>
-                <a:latin typeface="Courier"/>
-              </a:rPr>
-              <a:t>(length_mm),</a:t>
-            </a:r>
-            <a:br/>
-            <a:r>
-              <a:rPr>
-                <a:solidFill>
-                  <a:srgbClr val="003B4F"/>
-                </a:solidFill>
-                <a:latin typeface="Courier"/>
-              </a:rPr>
-              <a:t>    </a:t>
-            </a:r>
-            <a:r>
-              <a:rPr>
-                <a:solidFill>
-                  <a:srgbClr val="657422"/>
-                </a:solidFill>
-                <a:latin typeface="Courier"/>
-              </a:rPr>
-              <a:t>size_class =</a:t>
-            </a:r>
-            <a:r>
-              <a:rPr>
-                <a:solidFill>
-                  <a:srgbClr val="003B4F"/>
-                </a:solidFill>
-                <a:latin typeface="Courier"/>
-              </a:rPr>
-              <a:t> </a:t>
-            </a:r>
-            <a:r>
-              <a:rPr>
-                <a:solidFill>
-                  <a:srgbClr val="4758AB"/>
-                </a:solidFill>
-                <a:latin typeface="Courier"/>
-              </a:rPr>
-              <a:t>case_when</a:t>
-            </a:r>
-            <a:r>
-              <a:rPr>
-                <a:solidFill>
-                  <a:srgbClr val="003B4F"/>
-                </a:solidFill>
-                <a:latin typeface="Courier"/>
-              </a:rPr>
-              <a:t>(</a:t>
-            </a:r>
-            <a:br/>
-            <a:r>
-              <a:rPr>
-                <a:solidFill>
-                  <a:srgbClr val="003B4F"/>
-                </a:solidFill>
-                <a:latin typeface="Courier"/>
-              </a:rPr>
-              <a:t>      length_mm </a:t>
-            </a:r>
-            <a:r>
-              <a:rPr>
-                <a:solidFill>
-                  <a:srgbClr val="5E5E5E"/>
-                </a:solidFill>
-                <a:latin typeface="Courier"/>
-              </a:rPr>
-              <a:t>&lt;</a:t>
-            </a:r>
-            <a:r>
-              <a:rPr>
-                <a:solidFill>
-                  <a:srgbClr val="003B4F"/>
-                </a:solidFill>
-                <a:latin typeface="Courier"/>
-              </a:rPr>
-              <a:t> </a:t>
-            </a:r>
-            <a:r>
-              <a:rPr>
-                <a:solidFill>
-                  <a:srgbClr val="AD0000"/>
-                </a:solidFill>
-                <a:latin typeface="Courier"/>
-              </a:rPr>
-              <a:t>16</a:t>
-            </a:r>
-            <a:r>
-              <a:rPr>
-                <a:solidFill>
-                  <a:srgbClr val="003B4F"/>
-                </a:solidFill>
-                <a:latin typeface="Courier"/>
-              </a:rPr>
-              <a:t> </a:t>
-            </a:r>
-            <a:r>
-              <a:rPr>
-                <a:solidFill>
-                  <a:srgbClr val="5E5E5E"/>
-                </a:solidFill>
-                <a:latin typeface="Courier"/>
-              </a:rPr>
-              <a:t>~</a:t>
-            </a:r>
-            <a:r>
-              <a:rPr>
-                <a:solidFill>
-                  <a:srgbClr val="003B4F"/>
-                </a:solidFill>
-                <a:latin typeface="Courier"/>
-              </a:rPr>
-              <a:t> </a:t>
-            </a:r>
-            <a:r>
-              <a:rPr>
-                <a:solidFill>
-                  <a:srgbClr val="20794D"/>
-                </a:solidFill>
-                <a:latin typeface="Courier"/>
-              </a:rPr>
-              <a:t>"short"</a:t>
-            </a:r>
-            <a:r>
-              <a:rPr>
-                <a:solidFill>
-                  <a:srgbClr val="003B4F"/>
-                </a:solidFill>
-                <a:latin typeface="Courier"/>
-              </a:rPr>
-              <a:t>,</a:t>
-            </a:r>
-            <a:br/>
-            <a:r>
-              <a:rPr>
-                <a:solidFill>
-                  <a:srgbClr val="003B4F"/>
-                </a:solidFill>
-                <a:latin typeface="Courier"/>
-              </a:rPr>
-              <a:t>      length_mm </a:t>
-            </a:r>
-            <a:r>
-              <a:rPr>
-                <a:solidFill>
-                  <a:srgbClr val="5E5E5E"/>
-                </a:solidFill>
-                <a:latin typeface="Courier"/>
-              </a:rPr>
-              <a:t>&lt;</a:t>
-            </a:r>
-            <a:r>
-              <a:rPr>
-                <a:solidFill>
-                  <a:srgbClr val="003B4F"/>
-                </a:solidFill>
-                <a:latin typeface="Courier"/>
-              </a:rPr>
-              <a:t> </a:t>
-            </a:r>
-            <a:r>
-              <a:rPr>
-                <a:solidFill>
-                  <a:srgbClr val="AD0000"/>
-                </a:solidFill>
-                <a:latin typeface="Courier"/>
-              </a:rPr>
-              <a:t>20</a:t>
-            </a:r>
-            <a:r>
-              <a:rPr>
-                <a:solidFill>
-                  <a:srgbClr val="003B4F"/>
-                </a:solidFill>
-                <a:latin typeface="Courier"/>
-              </a:rPr>
-              <a:t> </a:t>
-            </a:r>
-            <a:r>
-              <a:rPr>
-                <a:solidFill>
-                  <a:srgbClr val="5E5E5E"/>
-                </a:solidFill>
-                <a:latin typeface="Courier"/>
-              </a:rPr>
-              <a:t>~</a:t>
-            </a:r>
-            <a:r>
-              <a:rPr>
-                <a:solidFill>
-                  <a:srgbClr val="003B4F"/>
-                </a:solidFill>
-                <a:latin typeface="Courier"/>
-              </a:rPr>
-              <a:t> </a:t>
-            </a:r>
-            <a:r>
-              <a:rPr>
-                <a:solidFill>
-                  <a:srgbClr val="20794D"/>
-                </a:solidFill>
-                <a:latin typeface="Courier"/>
-              </a:rPr>
-              <a:t>"medium"</a:t>
-            </a:r>
-            <a:r>
-              <a:rPr>
-                <a:solidFill>
-                  <a:srgbClr val="003B4F"/>
-                </a:solidFill>
-                <a:latin typeface="Courier"/>
-              </a:rPr>
-              <a:t>,</a:t>
-            </a:r>
-            <a:br/>
-            <a:r>
-              <a:rPr>
-                <a:solidFill>
-                  <a:srgbClr val="003B4F"/>
-                </a:solidFill>
-                <a:latin typeface="Courier"/>
-              </a:rPr>
-              <a:t>      </a:t>
-            </a:r>
-            <a:r>
-              <a:rPr>
-                <a:solidFill>
-                  <a:srgbClr val="8F5902"/>
-                </a:solidFill>
-                <a:latin typeface="Courier"/>
-              </a:rPr>
-              <a:t>TRUE</a:t>
-            </a:r>
-            <a:r>
-              <a:rPr>
-                <a:solidFill>
-                  <a:srgbClr val="003B4F"/>
-                </a:solidFill>
-                <a:latin typeface="Courier"/>
-              </a:rPr>
-              <a:t>           </a:t>
-            </a:r>
-            <a:r>
-              <a:rPr>
-                <a:solidFill>
-                  <a:srgbClr val="5E5E5E"/>
-                </a:solidFill>
-                <a:latin typeface="Courier"/>
-              </a:rPr>
-              <a:t>~</a:t>
-            </a:r>
-            <a:r>
-              <a:rPr>
-                <a:solidFill>
-                  <a:srgbClr val="003B4F"/>
-                </a:solidFill>
-                <a:latin typeface="Courier"/>
-              </a:rPr>
-              <a:t> </a:t>
-            </a:r>
-            <a:r>
-              <a:rPr>
-                <a:solidFill>
-                  <a:srgbClr val="20794D"/>
-                </a:solidFill>
-                <a:latin typeface="Courier"/>
-              </a:rPr>
-              <a:t>"long"</a:t>
-            </a:r>
-            <a:br/>
-            <a:r>
-              <a:rPr>
-                <a:solidFill>
-                  <a:srgbClr val="003B4F"/>
-                </a:solidFill>
-                <a:latin typeface="Courier"/>
-              </a:rPr>
-              <a:t>    )</a:t>
-            </a:r>
-            <a:br/>
-            <a:r>
-              <a:rPr>
-                <a:solidFill>
-                  <a:srgbClr val="003B4F"/>
-                </a:solidFill>
-                <a:latin typeface="Courier"/>
-              </a:rPr>
-              <a:t>  ) </a:t>
-            </a:r>
-            <a:r>
-              <a:rPr>
-                <a:solidFill>
-                  <a:srgbClr val="5E5E5E"/>
-                </a:solidFill>
-                <a:latin typeface="Courier"/>
-              </a:rPr>
-              <a:t>|&gt;</a:t>
-            </a:r>
-            <a:br/>
-            <a:r>
-              <a:rPr>
-                <a:solidFill>
-                  <a:srgbClr val="003B4F"/>
-                </a:solidFill>
-                <a:latin typeface="Courier"/>
-              </a:rPr>
-              <a:t>  </a:t>
-            </a:r>
-            <a:r>
-              <a:rPr>
-                <a:solidFill>
-                  <a:srgbClr val="4758AB"/>
-                </a:solidFill>
-                <a:latin typeface="Courier"/>
-              </a:rPr>
-              <a:t>arrange</a:t>
-            </a:r>
-            <a:r>
-              <a:rPr>
-                <a:solidFill>
-                  <a:srgbClr val="003B4F"/>
-                </a:solidFill>
-                <a:latin typeface="Courier"/>
-              </a:rPr>
-              <a:t>(n_s, </a:t>
-            </a:r>
-            <a:r>
-              <a:rPr>
-                <a:solidFill>
-                  <a:srgbClr val="4758AB"/>
-                </a:solidFill>
-                <a:latin typeface="Courier"/>
-              </a:rPr>
               <a:t>desc</a:t>
             </a:r>
             <a:r>
@@ -10466,7 +10538,7 @@
                 </a:solidFill>
                 <a:latin typeface="Courier"/>
               </a:rPr>
-              <a:t>(length_mm))            </a:t>
+              <a:t>(needle_length_mm))            </a:t>
             </a:r>
             <a:r>
               <a:rPr>
@@ -10507,14 +10579,15 @@
                 <a:latin typeface="Courier"/>
               </a:rPr>
               <a:t># A tibble: 6 × 7
-  group       n_s   sun   length_mm length_cm log_length size_class
-  &lt;chr&gt;       &lt;chr&gt; &lt;chr&gt;     &lt;dbl&gt;     &lt;dbl&gt;      &lt;dbl&gt; &lt;chr&gt;     
-1 cephalopods n     shady        25       2.5       3.22 long      
-2 crayfish    n     shady        25       2.5       3.22 long      
-3 cephalopods n     shady        23       2.3       3.14 long      
-4 salmon      n     shady        23       2.3       3.14 long      
-5 crayfish    n     shady        23       2.3       3.14 long      
-6 snail       n     shady        23       2.3       3.14 long      </a:t>
+  team       side  needle_length_mm needle_width_mm needle_length_cm log_length
+  &lt;chr&gt;      &lt;chr&gt;            &lt;dbl&gt;           &lt;dbl&gt;            &lt;dbl&gt;      &lt;dbl&gt;
+1 botany     shady             20.7            0.77             2.07       3.03
+2 grace_jace shady             17.9            0.69             1.79       2.89
+3 one        shady             17.7            1                1.77       2.87
+4 botany     shady             17.6            0.79             1.76       2.87
+5 botany     shady             17.6            0.94             1.76       2.87
+6 grace_jace shady             17.0            0.84             1.69       2.83
+# ℹ 1 more variable: size_class &lt;chr&gt;</a:t>
             </a:r>
           </a:p>
           <a:p>
@@ -11136,7 +11209,7 @@
               <a:rPr>
                 <a:latin typeface="Courier"/>
               </a:rPr>
-              <a:t>[1] 36</a:t>
+              <a:t>[1] 69</a:t>
             </a:r>
           </a:p>
           <a:p>
@@ -11170,7 +11243,7 @@
               <a:rPr>
                 <a:latin typeface="Courier"/>
               </a:rPr>
-              <a:t>[1] 18</a:t>
+              <a:t>[1] 64</a:t>
             </a:r>
           </a:p>
           <a:p>
@@ -11280,18 +11353,20 @@
             </a:r>
             <a:r>
               <a:rPr sz="2000"/>
-              <a:t> — returns the data with duplicate rows removed - be careful!!!\</a:t>
+              <a:t> — returns the data with duplicate rows removed — use it deliberately, not reflexively</a:t>
             </a:r>
           </a:p>
           <a:p>
             <a:pPr lvl="0"/>
             <a:r>
-              <a:rPr sz="2000" b="1"/>
+              <a:rPr sz="2000" b="1">
+                <a:latin typeface="Courier"/>
+              </a:rPr>
               <a:t>unique()</a:t>
             </a:r>
             <a:r>
               <a:rPr sz="2000"/>
-              <a:t> - looks for the unique rows or names in rows for mispellinbg</a:t>
+              <a:t> — lists the distinct values in a single column; the fastest way to spot misspellings</a:t>
             </a:r>
           </a:p>
         </p:txBody>
@@ -11451,27 +11526,15 @@
               <a:rPr>
                 <a:latin typeface="Courier"/>
               </a:rPr>
-              <a:t># A tibble: 18 × 5
-   name  species needle_id needle_name length_mm
-   &lt;chr&gt; &lt;chr&gt;       &lt;dbl&gt; &lt;chr&gt;           &lt;dbl&gt;
- 1 John  a               1 one              21.1
- 2 John  a               2 two              21.2
- 3 John  a               3 three            21.5
- 4 Mary  a               1 one              21  
- 5 Mary  a               2 two              21.1
- 6 Mary  a               3 three            21.3
- 7 Steve a               1 one              21.4
- 8 Steve a               2 two              21.3
- 9 Steve a               3 three            21.9
-10 Harry a               1 one              24.1
-11 Harry a               2 two              24.2
-12 Harry a               3 three            24.3
-13 Stan  a               1 one              22.1
-14 Stan  a               2 two              22.2
-15 Stan  a               3 three            22.4
-16 Jake  a               1 one              20.3
-17 Jake  a               2 two              20.4
-18 Jake  a               3 three            20.1</a:t>
+              <a:t># A tibble: 5 × 6
+  `Source File`    `Team Name` `Replicate #` `Side of Tree` `Needle Length (mm)`
+  &lt;chr&gt;            &lt;chr&gt;               &lt;dbl&gt; &lt;chr&gt;          &lt;chr&gt;               
+1 heal_thome_pine… botany                  1 shady          16.46               
+2 Bartell_Shingle… grace_jace              2 sunny          12.48               
+3 Needle_Length_S… waterbugs               5 sunny          11.7                
+4 Needle_Length_S… water bugs              2 Shady          7.23                
+5 Kehr_and_Baalke… one                     1 sunny          16.18               
+# ℹ 1 more variable: `Needle Width (mm)` &lt;chr&gt;</a:t>
             </a:r>
           </a:p>
         </p:txBody>
@@ -11754,7 +11817,7 @@
               <a:rPr>
                 <a:latin typeface="Courier"/>
               </a:rPr>
-              <a:t>[1] 36</a:t>
+              <a:t>[1] 69</a:t>
             </a:r>
           </a:p>
           <a:p>
@@ -11788,7 +11851,7 @@
               <a:rPr>
                 <a:latin typeface="Courier"/>
               </a:rPr>
-              <a:t>[1] 18</a:t>
+              <a:t>[1] 64</a:t>
             </a:r>
           </a:p>
         </p:txBody>
@@ -11851,7 +11914,7 @@
               <a:rPr sz="2000">
                 <a:latin typeface="Courier"/>
               </a:rPr>
-              <a:t>John</a:t>
+              <a:t>waterbugs</a:t>
             </a:r>
             <a:r>
               <a:rPr sz="2000"/>
@@ -11861,7 +11924,7 @@
               <a:rPr sz="2000">
                 <a:latin typeface="Courier"/>
               </a:rPr>
-              <a:t>john</a:t>
+              <a:t>Waterbugs</a:t>
             </a:r>
             <a:r>
               <a:rPr sz="2000"/>
@@ -11917,7 +11980,7 @@
             </a:pPr>
             <a:r>
               <a:rPr/>
-              <a:t>Part 4 · Saving Your Work</a:t>
+              <a:t>Part 3b · The Rest of the Mess</a:t>
             </a:r>
           </a:p>
         </p:txBody>
@@ -11974,17 +12037,11 @@
               <a:rPr>
                 <a:latin typeface="Courier"/>
               </a:rPr>
-              <a:t>write_csv()</a:t>
+              <a:t>unique()</a:t>
             </a:r>
             <a:r>
               <a:rPr/>
-              <a:t> — the mirror image of </a:t>
-            </a:r>
-            <a:r>
-              <a:rPr>
-                <a:latin typeface="Courier"/>
-              </a:rPr>
-              <a:t>read_csv()</a:t>
+              <a:t> — what else is wrong in here?</a:t>
             </a:r>
           </a:p>
         </p:txBody>
@@ -12004,6 +12061,23 @@
           <a:bodyPr/>
           <a:lstStyle/>
           <a:p>
+            <a:pPr lvl="0" indent="0" marL="0">
+              <a:buNone/>
+            </a:pPr>
+            <a:r>
+              <a:rPr/>
+              <a:t>Duplicates were only the </a:t>
+            </a:r>
+            <a:r>
+              <a:rPr i="1"/>
+              <a:t>first</a:t>
+            </a:r>
+            <a:r>
+              <a:rPr/>
+              <a:t> problem in this file. Look at the columns themselves:</a:t>
+            </a:r>
+          </a:p>
+          <a:p>
             <a:pPr lvl="0" indent="0">
               <a:buNone/>
             </a:pPr>
@@ -12014,16 +12088,60 @@
                 </a:solidFill>
                 <a:latin typeface="Courier"/>
               </a:rPr>
-              <a:t>write_csv</a:t>
-            </a:r>
-            <a:r>
-              <a:rPr>
-                <a:solidFill>
-                  <a:srgbClr val="003B4F"/>
-                </a:solidFill>
-                <a:latin typeface="Courier"/>
-              </a:rPr>
-              <a:t>(pine_wrangled_df, </a:t>
+              <a:t>names</a:t>
+            </a:r>
+            <a:r>
+              <a:rPr>
+                <a:solidFill>
+                  <a:srgbClr val="003B4F"/>
+                </a:solidFill>
+                <a:latin typeface="Courier"/>
+              </a:rPr>
+              <a:t>(needle_check_df)</a:t>
+            </a:r>
+          </a:p>
+          <a:p>
+            <a:pPr lvl="0" indent="0">
+              <a:buNone/>
+            </a:pPr>
+            <a:r>
+              <a:rPr>
+                <a:latin typeface="Courier"/>
+              </a:rPr>
+              <a:t>[1] "Source File"        "Team Name"          "Replicate #"       
+[4] "Side of Tree"       "Needle Length (mm)" "Needle Width (mm)" </a:t>
+            </a:r>
+          </a:p>
+          <a:p>
+            <a:pPr lvl="0" indent="0">
+              <a:buNone/>
+            </a:pPr>
+            <a:r>
+              <a:rPr>
+                <a:solidFill>
+                  <a:srgbClr val="4758AB"/>
+                </a:solidFill>
+                <a:latin typeface="Courier"/>
+              </a:rPr>
+              <a:t>unique</a:t>
+            </a:r>
+            <a:r>
+              <a:rPr>
+                <a:solidFill>
+                  <a:srgbClr val="003B4F"/>
+                </a:solidFill>
+                <a:latin typeface="Courier"/>
+              </a:rPr>
+              <a:t>(needle_clean_df</a:t>
+            </a:r>
+            <a:r>
+              <a:rPr>
+                <a:solidFill>
+                  <a:srgbClr val="5E5E5E"/>
+                </a:solidFill>
+                <a:latin typeface="Courier"/>
+              </a:rPr>
+              <a:t>$</a:t>
             </a:r>
             <a:r>
               <a:rPr>
@@ -12032,7 +12150,25 @@
                 </a:solidFill>
                 <a:latin typeface="Courier"/>
               </a:rPr>
-              <a:t>"data/pine_needles_wrangled.csv"</a:t>
+              <a:t>`</a:t>
+            </a:r>
+            <a:r>
+              <a:rPr>
+                <a:solidFill>
+                  <a:srgbClr val="657422"/>
+                </a:solidFill>
+                <a:latin typeface="Courier"/>
+              </a:rPr>
+              <a:t>Side of Tree</a:t>
+            </a:r>
+            <a:r>
+              <a:rPr>
+                <a:solidFill>
+                  <a:srgbClr val="20794D"/>
+                </a:solidFill>
+                <a:latin typeface="Courier"/>
+              </a:rPr>
+              <a:t>`</a:t>
             </a:r>
             <a:r>
               <a:rPr>
@@ -12042,6 +12178,17 @@
                 <a:latin typeface="Courier"/>
               </a:rPr>
               <a:t>)</a:t>
+            </a:r>
+          </a:p>
+          <a:p>
+            <a:pPr lvl="0" indent="0">
+              <a:buNone/>
+            </a:pPr>
+            <a:r>
+              <a:rPr>
+                <a:latin typeface="Courier"/>
+              </a:rPr>
+              <a:t>[1] "sunny" "shady" "Shady" "SUNNY" "Sunny" "SHADY"</a:t>
             </a:r>
           </a:p>
           <a:p>
@@ -12059,7 +12206,7 @@
             </a:pPr>
             <a:r>
               <a:rPr sz="2000" b="1"/>
-              <a:t>Raw data is read-only.</a:t>
+              <a:t>Two values became six.</a:t>
             </a:r>
             <a:r>
               <a:rPr sz="2000"/>
@@ -12069,49 +12216,51 @@
               <a:rPr sz="2000">
                 <a:latin typeface="Courier"/>
               </a:rPr>
-              <a:t>pine_needles.csv</a:t>
-            </a:r>
-            <a:r>
-              <a:rPr sz="2000"/>
-              <a:t> never gets overwritten — </a:t>
+              <a:t>shady</a:t>
+            </a:r>
+            <a:r>
+              <a:rPr sz="2000"/>
+              <a:t>, </a:t>
             </a:r>
             <a:r>
               <a:rPr sz="2000">
                 <a:latin typeface="Courier"/>
               </a:rPr>
-              <a:t>write_csv()</a:t>
-            </a:r>
-            <a:r>
-              <a:rPr sz="2000"/>
-              <a:t> always creates a </a:t>
-            </a:r>
-            <a:r>
-              <a:rPr sz="2000" b="1"/>
-              <a:t>new, separate file</a:t>
-            </a:r>
-            <a:r>
-              <a:rPr sz="2000"/>
-              <a:t>. That’s why we named it </a:t>
+              <a:t>Shady</a:t>
+            </a:r>
+            <a:r>
+              <a:rPr sz="2000"/>
+              <a:t>, </a:t>
             </a:r>
             <a:r>
               <a:rPr sz="2000">
                 <a:latin typeface="Courier"/>
               </a:rPr>
-              <a:t>pine_needles_wrangled.csv</a:t>
-            </a:r>
-            <a:r>
-              <a:rPr sz="2000"/>
-              <a:t>, not </a:t>
+              <a:t>SHADY</a:t>
+            </a:r>
+            <a:r>
+              <a:rPr sz="2000"/>
+              <a:t> — R treats every one as a separate category. Any </a:t>
             </a:r>
             <a:r>
               <a:rPr sz="2000">
                 <a:latin typeface="Courier"/>
               </a:rPr>
-              <a:t>pine_needles.csv</a:t>
-            </a:r>
-            <a:r>
-              <a:rPr sz="2000"/>
-              <a:t>.</a:t>
+              <a:t>group_by()</a:t>
+            </a:r>
+            <a:r>
+              <a:rPr sz="2000"/>
+              <a:t> or </a:t>
+            </a:r>
+            <a:r>
+              <a:rPr sz="2000">
+                <a:latin typeface="Courier"/>
+              </a:rPr>
+              <a:t>count()</a:t>
+            </a:r>
+            <a:r>
+              <a:rPr sz="2000"/>
+              <a:t> you run right now is wrong.</a:t>
             </a:r>
           </a:p>
         </p:txBody>
@@ -12145,7 +12294,62 @@
             </a:pPr>
             <a:r>
               <a:rPr sz="2000" b="1"/>
-              <a:t>✅ Key idea</a:t>
+              <a:t>📖 New words</a:t>
+            </a:r>
+          </a:p>
+          <a:p>
+            <a:pPr lvl="0"/>
+            <a:r>
+              <a:rPr sz="2000" b="1">
+                <a:latin typeface="Courier"/>
+              </a:rPr>
+              <a:t>clean_names()</a:t>
+            </a:r>
+            <a:r>
+              <a:rPr sz="2000"/>
+              <a:t> (janitor) — turns </a:t>
+            </a:r>
+            <a:r>
+              <a:rPr sz="2000">
+                <a:latin typeface="Courier"/>
+              </a:rPr>
+              <a:t>Needle Length (mm)</a:t>
+            </a:r>
+            <a:r>
+              <a:rPr sz="2000"/>
+              <a:t> into </a:t>
+            </a:r>
+            <a:r>
+              <a:rPr sz="2000">
+                <a:latin typeface="Courier"/>
+              </a:rPr>
+              <a:t>needle_length_mm</a:t>
+            </a:r>
+          </a:p>
+          <a:p>
+            <a:pPr lvl="0"/>
+            <a:r>
+              <a:rPr sz="2000" b="1">
+                <a:latin typeface="Courier"/>
+              </a:rPr>
+              <a:t>str_to_lower()</a:t>
+            </a:r>
+            <a:r>
+              <a:rPr sz="2000"/>
+              <a:t> — force text to lowercase</a:t>
+            </a:r>
+          </a:p>
+          <a:p>
+            <a:pPr lvl="0"/>
+            <a:r>
+              <a:rPr sz="2000" b="1">
+                <a:latin typeface="Courier"/>
+              </a:rPr>
+              <a:t>str_squish()</a:t>
+            </a:r>
+            <a:r>
+              <a:rPr sz="2000"/>
+              <a:t> — strip leading/trailing spaces</a:t>
             </a:r>
           </a:p>
           <a:p>
@@ -12153,8 +12357,164 @@
               <a:buNone/>
             </a:pPr>
             <a:r>
-              <a:rPr sz="2000"/>
-              <a:t>If you can’t reproduce a result from raw data + a script, something’s wrong with the script — never with the raw file. Keeping raw data untouched is what makes that guarantee possible.</a:t>
+              <a:rPr sz="2000" b="1"/>
+              <a:t>Tip</a:t>
+            </a:r>
+          </a:p>
+          <a:p>
+            <a:pPr lvl="0" indent="0" marL="1270000">
+              <a:buNone/>
+            </a:pPr>
+            <a:r>
+              <a:rPr sz="2000" b="1"/>
+              <a:t>🖐 It was almost worse</a:t>
+            </a:r>
+          </a:p>
+          <a:p>
+            <a:pPr lvl="0" indent="0" marL="1270000">
+              <a:buNone/>
+            </a:pPr>
+            <a:r>
+              <a:rPr sz="2000"/>
+              <a:t>This file also has stray spaces (</a:t>
+            </a:r>
+            <a:r>
+              <a:rPr sz="2000">
+                <a:latin typeface="Courier"/>
+              </a:rPr>
+              <a:t>"sunny "</a:t>
+            </a:r>
+            <a:r>
+              <a:rPr sz="2000"/>
+              <a:t>, </a:t>
+            </a:r>
+            <a:r>
+              <a:rPr sz="2000">
+                <a:latin typeface="Courier"/>
+              </a:rPr>
+              <a:t>" shady"</a:t>
+            </a:r>
+            <a:r>
+              <a:rPr sz="2000"/>
+              <a:t>). You don’t see them because </a:t>
+            </a:r>
+            <a:r>
+              <a:rPr sz="2000" b="1">
+                <a:latin typeface="Courier"/>
+              </a:rPr>
+              <a:t>read_csv()</a:t>
+            </a:r>
+            <a:r>
+              <a:rPr sz="2000" b="1"/>
+              <a:t> trims whitespace for you by default.</a:t>
+            </a:r>
+            <a:r>
+              <a:rPr sz="2000"/>
+              <a:t> Prove it to yourself:</a:t>
+            </a:r>
+          </a:p>
+          <a:p>
+            <a:pPr lvl="0" indent="0">
+              <a:buNone/>
+            </a:pPr>
+            <a:r>
+              <a:rPr>
+                <a:solidFill>
+                  <a:srgbClr val="4758AB"/>
+                </a:solidFill>
+                <a:latin typeface="Courier"/>
+              </a:rPr>
+              <a:t>read_csv</a:t>
+            </a:r>
+            <a:r>
+              <a:rPr>
+                <a:solidFill>
+                  <a:srgbClr val="003B4F"/>
+                </a:solidFill>
+                <a:latin typeface="Courier"/>
+              </a:rPr>
+              <a:t>(</a:t>
+            </a:r>
+            <a:r>
+              <a:rPr>
+                <a:solidFill>
+                  <a:srgbClr val="20794D"/>
+                </a:solidFill>
+                <a:latin typeface="Courier"/>
+              </a:rPr>
+              <a:t>"data/pine_needles_error.csv"</a:t>
+            </a:r>
+            <a:r>
+              <a:rPr>
+                <a:solidFill>
+                  <a:srgbClr val="003B4F"/>
+                </a:solidFill>
+                <a:latin typeface="Courier"/>
+              </a:rPr>
+              <a:t>, </a:t>
+            </a:r>
+            <a:r>
+              <a:rPr>
+                <a:solidFill>
+                  <a:srgbClr val="657422"/>
+                </a:solidFill>
+                <a:latin typeface="Courier"/>
+              </a:rPr>
+              <a:t>trim_ws =</a:t>
+            </a:r>
+            <a:r>
+              <a:rPr>
+                <a:solidFill>
+                  <a:srgbClr val="003B4F"/>
+                </a:solidFill>
+                <a:latin typeface="Courier"/>
+              </a:rPr>
+              <a:t> </a:t>
+            </a:r>
+            <a:r>
+              <a:rPr>
+                <a:solidFill>
+                  <a:srgbClr val="8F5902"/>
+                </a:solidFill>
+                <a:latin typeface="Courier"/>
+              </a:rPr>
+              <a:t>FALSE</a:t>
+            </a:r>
+            <a:r>
+              <a:rPr>
+                <a:solidFill>
+                  <a:srgbClr val="003B4F"/>
+                </a:solidFill>
+                <a:latin typeface="Courier"/>
+              </a:rPr>
+              <a:t>)</a:t>
+            </a:r>
+          </a:p>
+          <a:p>
+            <a:pPr lvl="0" indent="0" marL="1270000">
+              <a:buNone/>
+            </a:pPr>
+            <a:r>
+              <a:rPr sz="2000"/>
+              <a:t>Now there are </a:t>
+            </a:r>
+            <a:r>
+              <a:rPr sz="2000" b="1"/>
+              <a:t>ten</a:t>
+            </a:r>
+            <a:r>
+              <a:rPr sz="2000"/>
+              <a:t> values, not six. Not every import tool is that kind — which is why we still run </a:t>
+            </a:r>
+            <a:r>
+              <a:rPr sz="2000">
+                <a:latin typeface="Courier"/>
+              </a:rPr>
+              <a:t>str_squish()</a:t>
+            </a:r>
+            <a:r>
+              <a:rPr sz="2000"/>
+              <a:t> below.</a:t>
             </a:r>
           </a:p>
         </p:txBody>
@@ -12209,7 +12569,7 @@
             </a:pPr>
             <a:r>
               <a:rPr/>
-              <a:t>Naming your saved files</a:t>
+              <a:t>Fixing names and text in one pipeline</a:t>
             </a:r>
           </a:p>
         </p:txBody>
@@ -12229,60 +12589,403 @@
           <a:bodyPr/>
           <a:lstStyle/>
           <a:p>
-            <a:pPr lvl="0"/>
-            <a:r>
-              <a:rPr/>
-              <a:t>Never overwrite </a:t>
-            </a:r>
-            <a:r>
-              <a:rPr>
-                <a:latin typeface="Courier"/>
-              </a:rPr>
-              <a:t>data/pine_needles.csv</a:t>
-            </a:r>
-            <a:r>
-              <a:rPr/>
-              <a:t> — that file is raw</a:t>
-            </a:r>
-          </a:p>
-          <a:p>
-            <a:pPr lvl="0"/>
-            <a:r>
-              <a:rPr/>
-              <a:t>Save wrangled output with a name that says what happened: </a:t>
-            </a:r>
-            <a:r>
-              <a:rPr>
-                <a:latin typeface="Courier"/>
-              </a:rPr>
-              <a:t>pine_needles_wrangled.csv</a:t>
-            </a:r>
-            <a:r>
-              <a:rPr/>
-              <a:t>, not </a:t>
-            </a:r>
-            <a:r>
-              <a:rPr>
-                <a:latin typeface="Courier"/>
-              </a:rPr>
-              <a:t>pine_needles2.csv</a:t>
-            </a:r>
-            <a:r>
-              <a:rPr/>
-              <a:t> or </a:t>
-            </a:r>
-            <a:r>
-              <a:rPr>
-                <a:latin typeface="Courier"/>
-              </a:rPr>
-              <a:t>final.csv</a:t>
-            </a:r>
-          </a:p>
-          <a:p>
-            <a:pPr lvl="0"/>
-            <a:r>
-              <a:rPr/>
-              <a:t>Anyone re-running your script from scratch should get the exact same output file</a:t>
+            <a:pPr lvl="0" indent="0">
+              <a:buNone/>
+            </a:pPr>
+            <a:r>
+              <a:rPr>
+                <a:solidFill>
+                  <a:srgbClr val="003B4F"/>
+                </a:solidFill>
+                <a:latin typeface="Courier"/>
+              </a:rPr>
+              <a:t>needle_fixed_df &lt;- needle_check_df </a:t>
+            </a:r>
+            <a:r>
+              <a:rPr>
+                <a:solidFill>
+                  <a:srgbClr val="5E5E5E"/>
+                </a:solidFill>
+                <a:latin typeface="Courier"/>
+              </a:rPr>
+              <a:t>|&gt;</a:t>
+            </a:r>
+            <a:br/>
+            <a:r>
+              <a:rPr>
+                <a:solidFill>
+                  <a:srgbClr val="003B4F"/>
+                </a:solidFill>
+                <a:latin typeface="Courier"/>
+              </a:rPr>
+              <a:t>  </a:t>
+            </a:r>
+            <a:r>
+              <a:rPr>
+                <a:solidFill>
+                  <a:srgbClr val="4758AB"/>
+                </a:solidFill>
+                <a:latin typeface="Courier"/>
+              </a:rPr>
+              <a:t>clean_names</a:t>
+            </a:r>
+            <a:r>
+              <a:rPr>
+                <a:solidFill>
+                  <a:srgbClr val="003B4F"/>
+                </a:solidFill>
+                <a:latin typeface="Courier"/>
+              </a:rPr>
+              <a:t>() </a:t>
+            </a:r>
+            <a:r>
+              <a:rPr>
+                <a:solidFill>
+                  <a:srgbClr val="5E5E5E"/>
+                </a:solidFill>
+                <a:latin typeface="Courier"/>
+              </a:rPr>
+              <a:t>|&gt;</a:t>
+            </a:r>
+            <a:r>
+              <a:rPr>
+                <a:solidFill>
+                  <a:srgbClr val="003B4F"/>
+                </a:solidFill>
+                <a:latin typeface="Courier"/>
+              </a:rPr>
+              <a:t>                 </a:t>
+            </a:r>
+            <a:r>
+              <a:rPr>
+                <a:solidFill>
+                  <a:srgbClr val="5E5E5E"/>
+                </a:solidFill>
+                <a:latin typeface="Courier"/>
+              </a:rPr>
+              <a:t># Needle Length (mm) -&gt; needle_length_mm</a:t>
+            </a:r>
+            <a:br/>
+            <a:r>
+              <a:rPr>
+                <a:solidFill>
+                  <a:srgbClr val="003B4F"/>
+                </a:solidFill>
+                <a:latin typeface="Courier"/>
+              </a:rPr>
+              <a:t>  </a:t>
+            </a:r>
+            <a:r>
+              <a:rPr>
+                <a:solidFill>
+                  <a:srgbClr val="4758AB"/>
+                </a:solidFill>
+                <a:latin typeface="Courier"/>
+              </a:rPr>
+              <a:t>distinct</a:t>
+            </a:r>
+            <a:r>
+              <a:rPr>
+                <a:solidFill>
+                  <a:srgbClr val="003B4F"/>
+                </a:solidFill>
+                <a:latin typeface="Courier"/>
+              </a:rPr>
+              <a:t>() </a:t>
+            </a:r>
+            <a:r>
+              <a:rPr>
+                <a:solidFill>
+                  <a:srgbClr val="5E5E5E"/>
+                </a:solidFill>
+                <a:latin typeface="Courier"/>
+              </a:rPr>
+              <a:t>|&gt;</a:t>
+            </a:r>
+            <a:r>
+              <a:rPr>
+                <a:solidFill>
+                  <a:srgbClr val="003B4F"/>
+                </a:solidFill>
+                <a:latin typeface="Courier"/>
+              </a:rPr>
+              <a:t>                    </a:t>
+            </a:r>
+            <a:r>
+              <a:rPr>
+                <a:solidFill>
+                  <a:srgbClr val="5E5E5E"/>
+                </a:solidFill>
+                <a:latin typeface="Courier"/>
+              </a:rPr>
+              <a:t># drop the repeated rows</a:t>
+            </a:r>
+            <a:br/>
+            <a:r>
+              <a:rPr>
+                <a:solidFill>
+                  <a:srgbClr val="003B4F"/>
+                </a:solidFill>
+                <a:latin typeface="Courier"/>
+              </a:rPr>
+              <a:t>  </a:t>
+            </a:r>
+            <a:r>
+              <a:rPr>
+                <a:solidFill>
+                  <a:srgbClr val="4758AB"/>
+                </a:solidFill>
+                <a:latin typeface="Courier"/>
+              </a:rPr>
+              <a:t>mutate</a:t>
+            </a:r>
+            <a:r>
+              <a:rPr>
+                <a:solidFill>
+                  <a:srgbClr val="003B4F"/>
+                </a:solidFill>
+                <a:latin typeface="Courier"/>
+              </a:rPr>
+              <a:t>(</a:t>
+            </a:r>
+            <a:br/>
+            <a:r>
+              <a:rPr>
+                <a:solidFill>
+                  <a:srgbClr val="003B4F"/>
+                </a:solidFill>
+                <a:latin typeface="Courier"/>
+              </a:rPr>
+              <a:t>    </a:t>
+            </a:r>
+            <a:r>
+              <a:rPr>
+                <a:solidFill>
+                  <a:srgbClr val="657422"/>
+                </a:solidFill>
+                <a:latin typeface="Courier"/>
+              </a:rPr>
+              <a:t>side =</a:t>
+            </a:r>
+            <a:r>
+              <a:rPr>
+                <a:solidFill>
+                  <a:srgbClr val="003B4F"/>
+                </a:solidFill>
+                <a:latin typeface="Courier"/>
+              </a:rPr>
+              <a:t> </a:t>
+            </a:r>
+            <a:r>
+              <a:rPr>
+                <a:solidFill>
+                  <a:srgbClr val="4758AB"/>
+                </a:solidFill>
+                <a:latin typeface="Courier"/>
+              </a:rPr>
+              <a:t>str_squish</a:t>
+            </a:r>
+            <a:r>
+              <a:rPr>
+                <a:solidFill>
+                  <a:srgbClr val="003B4F"/>
+                </a:solidFill>
+                <a:latin typeface="Courier"/>
+              </a:rPr>
+              <a:t>(</a:t>
+            </a:r>
+            <a:r>
+              <a:rPr>
+                <a:solidFill>
+                  <a:srgbClr val="4758AB"/>
+                </a:solidFill>
+                <a:latin typeface="Courier"/>
+              </a:rPr>
+              <a:t>str_to_lower</a:t>
+            </a:r>
+            <a:r>
+              <a:rPr>
+                <a:solidFill>
+                  <a:srgbClr val="003B4F"/>
+                </a:solidFill>
+                <a:latin typeface="Courier"/>
+              </a:rPr>
+              <a:t>(side_of_tree)),</a:t>
+            </a:r>
+            <a:br/>
+            <a:r>
+              <a:rPr>
+                <a:solidFill>
+                  <a:srgbClr val="003B4F"/>
+                </a:solidFill>
+                <a:latin typeface="Courier"/>
+              </a:rPr>
+              <a:t>    </a:t>
+            </a:r>
+            <a:r>
+              <a:rPr>
+                <a:solidFill>
+                  <a:srgbClr val="657422"/>
+                </a:solidFill>
+                <a:latin typeface="Courier"/>
+              </a:rPr>
+              <a:t>team =</a:t>
+            </a:r>
+            <a:r>
+              <a:rPr>
+                <a:solidFill>
+                  <a:srgbClr val="003B4F"/>
+                </a:solidFill>
+                <a:latin typeface="Courier"/>
+              </a:rPr>
+              <a:t> </a:t>
+            </a:r>
+            <a:r>
+              <a:rPr>
+                <a:solidFill>
+                  <a:srgbClr val="4758AB"/>
+                </a:solidFill>
+                <a:latin typeface="Courier"/>
+              </a:rPr>
+              <a:t>str_squish</a:t>
+            </a:r>
+            <a:r>
+              <a:rPr>
+                <a:solidFill>
+                  <a:srgbClr val="003B4F"/>
+                </a:solidFill>
+                <a:latin typeface="Courier"/>
+              </a:rPr>
+              <a:t>(</a:t>
+            </a:r>
+            <a:r>
+              <a:rPr>
+                <a:solidFill>
+                  <a:srgbClr val="4758AB"/>
+                </a:solidFill>
+                <a:latin typeface="Courier"/>
+              </a:rPr>
+              <a:t>str_to_lower</a:t>
+            </a:r>
+            <a:r>
+              <a:rPr>
+                <a:solidFill>
+                  <a:srgbClr val="003B4F"/>
+                </a:solidFill>
+                <a:latin typeface="Courier"/>
+              </a:rPr>
+              <a:t>(team_name))</a:t>
+            </a:r>
+            <a:br/>
+            <a:r>
+              <a:rPr>
+                <a:solidFill>
+                  <a:srgbClr val="003B4F"/>
+                </a:solidFill>
+                <a:latin typeface="Courier"/>
+              </a:rPr>
+              <a:t>  )</a:t>
+            </a:r>
+            <a:br/>
+            <a:br/>
+            <a:r>
+              <a:rPr>
+                <a:solidFill>
+                  <a:srgbClr val="4758AB"/>
+                </a:solidFill>
+                <a:latin typeface="Courier"/>
+              </a:rPr>
+              <a:t>unique</a:t>
+            </a:r>
+            <a:r>
+              <a:rPr>
+                <a:solidFill>
+                  <a:srgbClr val="003B4F"/>
+                </a:solidFill>
+                <a:latin typeface="Courier"/>
+              </a:rPr>
+              <a:t>(needle_fixed_df</a:t>
+            </a:r>
+            <a:r>
+              <a:rPr>
+                <a:solidFill>
+                  <a:srgbClr val="5E5E5E"/>
+                </a:solidFill>
+                <a:latin typeface="Courier"/>
+              </a:rPr>
+              <a:t>$</a:t>
+            </a:r>
+            <a:r>
+              <a:rPr>
+                <a:solidFill>
+                  <a:srgbClr val="003B4F"/>
+                </a:solidFill>
+                <a:latin typeface="Courier"/>
+              </a:rPr>
+              <a:t>side)</a:t>
+            </a:r>
+          </a:p>
+          <a:p>
+            <a:pPr lvl="0" indent="0">
+              <a:buNone/>
+            </a:pPr>
+            <a:r>
+              <a:rPr>
+                <a:latin typeface="Courier"/>
+              </a:rPr>
+              <a:t>[1] "sunny" "shady"</a:t>
+            </a:r>
+          </a:p>
+          <a:p>
+            <a:pPr lvl="0" indent="0">
+              <a:buNone/>
+            </a:pPr>
+            <a:r>
+              <a:rPr>
+                <a:solidFill>
+                  <a:srgbClr val="4758AB"/>
+                </a:solidFill>
+                <a:latin typeface="Courier"/>
+              </a:rPr>
+              <a:t>unique</a:t>
+            </a:r>
+            <a:r>
+              <a:rPr>
+                <a:solidFill>
+                  <a:srgbClr val="003B4F"/>
+                </a:solidFill>
+                <a:latin typeface="Courier"/>
+              </a:rPr>
+              <a:t>(needle_fixed_df</a:t>
+            </a:r>
+            <a:r>
+              <a:rPr>
+                <a:solidFill>
+                  <a:srgbClr val="5E5E5E"/>
+                </a:solidFill>
+                <a:latin typeface="Courier"/>
+              </a:rPr>
+              <a:t>$</a:t>
+            </a:r>
+            <a:r>
+              <a:rPr>
+                <a:solidFill>
+                  <a:srgbClr val="003B4F"/>
+                </a:solidFill>
+                <a:latin typeface="Courier"/>
+              </a:rPr>
+              <a:t>team)</a:t>
+            </a:r>
+          </a:p>
+          <a:p>
+            <a:pPr lvl="0" indent="0">
+              <a:buNone/>
+            </a:pPr>
+            <a:r>
+              <a:rPr>
+                <a:latin typeface="Courier"/>
+              </a:rPr>
+              <a:t>[1] "grace_jace" "botany"     "water bugs" "waterbugs"  "one"       </a:t>
             </a:r>
           </a:p>
           <a:p>
@@ -12311,31 +13014,55 @@
               <a:rPr sz="2000">
                 <a:latin typeface="Courier"/>
               </a:rPr>
-              <a:t>final.csv</a:t>
-            </a:r>
-            <a:r>
-              <a:rPr sz="2000"/>
-              <a:t>, </a:t>
+              <a:t>str_to_lower()</a:t>
+            </a:r>
+            <a:r>
+              <a:rPr sz="2000"/>
+              <a:t> collapsed </a:t>
             </a:r>
             <a:r>
               <a:rPr sz="2000">
                 <a:latin typeface="Courier"/>
               </a:rPr>
-              <a:t>final_v2.csv</a:t>
-            </a:r>
-            <a:r>
-              <a:rPr sz="2000"/>
-              <a:t>, </a:t>
+              <a:t>Waterbugs</a:t>
+            </a:r>
+            <a:r>
+              <a:rPr sz="2000"/>
+              <a:t> into </a:t>
             </a:r>
             <a:r>
               <a:rPr sz="2000">
                 <a:latin typeface="Courier"/>
               </a:rPr>
-              <a:t>final_FINAL.csv</a:t>
-            </a:r>
-            <a:r>
-              <a:rPr sz="2000"/>
-              <a:t> — this is exactly the mess a project folder with relative paths and clear names is meant to prevent.</a:t>
+              <a:t>waterbugs</a:t>
+            </a:r>
+            <a:r>
+              <a:rPr sz="2000"/>
+              <a:t> — but </a:t>
+            </a:r>
+            <a:r>
+              <a:rPr sz="2000" b="1">
+                <a:latin typeface="Courier"/>
+              </a:rPr>
+              <a:t>water bugs</a:t>
+            </a:r>
+            <a:r>
+              <a:rPr sz="2000" b="1"/>
+              <a:t> is still its own value</a:t>
+            </a:r>
+            <a:r>
+              <a:rPr sz="2000"/>
+              <a:t>. Lowercasing fixes case, not spelling. That last one needs </a:t>
+            </a:r>
+            <a:r>
+              <a:rPr sz="2000">
+                <a:latin typeface="Courier"/>
+              </a:rPr>
+              <a:t>case_when()</a:t>
+            </a:r>
+            <a:r>
+              <a:rPr sz="2000"/>
+              <a:t>.</a:t>
             </a:r>
           </a:p>
         </p:txBody>
@@ -12369,7 +13096,7 @@
             </a:pPr>
             <a:r>
               <a:rPr sz="2000" b="1"/>
-              <a:t>🖐 Try it yourself</a:t>
+              <a:t>🖐 Field habit</a:t>
             </a:r>
           </a:p>
           <a:p>
@@ -12378,17 +13105,25 @@
             </a:pPr>
             <a:r>
               <a:rPr sz="2000"/>
-              <a:t>Predict what </a:t>
+              <a:t>Run </a:t>
             </a:r>
             <a:r>
               <a:rPr sz="2000">
                 <a:latin typeface="Courier"/>
               </a:rPr>
-              <a:t>write_csv(pine_wrangled_df, "data/pine_needles_wrangled.csv")</a:t>
-            </a:r>
-            <a:r>
-              <a:rPr sz="2000"/>
-              <a:t> does if that file doesn’t exist yet. What if it already does?</a:t>
+              <a:t>unique()</a:t>
+            </a:r>
+            <a:r>
+              <a:rPr sz="2000"/>
+              <a:t> on </a:t>
+            </a:r>
+            <a:r>
+              <a:rPr sz="2000" i="1"/>
+              <a:t>every</a:t>
+            </a:r>
+            <a:r>
+              <a:rPr sz="2000"/>
+              <a:t> text column the first time you open a dataset. It takes seconds and it is how you find the problems that silently split your groups.</a:t>
             </a:r>
           </a:p>
         </p:txBody>
@@ -12443,7 +13178,7 @@
             </a:pPr>
             <a:r>
               <a:rPr/>
-              <a:t>Wrap-up</a:t>
+              <a:t>Numbers that aren’t numbers</a:t>
             </a:r>
           </a:p>
         </p:txBody>
@@ -12463,304 +13198,1284 @@
           <a:bodyPr/>
           <a:lstStyle/>
           <a:p>
+            <a:pPr lvl="0" indent="0">
+              <a:buNone/>
+            </a:pPr>
+            <a:r>
+              <a:rPr>
+                <a:solidFill>
+                  <a:srgbClr val="4758AB"/>
+                </a:solidFill>
+                <a:latin typeface="Courier"/>
+              </a:rPr>
+              <a:t>class</a:t>
+            </a:r>
+            <a:r>
+              <a:rPr>
+                <a:solidFill>
+                  <a:srgbClr val="003B4F"/>
+                </a:solidFill>
+                <a:latin typeface="Courier"/>
+              </a:rPr>
+              <a:t>(needle_fixed_df</a:t>
+            </a:r>
+            <a:r>
+              <a:rPr>
+                <a:solidFill>
+                  <a:srgbClr val="5E5E5E"/>
+                </a:solidFill>
+                <a:latin typeface="Courier"/>
+              </a:rPr>
+              <a:t>$</a:t>
+            </a:r>
+            <a:r>
+              <a:rPr>
+                <a:solidFill>
+                  <a:srgbClr val="003B4F"/>
+                </a:solidFill>
+                <a:latin typeface="Courier"/>
+              </a:rPr>
+              <a:t>needle_length_mm)</a:t>
+            </a:r>
+          </a:p>
+          <a:p>
+            <a:pPr lvl="0" indent="0">
+              <a:buNone/>
+            </a:pPr>
+            <a:r>
+              <a:rPr>
+                <a:latin typeface="Courier"/>
+              </a:rPr>
+              <a:t>[1] "character"</a:t>
+            </a:r>
+          </a:p>
+          <a:p>
+            <a:pPr lvl="0" indent="0">
+              <a:buNone/>
+            </a:pPr>
+            <a:r>
+              <a:rPr>
+                <a:solidFill>
+                  <a:srgbClr val="4758AB"/>
+                </a:solidFill>
+                <a:latin typeface="Courier"/>
+              </a:rPr>
+              <a:t>class</a:t>
+            </a:r>
+            <a:r>
+              <a:rPr>
+                <a:solidFill>
+                  <a:srgbClr val="003B4F"/>
+                </a:solidFill>
+                <a:latin typeface="Courier"/>
+              </a:rPr>
+              <a:t>(needle_fixed_df</a:t>
+            </a:r>
+            <a:r>
+              <a:rPr>
+                <a:solidFill>
+                  <a:srgbClr val="5E5E5E"/>
+                </a:solidFill>
+                <a:latin typeface="Courier"/>
+              </a:rPr>
+              <a:t>$</a:t>
+            </a:r>
+            <a:r>
+              <a:rPr>
+                <a:solidFill>
+                  <a:srgbClr val="003B4F"/>
+                </a:solidFill>
+                <a:latin typeface="Courier"/>
+              </a:rPr>
+              <a:t>needle_width_mm)</a:t>
+            </a:r>
+          </a:p>
+          <a:p>
+            <a:pPr lvl="0" indent="0">
+              <a:buNone/>
+            </a:pPr>
+            <a:r>
+              <a:rPr>
+                <a:latin typeface="Courier"/>
+              </a:rPr>
+              <a:t>[1] "character"</a:t>
+            </a:r>
+          </a:p>
+          <a:p>
             <a:pPr lvl="0" indent="0" marL="0">
               <a:buNone/>
             </a:pPr>
             <a:r>
+              <a:rPr b="1"/>
+              <a:t>Both</a:t>
+            </a:r>
+            <a:r>
               <a:rPr/>
-              <a:t>Today you:</a:t>
-            </a:r>
-          </a:p>
-          <a:p>
-            <a:pPr lvl="0"/>
+              <a:t> imported as text, not numbers — somebody typed </a:t>
+            </a:r>
+            <a:r>
+              <a:rPr>
+                <a:latin typeface="Courier"/>
+              </a:rPr>
+              <a:t>17.73 mm</a:t>
+            </a:r>
             <a:r>
               <a:rPr/>
-              <a:t>Imported the same data from a </a:t>
-            </a:r>
-            <a:r>
-              <a:rPr>
-                <a:latin typeface="Courier"/>
-              </a:rPr>
-              <a:t>.csv</a:t>
+              <a:t> in a cell, somebody used a comma decimal (</a:t>
+            </a:r>
+            <a:r>
+              <a:rPr>
+                <a:latin typeface="Courier"/>
+              </a:rPr>
+              <a:t>13,98</a:t>
             </a:r>
             <a:r>
               <a:rPr/>
+              <a:t>), and the missing values were written four different ways.</a:t>
+            </a:r>
+          </a:p>
+          <a:p>
+            <a:pPr lvl="0" indent="0">
+              <a:buNone/>
+            </a:pPr>
+            <a:r>
+              <a:rPr>
+                <a:solidFill>
+                  <a:srgbClr val="003B4F"/>
+                </a:solidFill>
+                <a:latin typeface="Courier"/>
+              </a:rPr>
+              <a:t>needle_final_df &lt;- needle_fixed_df </a:t>
+            </a:r>
+            <a:r>
+              <a:rPr>
+                <a:solidFill>
+                  <a:srgbClr val="5E5E5E"/>
+                </a:solidFill>
+                <a:latin typeface="Courier"/>
+              </a:rPr>
+              <a:t>|&gt;</a:t>
+            </a:r>
+            <a:br/>
+            <a:r>
+              <a:rPr>
+                <a:solidFill>
+                  <a:srgbClr val="003B4F"/>
+                </a:solidFill>
+                <a:latin typeface="Courier"/>
+              </a:rPr>
+              <a:t>  </a:t>
+            </a:r>
+            <a:r>
+              <a:rPr>
+                <a:solidFill>
+                  <a:srgbClr val="4758AB"/>
+                </a:solidFill>
+                <a:latin typeface="Courier"/>
+              </a:rPr>
+              <a:t>mutate</a:t>
+            </a:r>
+            <a:r>
+              <a:rPr>
+                <a:solidFill>
+                  <a:srgbClr val="003B4F"/>
+                </a:solidFill>
+                <a:latin typeface="Courier"/>
+              </a:rPr>
+              <a:t>(</a:t>
+            </a:r>
+            <a:br/>
+            <a:r>
+              <a:rPr>
+                <a:solidFill>
+                  <a:srgbClr val="003B4F"/>
+                </a:solidFill>
+                <a:latin typeface="Courier"/>
+              </a:rPr>
+              <a:t>    </a:t>
+            </a:r>
+            <a:r>
+              <a:rPr>
+                <a:solidFill>
+                  <a:srgbClr val="657422"/>
+                </a:solidFill>
+                <a:latin typeface="Courier"/>
+              </a:rPr>
+              <a:t>team =</a:t>
+            </a:r>
+            <a:r>
+              <a:rPr>
+                <a:solidFill>
+                  <a:srgbClr val="003B4F"/>
+                </a:solidFill>
+                <a:latin typeface="Courier"/>
+              </a:rPr>
               <a:t> </a:t>
             </a:r>
             <a:r>
-              <a:rPr b="1"/>
-              <a:t>and</a:t>
-            </a:r>
-            <a:r>
-              <a:rPr/>
-              <a:t> an </a:t>
-            </a:r>
-            <a:r>
-              <a:rPr>
-                <a:latin typeface="Courier"/>
-              </a:rPr>
-              <a:t>.xlsx</a:t>
-            </a:r>
-          </a:p>
-          <a:p>
-            <a:pPr lvl="0"/>
-            <a:r>
-              <a:rPr/>
-              <a:t>Used </a:t>
-            </a:r>
-            <a:r>
-              <a:rPr>
-                <a:latin typeface="Courier"/>
-              </a:rPr>
-              <a:t>filter()</a:t>
-            </a:r>
-            <a:r>
-              <a:rPr/>
+              <a:rPr>
+                <a:solidFill>
+                  <a:srgbClr val="4758AB"/>
+                </a:solidFill>
+                <a:latin typeface="Courier"/>
+              </a:rPr>
+              <a:t>case_when</a:t>
+            </a:r>
+            <a:r>
+              <a:rPr>
+                <a:solidFill>
+                  <a:srgbClr val="003B4F"/>
+                </a:solidFill>
+                <a:latin typeface="Courier"/>
+              </a:rPr>
+              <a:t>(team </a:t>
+            </a:r>
+            <a:r>
+              <a:rPr>
+                <a:solidFill>
+                  <a:srgbClr val="5E5E5E"/>
+                </a:solidFill>
+                <a:latin typeface="Courier"/>
+              </a:rPr>
+              <a:t>==</a:t>
+            </a:r>
+            <a:r>
+              <a:rPr>
+                <a:solidFill>
+                  <a:srgbClr val="003B4F"/>
+                </a:solidFill>
+                <a:latin typeface="Courier"/>
+              </a:rPr>
+              <a:t> </a:t>
+            </a:r>
+            <a:r>
+              <a:rPr>
+                <a:solidFill>
+                  <a:srgbClr val="20794D"/>
+                </a:solidFill>
+                <a:latin typeface="Courier"/>
+              </a:rPr>
+              <a:t>"water bugs"</a:t>
+            </a:r>
+            <a:r>
+              <a:rPr>
+                <a:solidFill>
+                  <a:srgbClr val="003B4F"/>
+                </a:solidFill>
+                <a:latin typeface="Courier"/>
+              </a:rPr>
+              <a:t> </a:t>
+            </a:r>
+            <a:r>
+              <a:rPr>
+                <a:solidFill>
+                  <a:srgbClr val="5E5E5E"/>
+                </a:solidFill>
+                <a:latin typeface="Courier"/>
+              </a:rPr>
+              <a:t>~</a:t>
+            </a:r>
+            <a:r>
+              <a:rPr>
+                <a:solidFill>
+                  <a:srgbClr val="003B4F"/>
+                </a:solidFill>
+                <a:latin typeface="Courier"/>
+              </a:rPr>
+              <a:t> </a:t>
+            </a:r>
+            <a:r>
+              <a:rPr>
+                <a:solidFill>
+                  <a:srgbClr val="20794D"/>
+                </a:solidFill>
+                <a:latin typeface="Courier"/>
+              </a:rPr>
+              <a:t>"waterbugs"</a:t>
+            </a:r>
+            <a:r>
+              <a:rPr>
+                <a:solidFill>
+                  <a:srgbClr val="003B4F"/>
+                </a:solidFill>
+                <a:latin typeface="Courier"/>
+              </a:rPr>
+              <a:t>,</a:t>
+            </a:r>
+            <a:br/>
+            <a:r>
+              <a:rPr>
+                <a:solidFill>
+                  <a:srgbClr val="003B4F"/>
+                </a:solidFill>
+                <a:latin typeface="Courier"/>
+              </a:rPr>
+              <a:t>                     </a:t>
+            </a:r>
+            <a:r>
+              <a:rPr>
+                <a:solidFill>
+                  <a:srgbClr val="8F5902"/>
+                </a:solidFill>
+                <a:latin typeface="Courier"/>
+              </a:rPr>
+              <a:t>TRUE</a:t>
+            </a:r>
+            <a:r>
+              <a:rPr>
+                <a:solidFill>
+                  <a:srgbClr val="003B4F"/>
+                </a:solidFill>
+                <a:latin typeface="Courier"/>
+              </a:rPr>
+              <a:t>                 </a:t>
+            </a:r>
+            <a:r>
+              <a:rPr>
+                <a:solidFill>
+                  <a:srgbClr val="5E5E5E"/>
+                </a:solidFill>
+                <a:latin typeface="Courier"/>
+              </a:rPr>
+              <a:t>~</a:t>
+            </a:r>
+            <a:r>
+              <a:rPr>
+                <a:solidFill>
+                  <a:srgbClr val="003B4F"/>
+                </a:solidFill>
+                <a:latin typeface="Courier"/>
+              </a:rPr>
+              <a:t> team),</a:t>
+            </a:r>
+            <a:br/>
+            <a:r>
+              <a:rPr>
+                <a:solidFill>
+                  <a:srgbClr val="003B4F"/>
+                </a:solidFill>
+                <a:latin typeface="Courier"/>
+              </a:rPr>
+              <a:t>    </a:t>
+            </a:r>
+            <a:r>
+              <a:rPr>
+                <a:solidFill>
+                  <a:srgbClr val="657422"/>
+                </a:solidFill>
+                <a:latin typeface="Courier"/>
+              </a:rPr>
+              <a:t>needle_length_mm =</a:t>
+            </a:r>
+            <a:r>
+              <a:rPr>
+                <a:solidFill>
+                  <a:srgbClr val="003B4F"/>
+                </a:solidFill>
+                <a:latin typeface="Courier"/>
+              </a:rPr>
+              <a:t> needle_length_mm </a:t>
+            </a:r>
+            <a:r>
+              <a:rPr>
+                <a:solidFill>
+                  <a:srgbClr val="5E5E5E"/>
+                </a:solidFill>
+                <a:latin typeface="Courier"/>
+              </a:rPr>
+              <a:t>|&gt;</a:t>
+            </a:r>
+            <a:br/>
+            <a:r>
+              <a:rPr>
+                <a:solidFill>
+                  <a:srgbClr val="003B4F"/>
+                </a:solidFill>
+                <a:latin typeface="Courier"/>
+              </a:rPr>
+              <a:t>      </a:t>
+            </a:r>
+            <a:r>
+              <a:rPr>
+                <a:solidFill>
+                  <a:srgbClr val="4758AB"/>
+                </a:solidFill>
+                <a:latin typeface="Courier"/>
+              </a:rPr>
+              <a:t>str_remove</a:t>
+            </a:r>
+            <a:r>
+              <a:rPr>
+                <a:solidFill>
+                  <a:srgbClr val="003B4F"/>
+                </a:solidFill>
+                <a:latin typeface="Courier"/>
+              </a:rPr>
+              <a:t>(</a:t>
+            </a:r>
+            <a:r>
+              <a:rPr>
+                <a:solidFill>
+                  <a:srgbClr val="20794D"/>
+                </a:solidFill>
+                <a:latin typeface="Courier"/>
+              </a:rPr>
+              <a:t>" mm"</a:t>
+            </a:r>
+            <a:r>
+              <a:rPr>
+                <a:solidFill>
+                  <a:srgbClr val="003B4F"/>
+                </a:solidFill>
+                <a:latin typeface="Courier"/>
+              </a:rPr>
+              <a:t>) </a:t>
+            </a:r>
+            <a:r>
+              <a:rPr>
+                <a:solidFill>
+                  <a:srgbClr val="5E5E5E"/>
+                </a:solidFill>
+                <a:latin typeface="Courier"/>
+              </a:rPr>
+              <a:t>|&gt;</a:t>
+            </a:r>
+            <a:r>
+              <a:rPr>
+                <a:solidFill>
+                  <a:srgbClr val="003B4F"/>
+                </a:solidFill>
+                <a:latin typeface="Courier"/>
+              </a:rPr>
+              <a:t>                    </a:t>
+            </a:r>
+            <a:r>
+              <a:rPr>
+                <a:solidFill>
+                  <a:srgbClr val="5E5E5E"/>
+                </a:solidFill>
+                <a:latin typeface="Courier"/>
+              </a:rPr>
+              <a:t># drop the typed unit</a:t>
+            </a:r>
+            <a:br/>
+            <a:r>
+              <a:rPr>
+                <a:solidFill>
+                  <a:srgbClr val="003B4F"/>
+                </a:solidFill>
+                <a:latin typeface="Courier"/>
+              </a:rPr>
+              <a:t>      </a:t>
+            </a:r>
+            <a:r>
+              <a:rPr>
+                <a:solidFill>
+                  <a:srgbClr val="4758AB"/>
+                </a:solidFill>
+                <a:latin typeface="Courier"/>
+              </a:rPr>
+              <a:t>str_replace</a:t>
+            </a:r>
+            <a:r>
+              <a:rPr>
+                <a:solidFill>
+                  <a:srgbClr val="003B4F"/>
+                </a:solidFill>
+                <a:latin typeface="Courier"/>
+              </a:rPr>
+              <a:t>(</a:t>
+            </a:r>
+            <a:r>
+              <a:rPr>
+                <a:solidFill>
+                  <a:srgbClr val="20794D"/>
+                </a:solidFill>
+                <a:latin typeface="Courier"/>
+              </a:rPr>
+              <a:t>","</a:t>
+            </a:r>
+            <a:r>
+              <a:rPr>
+                <a:solidFill>
+                  <a:srgbClr val="003B4F"/>
+                </a:solidFill>
+                <a:latin typeface="Courier"/>
+              </a:rPr>
               <a:t>, </a:t>
             </a:r>
             <a:r>
               <a:rPr>
-                <a:latin typeface="Courier"/>
-              </a:rPr>
-              <a:t>select()</a:t>
-            </a:r>
-            <a:r>
-              <a:rPr/>
-              <a:t>, </a:t>
-            </a:r>
-            <a:r>
-              <a:rPr>
-                <a:latin typeface="Courier"/>
-              </a:rPr>
-              <a:t>mutate()</a:t>
-            </a:r>
-            <a:r>
-              <a:rPr/>
-              <a:t>, and </a:t>
-            </a:r>
-            <a:r>
-              <a:rPr>
-                <a:latin typeface="Courier"/>
-              </a:rPr>
-              <a:t>arrange()</a:t>
-            </a:r>
-            <a:r>
-              <a:rPr/>
-              <a:t> — and chained them into a pipeline</a:t>
-            </a:r>
-          </a:p>
-          <a:p>
-            <a:pPr lvl="0"/>
-            <a:r>
-              <a:rPr/>
-              <a:t>Filtered with the full boolean toolkit: </a:t>
-            </a:r>
-            <a:r>
-              <a:rPr>
+                <a:solidFill>
+                  <a:srgbClr val="20794D"/>
+                </a:solidFill>
+                <a:latin typeface="Courier"/>
+              </a:rPr>
+              <a:t>"."</a:t>
+            </a:r>
+            <a:r>
+              <a:rPr>
+                <a:solidFill>
+                  <a:srgbClr val="003B4F"/>
+                </a:solidFill>
+                <a:latin typeface="Courier"/>
+              </a:rPr>
+              <a:t>) </a:t>
+            </a:r>
+            <a:r>
+              <a:rPr>
+                <a:solidFill>
+                  <a:srgbClr val="5E5E5E"/>
+                </a:solidFill>
+                <a:latin typeface="Courier"/>
+              </a:rPr>
+              <a:t>|&gt;</a:t>
+            </a:r>
+            <a:r>
+              <a:rPr>
+                <a:solidFill>
+                  <a:srgbClr val="003B4F"/>
+                </a:solidFill>
+                <a:latin typeface="Courier"/>
+              </a:rPr>
+              <a:t>                </a:t>
+            </a:r>
+            <a:r>
+              <a:rPr>
+                <a:solidFill>
+                  <a:srgbClr val="5E5E5E"/>
+                </a:solidFill>
+                <a:latin typeface="Courier"/>
+              </a:rPr>
+              <a:t># comma decimal -&gt; point</a:t>
+            </a:r>
+            <a:br/>
+            <a:r>
+              <a:rPr>
+                <a:solidFill>
+                  <a:srgbClr val="003B4F"/>
+                </a:solidFill>
+                <a:latin typeface="Courier"/>
+              </a:rPr>
+              <a:t>      </a:t>
+            </a:r>
+            <a:r>
+              <a:rPr>
+                <a:solidFill>
+                  <a:srgbClr val="4758AB"/>
+                </a:solidFill>
+                <a:latin typeface="Courier"/>
+              </a:rPr>
+              <a:t>na_if</a:t>
+            </a:r>
+            <a:r>
+              <a:rPr>
+                <a:solidFill>
+                  <a:srgbClr val="003B4F"/>
+                </a:solidFill>
+                <a:latin typeface="Courier"/>
+              </a:rPr>
+              <a:t>(</a:t>
+            </a:r>
+            <a:r>
+              <a:rPr>
+                <a:solidFill>
+                  <a:srgbClr val="20794D"/>
+                </a:solidFill>
+                <a:latin typeface="Courier"/>
+              </a:rPr>
+              <a:t>""</a:t>
+            </a:r>
+            <a:r>
+              <a:rPr>
+                <a:solidFill>
+                  <a:srgbClr val="003B4F"/>
+                </a:solidFill>
+                <a:latin typeface="Courier"/>
+              </a:rPr>
+              <a:t>) </a:t>
+            </a:r>
+            <a:r>
+              <a:rPr>
+                <a:solidFill>
+                  <a:srgbClr val="5E5E5E"/>
+                </a:solidFill>
+                <a:latin typeface="Courier"/>
+              </a:rPr>
+              <a:t>|&gt;</a:t>
+            </a:r>
+            <a:r>
+              <a:rPr>
+                <a:solidFill>
+                  <a:srgbClr val="003B4F"/>
+                </a:solidFill>
+                <a:latin typeface="Courier"/>
+              </a:rPr>
+              <a:t> </a:t>
+            </a:r>
+            <a:r>
+              <a:rPr>
+                <a:solidFill>
+                  <a:srgbClr val="4758AB"/>
+                </a:solidFill>
+                <a:latin typeface="Courier"/>
+              </a:rPr>
+              <a:t>na_if</a:t>
+            </a:r>
+            <a:r>
+              <a:rPr>
+                <a:solidFill>
+                  <a:srgbClr val="003B4F"/>
+                </a:solidFill>
+                <a:latin typeface="Courier"/>
+              </a:rPr>
+              <a:t>(</a:t>
+            </a:r>
+            <a:r>
+              <a:rPr>
+                <a:solidFill>
+                  <a:srgbClr val="20794D"/>
+                </a:solidFill>
+                <a:latin typeface="Courier"/>
+              </a:rPr>
+              <a:t>"NA"</a:t>
+            </a:r>
+            <a:r>
+              <a:rPr>
+                <a:solidFill>
+                  <a:srgbClr val="003B4F"/>
+                </a:solidFill>
+                <a:latin typeface="Courier"/>
+              </a:rPr>
+              <a:t>) </a:t>
+            </a:r>
+            <a:r>
+              <a:rPr>
+                <a:solidFill>
+                  <a:srgbClr val="5E5E5E"/>
+                </a:solidFill>
+                <a:latin typeface="Courier"/>
+              </a:rPr>
+              <a:t>|&gt;</a:t>
+            </a:r>
+            <a:r>
+              <a:rPr>
+                <a:solidFill>
+                  <a:srgbClr val="003B4F"/>
+                </a:solidFill>
+                <a:latin typeface="Courier"/>
+              </a:rPr>
+              <a:t>             </a:t>
+            </a:r>
+            <a:r>
+              <a:rPr>
+                <a:solidFill>
+                  <a:srgbClr val="5E5E5E"/>
+                </a:solidFill>
+                <a:latin typeface="Courier"/>
+              </a:rPr>
+              <a:t># blank and literal "NA"</a:t>
+            </a:r>
+            <a:br/>
+            <a:r>
+              <a:rPr>
+                <a:solidFill>
+                  <a:srgbClr val="003B4F"/>
+                </a:solidFill>
+                <a:latin typeface="Courier"/>
+              </a:rPr>
+              <a:t>      </a:t>
+            </a:r>
+            <a:r>
+              <a:rPr>
+                <a:solidFill>
+                  <a:srgbClr val="4758AB"/>
+                </a:solidFill>
+                <a:latin typeface="Courier"/>
+              </a:rPr>
+              <a:t>as.numeric</a:t>
+            </a:r>
+            <a:r>
+              <a:rPr>
+                <a:solidFill>
+                  <a:srgbClr val="003B4F"/>
+                </a:solidFill>
+                <a:latin typeface="Courier"/>
+              </a:rPr>
+              <a:t>(),</a:t>
+            </a:r>
+            <a:br/>
+            <a:r>
+              <a:rPr>
+                <a:solidFill>
+                  <a:srgbClr val="003B4F"/>
+                </a:solidFill>
+                <a:latin typeface="Courier"/>
+              </a:rPr>
+              <a:t>    </a:t>
+            </a:r>
+            <a:r>
+              <a:rPr>
+                <a:solidFill>
+                  <a:srgbClr val="657422"/>
+                </a:solidFill>
+                <a:latin typeface="Courier"/>
+              </a:rPr>
+              <a:t>needle_width_mm =</a:t>
+            </a:r>
+            <a:r>
+              <a:rPr>
+                <a:solidFill>
+                  <a:srgbClr val="003B4F"/>
+                </a:solidFill>
+                <a:latin typeface="Courier"/>
+              </a:rPr>
+              <a:t> needle_width_mm </a:t>
+            </a:r>
+            <a:r>
+              <a:rPr>
+                <a:solidFill>
+                  <a:srgbClr val="5E5E5E"/>
+                </a:solidFill>
+                <a:latin typeface="Courier"/>
+              </a:rPr>
+              <a:t>|&gt;</a:t>
+            </a:r>
+            <a:br/>
+            <a:r>
+              <a:rPr>
+                <a:solidFill>
+                  <a:srgbClr val="003B4F"/>
+                </a:solidFill>
+                <a:latin typeface="Courier"/>
+              </a:rPr>
+              <a:t>      </a:t>
+            </a:r>
+            <a:r>
+              <a:rPr>
+                <a:solidFill>
+                  <a:srgbClr val="4758AB"/>
+                </a:solidFill>
+                <a:latin typeface="Courier"/>
+              </a:rPr>
+              <a:t>na_if</a:t>
+            </a:r>
+            <a:r>
+              <a:rPr>
+                <a:solidFill>
+                  <a:srgbClr val="003B4F"/>
+                </a:solidFill>
+                <a:latin typeface="Courier"/>
+              </a:rPr>
+              <a:t>(</a:t>
+            </a:r>
+            <a:r>
+              <a:rPr>
+                <a:solidFill>
+                  <a:srgbClr val="20794D"/>
+                </a:solidFill>
+                <a:latin typeface="Courier"/>
+              </a:rPr>
+              <a:t>""</a:t>
+            </a:r>
+            <a:r>
+              <a:rPr>
+                <a:solidFill>
+                  <a:srgbClr val="003B4F"/>
+                </a:solidFill>
+                <a:latin typeface="Courier"/>
+              </a:rPr>
+              <a:t>) </a:t>
+            </a:r>
+            <a:r>
+              <a:rPr>
+                <a:solidFill>
+                  <a:srgbClr val="5E5E5E"/>
+                </a:solidFill>
+                <a:latin typeface="Courier"/>
+              </a:rPr>
+              <a:t>|&gt;</a:t>
+            </a:r>
+            <a:r>
+              <a:rPr>
+                <a:solidFill>
+                  <a:srgbClr val="003B4F"/>
+                </a:solidFill>
+                <a:latin typeface="Courier"/>
+              </a:rPr>
+              <a:t> </a:t>
+            </a:r>
+            <a:r>
+              <a:rPr>
+                <a:solidFill>
+                  <a:srgbClr val="4758AB"/>
+                </a:solidFill>
+                <a:latin typeface="Courier"/>
+              </a:rPr>
+              <a:t>na_if</a:t>
+            </a:r>
+            <a:r>
+              <a:rPr>
+                <a:solidFill>
+                  <a:srgbClr val="003B4F"/>
+                </a:solidFill>
+                <a:latin typeface="Courier"/>
+              </a:rPr>
+              <a:t>(</a:t>
+            </a:r>
+            <a:r>
+              <a:rPr>
+                <a:solidFill>
+                  <a:srgbClr val="20794D"/>
+                </a:solidFill>
+                <a:latin typeface="Courier"/>
+              </a:rPr>
+              <a:t>"na"</a:t>
+            </a:r>
+            <a:r>
+              <a:rPr>
+                <a:solidFill>
+                  <a:srgbClr val="003B4F"/>
+                </a:solidFill>
+                <a:latin typeface="Courier"/>
+              </a:rPr>
+              <a:t>) </a:t>
+            </a:r>
+            <a:r>
+              <a:rPr>
+                <a:solidFill>
+                  <a:srgbClr val="5E5E5E"/>
+                </a:solidFill>
+                <a:latin typeface="Courier"/>
+              </a:rPr>
+              <a:t>|&gt;</a:t>
+            </a:r>
+            <a:r>
+              <a:rPr>
+                <a:solidFill>
+                  <a:srgbClr val="003B4F"/>
+                </a:solidFill>
+                <a:latin typeface="Courier"/>
+              </a:rPr>
+              <a:t> </a:t>
+            </a:r>
+            <a:r>
+              <a:rPr>
+                <a:solidFill>
+                  <a:srgbClr val="4758AB"/>
+                </a:solidFill>
+                <a:latin typeface="Courier"/>
+              </a:rPr>
+              <a:t>na_if</a:t>
+            </a:r>
+            <a:r>
+              <a:rPr>
+                <a:solidFill>
+                  <a:srgbClr val="003B4F"/>
+                </a:solidFill>
+                <a:latin typeface="Courier"/>
+              </a:rPr>
+              <a:t>(</a:t>
+            </a:r>
+            <a:r>
+              <a:rPr>
+                <a:solidFill>
+                  <a:srgbClr val="20794D"/>
+                </a:solidFill>
+                <a:latin typeface="Courier"/>
+              </a:rPr>
+              <a:t>"."</a:t>
+            </a:r>
+            <a:r>
+              <a:rPr>
+                <a:solidFill>
+                  <a:srgbClr val="003B4F"/>
+                </a:solidFill>
+                <a:latin typeface="Courier"/>
+              </a:rPr>
+              <a:t>) </a:t>
+            </a:r>
+            <a:r>
+              <a:rPr>
+                <a:solidFill>
+                  <a:srgbClr val="5E5E5E"/>
+                </a:solidFill>
+                <a:latin typeface="Courier"/>
+              </a:rPr>
+              <a:t>|&gt;</a:t>
+            </a:r>
+            <a:r>
+              <a:rPr>
+                <a:solidFill>
+                  <a:srgbClr val="003B4F"/>
+                </a:solidFill>
+                <a:latin typeface="Courier"/>
+              </a:rPr>
+              <a:t>   </a:t>
+            </a:r>
+            <a:r>
+              <a:rPr>
+                <a:solidFill>
+                  <a:srgbClr val="5E5E5E"/>
+                </a:solidFill>
+                <a:latin typeface="Courier"/>
+              </a:rPr>
+              <a:t># three more ways to write "missing"</a:t>
+            </a:r>
+            <a:br/>
+            <a:r>
+              <a:rPr>
+                <a:solidFill>
+                  <a:srgbClr val="003B4F"/>
+                </a:solidFill>
+                <a:latin typeface="Courier"/>
+              </a:rPr>
+              <a:t>      </a:t>
+            </a:r>
+            <a:r>
+              <a:rPr>
+                <a:solidFill>
+                  <a:srgbClr val="4758AB"/>
+                </a:solidFill>
+                <a:latin typeface="Courier"/>
+              </a:rPr>
+              <a:t>as.numeric</a:t>
+            </a:r>
+            <a:r>
+              <a:rPr>
+                <a:solidFill>
+                  <a:srgbClr val="003B4F"/>
+                </a:solidFill>
+                <a:latin typeface="Courier"/>
+              </a:rPr>
+              <a:t>(),</a:t>
+            </a:r>
+            <a:br/>
+            <a:r>
+              <a:rPr>
+                <a:solidFill>
+                  <a:srgbClr val="003B4F"/>
+                </a:solidFill>
+                <a:latin typeface="Courier"/>
+              </a:rPr>
+              <a:t>    </a:t>
+            </a:r>
+            <a:r>
+              <a:rPr>
+                <a:solidFill>
+                  <a:srgbClr val="657422"/>
+                </a:solidFill>
+                <a:latin typeface="Courier"/>
+              </a:rPr>
+              <a:t>needle_length_mm =</a:t>
+            </a:r>
+            <a:r>
+              <a:rPr>
+                <a:solidFill>
+                  <a:srgbClr val="003B4F"/>
+                </a:solidFill>
+                <a:latin typeface="Courier"/>
+              </a:rPr>
+              <a:t> </a:t>
+            </a:r>
+            <a:r>
+              <a:rPr>
+                <a:solidFill>
+                  <a:srgbClr val="4758AB"/>
+                </a:solidFill>
+                <a:latin typeface="Courier"/>
+              </a:rPr>
+              <a:t>if_else</a:t>
+            </a:r>
+            <a:r>
+              <a:rPr>
+                <a:solidFill>
+                  <a:srgbClr val="003B4F"/>
+                </a:solidFill>
+                <a:latin typeface="Courier"/>
+              </a:rPr>
+              <a:t>(needle_length_mm </a:t>
+            </a:r>
+            <a:r>
+              <a:rPr>
+                <a:solidFill>
+                  <a:srgbClr val="5E5E5E"/>
+                </a:solidFill>
                 <a:latin typeface="Courier"/>
               </a:rPr>
               <a:t>==</a:t>
             </a:r>
             <a:r>
-              <a:rPr/>
-              <a:t>, </a:t>
-            </a:r>
-            <a:r>
-              <a:rPr>
-                <a:latin typeface="Courier"/>
-              </a:rPr>
-              <a:t>!=</a:t>
-            </a:r>
-            <a:r>
-              <a:rPr/>
-              <a:t>, </a:t>
-            </a:r>
-            <a:r>
-              <a:rPr>
-                <a:latin typeface="Courier"/>
-              </a:rPr>
-              <a:t>&gt;</a:t>
-            </a:r>
-            <a:r>
-              <a:rPr/>
-              <a:t>/</a:t>
-            </a:r>
-            <a:r>
-              <a:rPr>
-                <a:latin typeface="Courier"/>
-              </a:rPr>
-              <a:t>&lt;</a:t>
-            </a:r>
-            <a:r>
-              <a:rPr/>
-              <a:t>, </a:t>
-            </a:r>
-            <a:r>
-              <a:rPr>
-                <a:latin typeface="Courier"/>
-              </a:rPr>
-              <a:t>%in%</a:t>
-            </a:r>
-            <a:r>
-              <a:rPr/>
-              <a:t>, </a:t>
-            </a:r>
-            <a:r>
-              <a:rPr>
-                <a:latin typeface="Courier"/>
-              </a:rPr>
-              <a:t>is.na()</a:t>
-            </a:r>
-            <a:r>
-              <a:rPr/>
-              <a:t>, AND (</a:t>
-            </a:r>
-            <a:r>
-              <a:rPr>
+              <a:rPr>
+                <a:solidFill>
+                  <a:srgbClr val="003B4F"/>
+                </a:solidFill>
+                <a:latin typeface="Courier"/>
+              </a:rPr>
+              <a:t> </a:t>
+            </a:r>
+            <a:r>
+              <a:rPr>
+                <a:solidFill>
+                  <a:srgbClr val="5E5E5E"/>
+                </a:solidFill>
+                <a:latin typeface="Courier"/>
+              </a:rPr>
+              <a:t>-</a:t>
+            </a:r>
+            <a:r>
+              <a:rPr>
+                <a:solidFill>
+                  <a:srgbClr val="AD0000"/>
+                </a:solidFill>
+                <a:latin typeface="Courier"/>
+              </a:rPr>
+              <a:t>999</a:t>
+            </a:r>
+            <a:r>
+              <a:rPr>
+                <a:solidFill>
+                  <a:srgbClr val="003B4F"/>
+                </a:solidFill>
                 <a:latin typeface="Courier"/>
               </a:rPr>
               <a:t>,</a:t>
             </a:r>
-            <a:r>
-              <a:rPr/>
-              <a:t>) vs. OR (</a:t>
-            </a:r>
-            <a:r>
-              <a:rPr>
-                <a:latin typeface="Courier"/>
-              </a:rPr>
-              <a:t>|</a:t>
-            </a:r>
-            <a:r>
-              <a:rPr/>
-              <a:t>)</a:t>
-            </a:r>
-          </a:p>
-          <a:p>
-            <a:pPr lvl="0"/>
-            <a:r>
-              <a:rPr/>
-              <a:t>Recoded and binned columns with </a:t>
-            </a:r>
-            <a:r>
-              <a:rPr>
-                <a:latin typeface="Courier"/>
-              </a:rPr>
-              <a:t>case_when()</a:t>
-            </a:r>
-            <a:r>
-              <a:rPr/>
-              <a:t> — always ending in a </a:t>
-            </a:r>
-            <a:r>
-              <a:rPr>
-                <a:latin typeface="Courier"/>
-              </a:rPr>
-              <a:t>TRUE ~</a:t>
-            </a:r>
-            <a:r>
-              <a:rPr/>
-              <a:t> catch-all</a:t>
-            </a:r>
-          </a:p>
-          <a:p>
-            <a:pPr lvl="0"/>
-            <a:r>
-              <a:rPr/>
-              <a:t>Converted units and log-transformed a column with </a:t>
-            </a:r>
-            <a:r>
-              <a:rPr>
-                <a:latin typeface="Courier"/>
-              </a:rPr>
-              <a:t>mutate()</a:t>
-            </a:r>
-          </a:p>
-          <a:p>
-            <a:pPr lvl="0"/>
-            <a:r>
-              <a:rPr/>
-              <a:t>Caught and removed duplicate rows with </a:t>
-            </a:r>
-            <a:r>
-              <a:rPr>
-                <a:latin typeface="Courier"/>
-              </a:rPr>
-              <a:t>distinct()</a:t>
-            </a:r>
-          </a:p>
-          <a:p>
-            <a:pPr lvl="0"/>
-            <a:r>
-              <a:rPr/>
-              <a:t>Saved a new file with </a:t>
-            </a:r>
-            <a:r>
-              <a:rPr>
-                <a:latin typeface="Courier"/>
-              </a:rPr>
-              <a:t>write_csv()</a:t>
-            </a:r>
-            <a:r>
-              <a:rPr/>
-              <a:t> without touching the raw data</a:t>
-            </a:r>
-          </a:p>
-          <a:p>
-            <a:pPr lvl="0" indent="0" marL="1270000">
-              <a:buNone/>
-            </a:pPr>
-            <a:r>
-              <a:rPr sz="2000" b="1"/>
-              <a:t>Tip</a:t>
-            </a:r>
-          </a:p>
-          <a:p>
-            <a:pPr lvl="0" indent="0" marL="1270000">
-              <a:buNone/>
-            </a:pPr>
-            <a:r>
-              <a:rPr sz="2000" b="1"/>
-              <a:t>🖐 Before next class</a:t>
-            </a:r>
-          </a:p>
-          <a:p>
-            <a:pPr lvl="0" indent="0" marL="1270000">
-              <a:buNone/>
-            </a:pPr>
-            <a:r>
-              <a:rPr sz="2000"/>
-              <a:t>Finish the worksheet: wrangle </a:t>
-            </a:r>
-            <a:r>
-              <a:rPr sz="2000">
-                <a:latin typeface="Courier"/>
-              </a:rPr>
-              <a:t>pine_needles.csv</a:t>
-            </a:r>
-            <a:r>
-              <a:rPr sz="2000"/>
-              <a:t> into a new data frame with at least one unit conversion, one log transform, and one </a:t>
-            </a:r>
-            <a:r>
-              <a:rPr sz="2000">
-                <a:latin typeface="Courier"/>
-              </a:rPr>
-              <a:t>case_when()</a:t>
-            </a:r>
-            <a:r>
-              <a:rPr sz="2000"/>
-              <a:t> category, then save it with </a:t>
-            </a:r>
-            <a:r>
-              <a:rPr sz="2000">
-                <a:latin typeface="Courier"/>
-              </a:rPr>
-              <a:t>write_csv()</a:t>
-            </a:r>
-            <a:r>
-              <a:rPr sz="2000"/>
-              <a:t>.</a:t>
+            <a:br/>
+            <a:r>
+              <a:rPr>
+                <a:solidFill>
+                  <a:srgbClr val="003B4F"/>
+                </a:solidFill>
+                <a:latin typeface="Courier"/>
+              </a:rPr>
+              <a:t>                               </a:t>
+            </a:r>
+            <a:r>
+              <a:rPr>
+                <a:solidFill>
+                  <a:srgbClr val="8F5902"/>
+                </a:solidFill>
+                <a:latin typeface="Courier"/>
+              </a:rPr>
+              <a:t>NA_real_</a:t>
+            </a:r>
+            <a:r>
+              <a:rPr>
+                <a:solidFill>
+                  <a:srgbClr val="003B4F"/>
+                </a:solidFill>
+                <a:latin typeface="Courier"/>
+              </a:rPr>
+              <a:t>, needle_length_mm)   </a:t>
+            </a:r>
+            <a:r>
+              <a:rPr>
+                <a:solidFill>
+                  <a:srgbClr val="5E5E5E"/>
+                </a:solidFill>
+                <a:latin typeface="Courier"/>
+              </a:rPr>
+              <a:t># sentinel value</a:t>
+            </a:r>
+            <a:br/>
+            <a:r>
+              <a:rPr>
+                <a:solidFill>
+                  <a:srgbClr val="003B4F"/>
+                </a:solidFill>
+                <a:latin typeface="Courier"/>
+              </a:rPr>
+              <a:t>  )</a:t>
+            </a:r>
+            <a:br/>
+            <a:br/>
+            <a:r>
+              <a:rPr>
+                <a:solidFill>
+                  <a:srgbClr val="4758AB"/>
+                </a:solidFill>
+                <a:latin typeface="Courier"/>
+              </a:rPr>
+              <a:t>class</a:t>
+            </a:r>
+            <a:r>
+              <a:rPr>
+                <a:solidFill>
+                  <a:srgbClr val="003B4F"/>
+                </a:solidFill>
+                <a:latin typeface="Courier"/>
+              </a:rPr>
+              <a:t>(needle_final_df</a:t>
+            </a:r>
+            <a:r>
+              <a:rPr>
+                <a:solidFill>
+                  <a:srgbClr val="5E5E5E"/>
+                </a:solidFill>
+                <a:latin typeface="Courier"/>
+              </a:rPr>
+              <a:t>$</a:t>
+            </a:r>
+            <a:r>
+              <a:rPr>
+                <a:solidFill>
+                  <a:srgbClr val="003B4F"/>
+                </a:solidFill>
+                <a:latin typeface="Courier"/>
+              </a:rPr>
+              <a:t>needle_length_mm)</a:t>
+            </a:r>
+          </a:p>
+          <a:p>
+            <a:pPr lvl="0" indent="0">
+              <a:buNone/>
+            </a:pPr>
+            <a:r>
+              <a:rPr>
+                <a:latin typeface="Courier"/>
+              </a:rPr>
+              <a:t>[1] "numeric"</a:t>
+            </a:r>
+          </a:p>
+          <a:p>
+            <a:pPr lvl="0" indent="0">
+              <a:buNone/>
+            </a:pPr>
+            <a:r>
+              <a:rPr>
+                <a:solidFill>
+                  <a:srgbClr val="4758AB"/>
+                </a:solidFill>
+                <a:latin typeface="Courier"/>
+              </a:rPr>
+              <a:t>sum</a:t>
+            </a:r>
+            <a:r>
+              <a:rPr>
+                <a:solidFill>
+                  <a:srgbClr val="003B4F"/>
+                </a:solidFill>
+                <a:latin typeface="Courier"/>
+              </a:rPr>
+              <a:t>(</a:t>
+            </a:r>
+            <a:r>
+              <a:rPr>
+                <a:solidFill>
+                  <a:srgbClr val="4758AB"/>
+                </a:solidFill>
+                <a:latin typeface="Courier"/>
+              </a:rPr>
+              <a:t>is.na</a:t>
+            </a:r>
+            <a:r>
+              <a:rPr>
+                <a:solidFill>
+                  <a:srgbClr val="003B4F"/>
+                </a:solidFill>
+                <a:latin typeface="Courier"/>
+              </a:rPr>
+              <a:t>(needle_final_df</a:t>
+            </a:r>
+            <a:r>
+              <a:rPr>
+                <a:solidFill>
+                  <a:srgbClr val="5E5E5E"/>
+                </a:solidFill>
+                <a:latin typeface="Courier"/>
+              </a:rPr>
+              <a:t>$</a:t>
+            </a:r>
+            <a:r>
+              <a:rPr>
+                <a:solidFill>
+                  <a:srgbClr val="003B4F"/>
+                </a:solidFill>
+                <a:latin typeface="Courier"/>
+              </a:rPr>
+              <a:t>needle_length_mm))</a:t>
+            </a:r>
+          </a:p>
+          <a:p>
+            <a:pPr lvl="0" indent="0">
+              <a:buNone/>
+            </a:pPr>
+            <a:r>
+              <a:rPr>
+                <a:latin typeface="Courier"/>
+              </a:rPr>
+              <a:t>[1] 3</a:t>
+            </a:r>
+          </a:p>
+          <a:p>
+            <a:pPr lvl="0" indent="0">
+              <a:buNone/>
+            </a:pPr>
+            <a:r>
+              <a:rPr>
+                <a:solidFill>
+                  <a:srgbClr val="4758AB"/>
+                </a:solidFill>
+                <a:latin typeface="Courier"/>
+              </a:rPr>
+              <a:t>sum</a:t>
+            </a:r>
+            <a:r>
+              <a:rPr>
+                <a:solidFill>
+                  <a:srgbClr val="003B4F"/>
+                </a:solidFill>
+                <a:latin typeface="Courier"/>
+              </a:rPr>
+              <a:t>(</a:t>
+            </a:r>
+            <a:r>
+              <a:rPr>
+                <a:solidFill>
+                  <a:srgbClr val="4758AB"/>
+                </a:solidFill>
+                <a:latin typeface="Courier"/>
+              </a:rPr>
+              <a:t>is.na</a:t>
+            </a:r>
+            <a:r>
+              <a:rPr>
+                <a:solidFill>
+                  <a:srgbClr val="003B4F"/>
+                </a:solidFill>
+                <a:latin typeface="Courier"/>
+              </a:rPr>
+              <a:t>(needle_final_df</a:t>
+            </a:r>
+            <a:r>
+              <a:rPr>
+                <a:solidFill>
+                  <a:srgbClr val="5E5E5E"/>
+                </a:solidFill>
+                <a:latin typeface="Courier"/>
+              </a:rPr>
+              <a:t>$</a:t>
+            </a:r>
+            <a:r>
+              <a:rPr>
+                <a:solidFill>
+                  <a:srgbClr val="003B4F"/>
+                </a:solidFill>
+                <a:latin typeface="Courier"/>
+              </a:rPr>
+              <a:t>needle_width_mm))</a:t>
+            </a:r>
+          </a:p>
+          <a:p>
+            <a:pPr lvl="0" indent="0">
+              <a:buNone/>
+            </a:pPr>
+            <a:r>
+              <a:rPr>
+                <a:latin typeface="Courier"/>
+              </a:rPr>
+              <a:t>[1] 5</a:t>
             </a:r>
           </a:p>
         </p:txBody>
@@ -12785,6 +14500,67 @@
             </a:pPr>
             <a:r>
               <a:rPr sz="2000" b="1"/>
+              <a:t>Important</a:t>
+            </a:r>
+          </a:p>
+          <a:p>
+            <a:pPr lvl="0" indent="0" marL="1270000">
+              <a:buNone/>
+            </a:pPr>
+            <a:r>
+              <a:rPr sz="2000" b="1"/>
+              <a:t>⚠️ The trap:</a:t>
+            </a:r>
+            <a:r>
+              <a:rPr sz="2000"/>
+              <a:t> </a:t>
+            </a:r>
+            <a:r>
+              <a:rPr sz="2000">
+                <a:latin typeface="Courier"/>
+              </a:rPr>
+              <a:t>parse_number("13,98")</a:t>
+            </a:r>
+            <a:r>
+              <a:rPr sz="2000"/>
+              <a:t> returns </a:t>
+            </a:r>
+            <a:r>
+              <a:rPr sz="2000" b="1"/>
+              <a:t>1398</a:t>
+            </a:r>
+            <a:r>
+              <a:rPr sz="2000"/>
+              <a:t> — it reads the comma as a thousands separator and never warns you.</a:t>
+            </a:r>
+          </a:p>
+          <a:p>
+            <a:pPr lvl="0" indent="0" marL="1270000">
+              <a:buNone/>
+            </a:pPr>
+            <a:r>
+              <a:rPr sz="2000"/>
+              <a:t>A 1398 mm pine needle is obvious </a:t>
+            </a:r>
+            <a:r>
+              <a:rPr sz="2000" i="1"/>
+              <a:t>if you look</a:t>
+            </a:r>
+            <a:r>
+              <a:rPr sz="2000"/>
+              <a:t>. </a:t>
+            </a:r>
+            <a:r>
+              <a:rPr sz="2000" b="1"/>
+              <a:t>Always summarize or plot a column right after you clean it.</a:t>
+            </a:r>
+          </a:p>
+          <a:p>
+            <a:pPr lvl="0" indent="0" marL="1270000">
+              <a:buNone/>
+            </a:pPr>
+            <a:r>
+              <a:rPr sz="2000" b="1"/>
               <a:t>Note</a:t>
             </a:r>
           </a:p>
@@ -12794,64 +14570,39 @@
             </a:pPr>
             <a:r>
               <a:rPr sz="2000" b="1"/>
-              <a:t>Up next — Describing Your Data</a:t>
+              <a:t>📖 New words</a:t>
             </a:r>
           </a:p>
           <a:p>
             <a:pPr lvl="0"/>
             <a:r>
-              <a:rPr sz="2000"/>
-              <a:t>Mean, median, variance, SD, SE</a:t>
+              <a:rPr sz="2000" b="1">
+                <a:latin typeface="Courier"/>
+              </a:rPr>
+              <a:t>na_if(x, "")</a:t>
+            </a:r>
+            <a:r>
+              <a:rPr sz="2000"/>
+              <a:t> — turn a specific value into </a:t>
+            </a:r>
+            <a:r>
+              <a:rPr sz="2000">
+                <a:latin typeface="Courier"/>
+              </a:rPr>
+              <a:t>NA</a:t>
             </a:r>
           </a:p>
           <a:p>
             <a:pPr lvl="0"/>
             <a:r>
-              <a:rPr sz="2000"/>
-              <a:t>The </a:t>
-            </a:r>
-            <a:r>
-              <a:rPr sz="2000">
-                <a:latin typeface="Courier"/>
-              </a:rPr>
-              <a:t>length()</a:t>
-            </a:r>
-            <a:r>
-              <a:rPr sz="2000"/>
-              <a:t> trap and the </a:t>
-            </a:r>
-            <a:r>
-              <a:rPr sz="2000">
-                <a:latin typeface="Courier"/>
-              </a:rPr>
-              <a:t>sum(!is.na())</a:t>
-            </a:r>
-            <a:r>
-              <a:rPr sz="2000"/>
-              <a:t> fix</a:t>
-            </a:r>
-          </a:p>
-          <a:p>
-            <a:pPr lvl="0"/>
-            <a:r>
-              <a:rPr sz="2000">
-                <a:latin typeface="Courier"/>
-              </a:rPr>
-              <a:t>group_by()</a:t>
-            </a:r>
-            <a:r>
-              <a:rPr sz="2000"/>
-              <a:t> + </a:t>
-            </a:r>
-            <a:r>
-              <a:rPr sz="2000">
-                <a:latin typeface="Courier"/>
-              </a:rPr>
-              <a:t>summarize()</a:t>
-            </a:r>
-            <a:r>
-              <a:rPr sz="2000"/>
-              <a:t> for tidy group comparisons</a:t>
+              <a:rPr sz="2000" b="1">
+                <a:latin typeface="Courier"/>
+              </a:rPr>
+              <a:t>-999</a:t>
+            </a:r>
+            <a:r>
+              <a:rPr sz="2000"/>
+              <a:t> — a “sentinel” code some field sheets use for missing. R has no idea it means missing until you tell it.</a:t>
             </a:r>
           </a:p>
         </p:txBody>
@@ -12903,7 +14654,62 @@
             </a:pPr>
             <a:r>
               <a:rPr/>
-              <a:t>Getting unstuck</a:t>
+              <a:t>Part 4 · Saving Your Work</a:t>
+            </a:r>
+          </a:p>
+        </p:txBody>
+      </p:sp>
+    </p:spTree>
+  </p:cSld>
+</p:sld>
+</file>
+
+<file path=ppt/slides/slide36.xml><?xml version="1.0" encoding="utf-8"?>
+<p:sld xmlns:a="http://schemas.openxmlformats.org/drawingml/2006/main" xmlns:r="http://schemas.openxmlformats.org/officeDocument/2006/relationships" xmlns:p="http://schemas.openxmlformats.org/presentationml/2006/main">
+  <p:cSld>
+    <p:spTree>
+      <p:nvGrpSpPr>
+        <p:cNvPr id="1" name=""/>
+        <p:cNvGrpSpPr/>
+        <p:nvPr/>
+      </p:nvGrpSpPr>
+      <p:grpSpPr>
+        <a:xfrm>
+          <a:off x="0" y="0"/>
+          <a:ext cx="0" cy="0"/>
+          <a:chOff x="0" y="0"/>
+          <a:chExt cx="0" cy="0"/>
+        </a:xfrm>
+      </p:grpSpPr>
+      <p:sp>
+        <p:nvSpPr>
+          <p:cNvPr id="2" name="Title 1"/>
+          <p:cNvSpPr>
+            <a:spLocks noGrp="1"/>
+          </p:cNvSpPr>
+          <p:nvPr>
+            <p:ph type="title"/>
+          </p:nvPr>
+        </p:nvSpPr>
+        <p:spPr>
+          <a:xfrm>
+            <a:off x="0" y="0"/>
+            <a:ext cx="9144000" cy="602780"/>
+          </a:xfrm>
+          <a:solidFill>
+            <a:srgbClr val="70121D"/>
+          </a:solidFill>
+        </p:spPr>
+        <p:txBody>
+          <a:bodyPr/>
+          <a:lstStyle/>
+          <a:p>
+            <a:pPr lvl="0" indent="0" marL="0">
+              <a:buNone/>
+            </a:pPr>
+            <a:r>
+              <a:rPr/>
+              <a:t>The one-way street</a:t>
             </a:r>
           </a:p>
         </p:txBody>
@@ -12915,7 +14721,7 @@
             <a:spLocks noGrp="1"/>
           </p:cNvSpPr>
           <p:nvPr>
-            <p:ph idx="1"/>
+            <p:ph idx="1" sz="half"/>
           </p:nvPr>
         </p:nvSpPr>
         <p:spPr/>
@@ -12928,59 +14734,1134 @@
             </a:pPr>
             <a:r>
               <a:rPr/>
-              <a:t>When code breaks — and it will, that is normal:</a:t>
-            </a:r>
-          </a:p>
-          <a:p>
-            <a:pPr lvl="0" indent="-342900" marL="342900">
-              <a:buAutoNum type="arabicPeriod"/>
-            </a:pPr>
+              <a:t>Everything we did today runs in </a:t>
+            </a:r>
+            <a:r>
+              <a:rPr b="1"/>
+              <a:t>one direction</a:t>
+            </a:r>
             <a:r>
               <a:rPr/>
-              <a:t>Read the </a:t>
+              <a:t>:</a:t>
+            </a:r>
+          </a:p>
+          <a:p>
+            <a:pPr lvl="0" indent="0">
+              <a:buNone/>
+            </a:pPr>
+            <a:r>
+              <a:rPr>
+                <a:latin typeface="Courier"/>
+              </a:rPr>
+              <a:t>data/     ← raw, read-only, never written to
+   │  read_csv()
+   ▼
+scripts/  ← the cleaning code you just wrote
+   │  write_csv()
+   ▼
+output/   ← everything R produces</a:t>
+            </a:r>
+          </a:p>
+          <a:p>
+            <a:pPr lvl="0" indent="0" marL="0">
+              <a:buNone/>
+            </a:pPr>
+            <a:r>
+              <a:rPr/>
+              <a:t>The raw file is </a:t>
             </a:r>
             <a:r>
               <a:rPr b="1"/>
-              <a:t>error message</a:t>
+              <a:t>evidence</a:t>
             </a:r>
             <a:r>
               <a:rPr/>
-              <a:t> out loud; it usually names the line</a:t>
-            </a:r>
-          </a:p>
-          <a:p>
-            <a:pPr lvl="0" indent="-342900" marL="342900">
-              <a:buAutoNum type="arabicPeriod"/>
-            </a:pPr>
+              <a:t>. The script is the </a:t>
+            </a:r>
+            <a:r>
+              <a:rPr b="1"/>
+              <a:t>method</a:t>
+            </a:r>
             <a:r>
               <a:rPr/>
-              <a:t>Check the usual suspects: </a:t>
-            </a:r>
-            <a:r>
-              <a:rPr>
-                <a:latin typeface="Courier"/>
-              </a:rPr>
-              <a:t>library(tidyverse)</a:t>
+              <a:t>. The output is a </a:t>
+            </a:r>
+            <a:r>
+              <a:rPr b="1"/>
+              <a:t>result you can always rebuild</a:t>
             </a:r>
             <a:r>
               <a:rPr/>
-              <a:t> and </a:t>
-            </a:r>
-            <a:r>
-              <a:rPr>
-                <a:latin typeface="Courier"/>
-              </a:rPr>
-              <a:t>library(readxl)</a:t>
-            </a:r>
+              <a:t> by re-running the method on the evidence.</a:t>
+            </a:r>
+          </a:p>
+          <a:p>
+            <a:pPr lvl="0" indent="0" marL="1270000">
+              <a:buNone/>
+            </a:pPr>
+            <a:r>
+              <a:rPr sz="2000" b="1"/>
+              <a:t>Important</a:t>
+            </a:r>
+          </a:p>
+          <a:p>
+            <a:pPr lvl="0" indent="0" marL="1270000">
+              <a:buNone/>
+            </a:pPr>
+            <a:r>
+              <a:rPr sz="2000" b="1"/>
+              <a:t>Never write into </a:t>
+            </a:r>
+            <a:r>
+              <a:rPr sz="2000" b="1">
+                <a:latin typeface="Courier"/>
+              </a:rPr>
+              <a:t>data/</a:t>
+            </a:r>
+            <a:r>
+              <a:rPr sz="2000" b="1"/>
+              <a:t>.</a:t>
+            </a:r>
+            <a:r>
+              <a:rPr sz="2000"/>
+              <a:t> If a script can overwrite the raw file, then one bad run destroys the only copy of what you actually measured — and no one can check your work.</a:t>
+            </a:r>
+          </a:p>
+        </p:txBody>
+      </p:sp>
+      <p:sp>
+        <p:nvSpPr>
+          <p:cNvPr id="4" name="Content Placeholder 3"/>
+          <p:cNvSpPr>
+            <a:spLocks noGrp="1"/>
+          </p:cNvSpPr>
+          <p:nvPr>
+            <p:ph idx="2" sz="half"/>
+          </p:nvPr>
+        </p:nvSpPr>
+        <p:spPr/>
+        <p:txBody>
+          <a:bodyPr/>
+          <a:lstStyle/>
+          <a:p>
+            <a:pPr lvl="0" indent="0" marL="1270000">
+              <a:buNone/>
+            </a:pPr>
+            <a:r>
+              <a:rPr sz="2000" b="1"/>
+              <a:t>Note</a:t>
+            </a:r>
+          </a:p>
+          <a:p>
+            <a:pPr lvl="0" indent="0" marL="1270000">
+              <a:buNone/>
+            </a:pPr>
+            <a:r>
+              <a:rPr sz="2000" b="1"/>
+              <a:t>✅ Key idea</a:t>
+            </a:r>
+          </a:p>
+          <a:p>
+            <a:pPr lvl="0" indent="0" marL="1270000">
+              <a:buNone/>
+            </a:pPr>
+            <a:r>
+              <a:rPr sz="2000"/>
+              <a:t>If you can’t reproduce a result from </a:t>
+            </a:r>
+            <a:r>
+              <a:rPr sz="2000" b="1"/>
+              <a:t>raw data + script</a:t>
+            </a:r>
+            <a:r>
+              <a:rPr sz="2000"/>
+              <a:t>, the problem is in the script — never in the raw file. Keeping </a:t>
+            </a:r>
+            <a:r>
+              <a:rPr sz="2000">
+                <a:latin typeface="Courier"/>
+              </a:rPr>
+              <a:t>data/</a:t>
+            </a:r>
+            <a:r>
+              <a:rPr sz="2000"/>
+              <a:t> read-only is what makes that guarantee possible.</a:t>
+            </a:r>
+          </a:p>
+        </p:txBody>
+      </p:sp>
+    </p:spTree>
+  </p:cSld>
+</p:sld>
+</file>
+
+<file path=ppt/slides/slide37.xml><?xml version="1.0" encoding="utf-8"?>
+<p:sld xmlns:a="http://schemas.openxmlformats.org/drawingml/2006/main" xmlns:r="http://schemas.openxmlformats.org/officeDocument/2006/relationships" xmlns:p="http://schemas.openxmlformats.org/presentationml/2006/main">
+  <p:cSld>
+    <p:spTree>
+      <p:nvGrpSpPr>
+        <p:cNvPr id="1" name=""/>
+        <p:cNvGrpSpPr/>
+        <p:nvPr/>
+      </p:nvGrpSpPr>
+      <p:grpSpPr>
+        <a:xfrm>
+          <a:off x="0" y="0"/>
+          <a:ext cx="0" cy="0"/>
+          <a:chOff x="0" y="0"/>
+          <a:chExt cx="0" cy="0"/>
+        </a:xfrm>
+      </p:grpSpPr>
+      <p:sp>
+        <p:nvSpPr>
+          <p:cNvPr id="2" name="Title 1"/>
+          <p:cNvSpPr>
+            <a:spLocks noGrp="1"/>
+          </p:cNvSpPr>
+          <p:nvPr>
+            <p:ph type="title"/>
+          </p:nvPr>
+        </p:nvSpPr>
+        <p:spPr>
+          <a:xfrm>
+            <a:off x="0" y="0"/>
+            <a:ext cx="9144000" cy="602780"/>
+          </a:xfrm>
+          <a:solidFill>
+            <a:srgbClr val="70121D"/>
+          </a:solidFill>
+        </p:spPr>
+        <p:txBody>
+          <a:bodyPr/>
+          <a:lstStyle/>
+          <a:p>
+            <a:pPr lvl="0" indent="0" marL="0">
+              <a:buNone/>
+            </a:pPr>
             <a:r>
               <a:rPr/>
-              <a:t> loaded? Spelling? A missing </a:t>
-            </a:r>
-            <a:r>
-              <a:rPr>
+              <a:t>Tidy up before you save</a:t>
+            </a:r>
+          </a:p>
+        </p:txBody>
+      </p:sp>
+      <p:sp>
+        <p:nvSpPr>
+          <p:cNvPr id="3" name="Content Placeholder 2"/>
+          <p:cNvSpPr>
+            <a:spLocks noGrp="1"/>
+          </p:cNvSpPr>
+          <p:nvPr>
+            <p:ph idx="1" sz="half"/>
+          </p:nvPr>
+        </p:nvSpPr>
+        <p:spPr/>
+        <p:txBody>
+          <a:bodyPr/>
+          <a:lstStyle/>
+          <a:p>
+            <a:pPr lvl="0" indent="0" marL="0">
+              <a:buNone/>
+            </a:pPr>
+            <a:r>
+              <a:rPr>
+                <a:latin typeface="Courier"/>
+              </a:rPr>
+              <a:t>needle_final_df</a:t>
+            </a:r>
+            <a:r>
+              <a:rPr/>
+              <a:t> still carries the wreckage of cleaning — the original messy columns </a:t>
+            </a:r>
+            <a:r>
+              <a:rPr i="1"/>
+              <a:t>and</a:t>
+            </a:r>
+            <a:r>
+              <a:rPr/>
+              <a:t> our fixed ones:</a:t>
+            </a:r>
+          </a:p>
+          <a:p>
+            <a:pPr lvl="0" indent="0">
+              <a:buNone/>
+            </a:pPr>
+            <a:r>
+              <a:rPr>
+                <a:solidFill>
+                  <a:srgbClr val="4758AB"/>
+                </a:solidFill>
+                <a:latin typeface="Courier"/>
+              </a:rPr>
+              <a:t>names</a:t>
+            </a:r>
+            <a:r>
+              <a:rPr>
+                <a:solidFill>
+                  <a:srgbClr val="003B4F"/>
+                </a:solidFill>
+                <a:latin typeface="Courier"/>
+              </a:rPr>
+              <a:t>(needle_final_df)</a:t>
+            </a:r>
+          </a:p>
+          <a:p>
+            <a:pPr lvl="0" indent="0">
+              <a:buNone/>
+            </a:pPr>
+            <a:r>
+              <a:rPr>
+                <a:latin typeface="Courier"/>
+              </a:rPr>
+              <a:t>[1] "source_file"      "team_name"        "replicate_number" "side_of_tree"    
+[5] "needle_length_mm" "needle_width_mm"  "side"             "team"            </a:t>
+            </a:r>
+          </a:p>
+          <a:p>
+            <a:pPr lvl="0" indent="0" marL="0">
+              <a:buNone/>
+            </a:pPr>
+            <a:r>
+              <a:rPr/>
+              <a:t>Nobody downstream needs </a:t>
+            </a:r>
+            <a:r>
+              <a:rPr>
+                <a:latin typeface="Courier"/>
+              </a:rPr>
+              <a:t>team_name</a:t>
+            </a:r>
+            <a:r>
+              <a:rPr/>
+              <a:t> </a:t>
+            </a:r>
+            <a:r>
+              <a:rPr b="1"/>
+              <a:t>and</a:t>
+            </a:r>
+            <a:r>
+              <a:rPr/>
+              <a:t> </a:t>
+            </a:r>
+            <a:r>
+              <a:rPr>
+                <a:latin typeface="Courier"/>
+              </a:rPr>
+              <a:t>team</a:t>
+            </a:r>
+            <a:r>
+              <a:rPr/>
+              <a:t>. Keep the columns you mean to keep, in the order you want them:</a:t>
+            </a:r>
+          </a:p>
+          <a:p>
+            <a:pPr lvl="0" indent="0">
+              <a:buNone/>
+            </a:pPr>
+            <a:r>
+              <a:rPr>
+                <a:solidFill>
+                  <a:srgbClr val="003B4F"/>
+                </a:solidFill>
+                <a:latin typeface="Courier"/>
+              </a:rPr>
+              <a:t>needle_out_df &lt;- needle_final_df </a:t>
+            </a:r>
+            <a:r>
+              <a:rPr>
+                <a:solidFill>
+                  <a:srgbClr val="5E5E5E"/>
+                </a:solidFill>
+                <a:latin typeface="Courier"/>
+              </a:rPr>
+              <a:t>|&gt;</a:t>
+            </a:r>
+            <a:br/>
+            <a:r>
+              <a:rPr>
+                <a:solidFill>
+                  <a:srgbClr val="003B4F"/>
+                </a:solidFill>
+                <a:latin typeface="Courier"/>
+              </a:rPr>
+              <a:t>  </a:t>
+            </a:r>
+            <a:r>
+              <a:rPr>
+                <a:solidFill>
+                  <a:srgbClr val="4758AB"/>
+                </a:solidFill>
+                <a:latin typeface="Courier"/>
+              </a:rPr>
+              <a:t>select</a:t>
+            </a:r>
+            <a:r>
+              <a:rPr>
+                <a:solidFill>
+                  <a:srgbClr val="003B4F"/>
+                </a:solidFill>
+                <a:latin typeface="Courier"/>
+              </a:rPr>
+              <a:t>(team, side, </a:t>
+            </a:r>
+            <a:r>
+              <a:rPr>
+                <a:solidFill>
+                  <a:srgbClr val="657422"/>
+                </a:solidFill>
+                <a:latin typeface="Courier"/>
+              </a:rPr>
+              <a:t>replicate =</a:t>
+            </a:r>
+            <a:r>
+              <a:rPr>
+                <a:solidFill>
+                  <a:srgbClr val="003B4F"/>
+                </a:solidFill>
+                <a:latin typeface="Courier"/>
+              </a:rPr>
+              <a:t> replicate_number,</a:t>
+            </a:r>
+            <a:br/>
+            <a:r>
+              <a:rPr>
+                <a:solidFill>
+                  <a:srgbClr val="003B4F"/>
+                </a:solidFill>
+                <a:latin typeface="Courier"/>
+              </a:rPr>
+              <a:t>         needle_length_mm, needle_width_mm) </a:t>
+            </a:r>
+            <a:r>
+              <a:rPr>
+                <a:solidFill>
+                  <a:srgbClr val="5E5E5E"/>
+                </a:solidFill>
+                <a:latin typeface="Courier"/>
+              </a:rPr>
+              <a:t>|&gt;</a:t>
+            </a:r>
+            <a:br/>
+            <a:r>
+              <a:rPr>
+                <a:solidFill>
+                  <a:srgbClr val="003B4F"/>
+                </a:solidFill>
+                <a:latin typeface="Courier"/>
+              </a:rPr>
+              <a:t>  </a:t>
+            </a:r>
+            <a:r>
+              <a:rPr>
+                <a:solidFill>
+                  <a:srgbClr val="4758AB"/>
+                </a:solidFill>
+                <a:latin typeface="Courier"/>
+              </a:rPr>
+              <a:t>arrange</a:t>
+            </a:r>
+            <a:r>
+              <a:rPr>
+                <a:solidFill>
+                  <a:srgbClr val="003B4F"/>
+                </a:solidFill>
+                <a:latin typeface="Courier"/>
+              </a:rPr>
+              <a:t>(team, side, replicate)</a:t>
+            </a:r>
+            <a:br/>
+            <a:br/>
+            <a:r>
+              <a:rPr>
+                <a:solidFill>
+                  <a:srgbClr val="4758AB"/>
+                </a:solidFill>
+                <a:latin typeface="Courier"/>
+              </a:rPr>
+              <a:t>glimpse</a:t>
+            </a:r>
+            <a:r>
+              <a:rPr>
+                <a:solidFill>
+                  <a:srgbClr val="003B4F"/>
+                </a:solidFill>
+                <a:latin typeface="Courier"/>
+              </a:rPr>
+              <a:t>(needle_out_df)</a:t>
+            </a:r>
+          </a:p>
+          <a:p>
+            <a:pPr lvl="0" indent="0">
+              <a:buNone/>
+            </a:pPr>
+            <a:r>
+              <a:rPr>
+                <a:latin typeface="Courier"/>
+              </a:rPr>
+              <a:t>Rows: 64
+Columns: 5
+$ team             &lt;chr&gt; "botany", "botany", "botany", "botany", "botany", "bo…
+$ side             &lt;chr&gt; "shady", "shady", "shady", "shady", "shady", "shady",…
+$ replicate        &lt;dbl&gt; 1, 2, 3, 4, 5, 6, 7, 8, 1, 2, 3, 4, 5, 6, 7, 8, 1, 2,…
+$ needle_length_mm &lt;dbl&gt; 16.46, 20.71, 17.59, 15.11, 17.62, 15.34, 14.79, 11.5…
+$ needle_width_mm  &lt;dbl&gt; 0.65, 0.77, 0.94, 0.72, 0.79, 0.90, 1.03, 0.66, 0.98,…</a:t>
+            </a:r>
+          </a:p>
+        </p:txBody>
+      </p:sp>
+      <p:sp>
+        <p:nvSpPr>
+          <p:cNvPr id="4" name="Content Placeholder 3"/>
+          <p:cNvSpPr>
+            <a:spLocks noGrp="1"/>
+          </p:cNvSpPr>
+          <p:nvPr>
+            <p:ph idx="2" sz="half"/>
+          </p:nvPr>
+        </p:nvSpPr>
+        <p:spPr/>
+        <p:txBody>
+          <a:bodyPr/>
+          <a:lstStyle/>
+          <a:p>
+            <a:pPr lvl="0" indent="0" marL="1270000">
+              <a:buNone/>
+            </a:pPr>
+            <a:r>
+              <a:rPr sz="2000" b="1"/>
+              <a:t>Tip</a:t>
+            </a:r>
+          </a:p>
+          <a:p>
+            <a:pPr lvl="0" indent="0" marL="1270000">
+              <a:buNone/>
+            </a:pPr>
+            <a:r>
+              <a:rPr sz="2000" b="1"/>
+              <a:t>🖐 Field habit</a:t>
+            </a:r>
+          </a:p>
+          <a:p>
+            <a:pPr lvl="0" indent="0" marL="1270000">
+              <a:buNone/>
+            </a:pPr>
+            <a:r>
+              <a:rPr sz="2000">
+                <a:latin typeface="Courier"/>
+              </a:rPr>
+              <a:t>select()</a:t>
+            </a:r>
+            <a:r>
+              <a:rPr sz="2000"/>
+              <a:t> right before </a:t>
+            </a:r>
+            <a:r>
+              <a:rPr sz="2000">
+                <a:latin typeface="Courier"/>
+              </a:rPr>
+              <a:t>write_csv()</a:t>
+            </a:r>
+            <a:r>
+              <a:rPr sz="2000"/>
+              <a:t> is the last checkpoint. A saved file with </a:t>
+            </a:r>
+            <a:r>
+              <a:rPr sz="2000">
+                <a:latin typeface="Courier"/>
+              </a:rPr>
+              <a:t>side</a:t>
+            </a:r>
+            <a:r>
+              <a:rPr sz="2000"/>
+              <a:t> </a:t>
+            </a:r>
+            <a:r>
+              <a:rPr sz="2000" i="1"/>
+              <a:t>and</a:t>
+            </a:r>
+            <a:r>
+              <a:rPr sz="2000"/>
+              <a:t> </a:t>
+            </a:r>
+            <a:r>
+              <a:rPr sz="2000">
+                <a:latin typeface="Courier"/>
+              </a:rPr>
+              <a:t>side_of_tree</a:t>
+            </a:r>
+            <a:r>
+              <a:rPr sz="2000"/>
+              <a:t> in it will confuse someone in three months — and that someone is usually you.</a:t>
+            </a:r>
+          </a:p>
+          <a:p>
+            <a:pPr lvl="0" indent="0" marL="1270000">
+              <a:buNone/>
+            </a:pPr>
+            <a:r>
+              <a:rPr sz="2000" b="1"/>
+              <a:t>Note</a:t>
+            </a:r>
+          </a:p>
+          <a:p>
+            <a:pPr lvl="0" indent="0" marL="1270000">
+              <a:buNone/>
+            </a:pPr>
+            <a:r>
+              <a:rPr sz="2000">
+                <a:latin typeface="Courier"/>
+              </a:rPr>
+              <a:t>select(new_name = old_name)</a:t>
+            </a:r>
+            <a:r>
+              <a:rPr sz="2000"/>
+              <a:t> renames while it selects — handy for dropping janitor’s </a:t>
+            </a:r>
+            <a:r>
+              <a:rPr sz="2000">
+                <a:latin typeface="Courier"/>
+              </a:rPr>
+              <a:t>replicate_number</a:t>
+            </a:r>
+            <a:r>
+              <a:rPr sz="2000"/>
+              <a:t> back to </a:t>
+            </a:r>
+            <a:r>
+              <a:rPr sz="2000">
+                <a:latin typeface="Courier"/>
+              </a:rPr>
+              <a:t>replicate</a:t>
+            </a:r>
+            <a:r>
+              <a:rPr sz="2000"/>
+              <a:t>.</a:t>
+            </a:r>
+          </a:p>
+        </p:txBody>
+      </p:sp>
+    </p:spTree>
+  </p:cSld>
+</p:sld>
+</file>
+
+<file path=ppt/slides/slide38.xml><?xml version="1.0" encoding="utf-8"?>
+<p:sld xmlns:a="http://schemas.openxmlformats.org/drawingml/2006/main" xmlns:r="http://schemas.openxmlformats.org/officeDocument/2006/relationships" xmlns:p="http://schemas.openxmlformats.org/presentationml/2006/main">
+  <p:cSld>
+    <p:spTree>
+      <p:nvGrpSpPr>
+        <p:cNvPr id="1" name=""/>
+        <p:cNvGrpSpPr/>
+        <p:nvPr/>
+      </p:nvGrpSpPr>
+      <p:grpSpPr>
+        <a:xfrm>
+          <a:off x="0" y="0"/>
+          <a:ext cx="0" cy="0"/>
+          <a:chOff x="0" y="0"/>
+          <a:chExt cx="0" cy="0"/>
+        </a:xfrm>
+      </p:grpSpPr>
+      <p:sp>
+        <p:nvSpPr>
+          <p:cNvPr id="2" name="Title 1"/>
+          <p:cNvSpPr>
+            <a:spLocks noGrp="1"/>
+          </p:cNvSpPr>
+          <p:nvPr>
+            <p:ph type="title"/>
+          </p:nvPr>
+        </p:nvSpPr>
+        <p:spPr>
+          <a:xfrm>
+            <a:off x="139485" y="78119"/>
+            <a:ext cx="8229600" cy="607682"/>
+          </a:xfrm>
+        </p:spPr>
+        <p:txBody>
+          <a:bodyPr/>
+          <a:lstStyle/>
+          <a:p>
+            <a:pPr lvl="0" indent="0" marL="0">
+              <a:buNone/>
+            </a:pPr>
+            <a:r>
+              <a:rPr>
+                <a:latin typeface="Courier"/>
+              </a:rPr>
+              <a:t>write_csv()</a:t>
+            </a:r>
+            <a:r>
+              <a:rPr/>
+              <a:t> — the mirror image of </a:t>
+            </a:r>
+            <a:r>
+              <a:rPr>
+                <a:latin typeface="Courier"/>
+              </a:rPr>
+              <a:t>read_csv()</a:t>
+            </a:r>
+          </a:p>
+        </p:txBody>
+      </p:sp>
+      <p:sp>
+        <p:nvSpPr>
+          <p:cNvPr id="3" name="Text Placeholder 2"/>
+          <p:cNvSpPr>
+            <a:spLocks noGrp="1"/>
+          </p:cNvSpPr>
+          <p:nvPr>
+            <p:ph idx="1" type="body"/>
+          </p:nvPr>
+        </p:nvSpPr>
+        <p:spPr/>
+        <p:txBody>
+          <a:bodyPr/>
+          <a:lstStyle/>
+          <a:p>
+            <a:pPr lvl="0" indent="0">
+              <a:buNone/>
+            </a:pPr>
+            <a:r>
+              <a:rPr>
+                <a:solidFill>
+                  <a:srgbClr val="4758AB"/>
+                </a:solidFill>
+                <a:latin typeface="Courier"/>
+              </a:rPr>
+              <a:t>write_csv</a:t>
+            </a:r>
+            <a:r>
+              <a:rPr>
+                <a:solidFill>
+                  <a:srgbClr val="003B4F"/>
+                </a:solidFill>
+                <a:latin typeface="Courier"/>
+              </a:rPr>
+              <a:t>(needle_out_df, </a:t>
+            </a:r>
+            <a:r>
+              <a:rPr>
+                <a:solidFill>
+                  <a:srgbClr val="20794D"/>
+                </a:solidFill>
+                <a:latin typeface="Courier"/>
+              </a:rPr>
+              <a:t>"output/pine_needles_cleaned.csv"</a:t>
+            </a:r>
+            <a:r>
+              <a:rPr>
+                <a:solidFill>
+                  <a:srgbClr val="003B4F"/>
+                </a:solidFill>
                 <a:latin typeface="Courier"/>
               </a:rPr>
               <a:t>)</a:t>
+            </a:r>
+          </a:p>
+          <a:p>
+            <a:pPr lvl="0" indent="0" marL="0">
+              <a:buNone/>
+            </a:pPr>
+            <a:r>
+              <a:rPr/>
+              <a:t>Read from </a:t>
+            </a:r>
+            <a:r>
+              <a:rPr>
+                <a:latin typeface="Courier"/>
+              </a:rPr>
+              <a:t>data/</a:t>
+            </a:r>
+            <a:r>
+              <a:rPr/>
+              <a:t>, write to </a:t>
+            </a:r>
+            <a:r>
+              <a:rPr>
+                <a:latin typeface="Courier"/>
+              </a:rPr>
+              <a:t>output/</a:t>
+            </a:r>
+            <a:r>
+              <a:rPr/>
+              <a:t>. Same shape of call, opposite direction:</a:t>
+            </a:r>
+          </a:p>
+        </p:txBody>
+      </p:sp>
+      <p:graphicFrame>
+        <p:nvGraphicFramePr>
+          <p:cNvPr id="6" name="Content Placeholder 5"/>
+          <p:cNvGraphicFramePr>
+            <a:graphicFrameLocks noGrp="1"/>
+          </p:cNvGraphicFramePr>
+          <p:nvPr>
+            <p:ph idx="1"/>
+          </p:nvPr>
+        </p:nvGraphicFramePr>
+        <p:xfrm>
+          <a:off x="127000" y="1270000"/>
+          <a:ext cx="4432300" cy="3302000"/>
+        </p:xfrm>
+        <a:graphic>
+          <a:graphicData uri="http://schemas.openxmlformats.org/drawingml/2006/table">
+            <a:tbl>
+              <a:tblPr firstRow="1" bandRow="1">
+                <a:tableStyleId>{5C22544A-7EE6-4342-B048-85BDC9FD1C3A}</a:tableStyleId>
+              </a:tblPr>
+              <a:tblGrid>
+                <a:gridCol w="2209800"/>
+                <a:gridCol w="2209800"/>
+              </a:tblGrid>
+              <a:tr h="0">
+                <a:tc>
+                  <a:txBody>
+                    <a:bodyPr/>
+                    <a:lstStyle/>
+                    <a:p>
+                      <a:pPr lvl="0" indent="0" marL="0">
+                        <a:buNone/>
+                      </a:pPr>
+                      <a:r>
+                        <a:rPr/>
+                        <a:t>Reading</a:t>
+                      </a:r>
+                    </a:p>
+                  </a:txBody>
+                  <a:tcPr/>
+                </a:tc>
+                <a:tc>
+                  <a:txBody>
+                    <a:bodyPr/>
+                    <a:lstStyle/>
+                    <a:p>
+                      <a:pPr lvl="0" indent="0" marL="0">
+                        <a:buNone/>
+                      </a:pPr>
+                      <a:r>
+                        <a:rPr/>
+                        <a:t>Writing</a:t>
+                      </a:r>
+                    </a:p>
+                  </a:txBody>
+                  <a:tcPr/>
+                </a:tc>
+              </a:tr>
+              <a:tr h="0">
+                <a:tc>
+                  <a:txBody>
+                    <a:bodyPr/>
+                    <a:lstStyle/>
+                    <a:p>
+                      <a:pPr lvl="0" indent="0" marL="0">
+                        <a:buNone/>
+                      </a:pPr>
+                      <a:r>
+                        <a:rPr>
+                          <a:latin typeface="Courier"/>
+                        </a:rPr>
+                        <a:t>read_csv("data/…")</a:t>
+                      </a:r>
+                    </a:p>
+                  </a:txBody>
+                </a:tc>
+                <a:tc>
+                  <a:txBody>
+                    <a:bodyPr/>
+                    <a:lstStyle/>
+                    <a:p>
+                      <a:pPr lvl="0" indent="0" marL="0">
+                        <a:buNone/>
+                      </a:pPr>
+                      <a:r>
+                        <a:rPr>
+                          <a:latin typeface="Courier"/>
+                        </a:rPr>
+                        <a:t>write_csv(df, "output/…")</a:t>
+                      </a:r>
+                    </a:p>
+                  </a:txBody>
+                </a:tc>
+              </a:tr>
+              <a:tr h="0">
+                <a:tc>
+                  <a:txBody>
+                    <a:bodyPr/>
+                    <a:lstStyle/>
+                    <a:p>
+                      <a:pPr lvl="0" indent="0" marL="0">
+                        <a:buNone/>
+                      </a:pPr>
+                      <a:r>
+                        <a:rPr/>
+                        <a:t>file → data frame</a:t>
+                      </a:r>
+                    </a:p>
+                  </a:txBody>
+                </a:tc>
+                <a:tc>
+                  <a:txBody>
+                    <a:bodyPr/>
+                    <a:lstStyle/>
+                    <a:p>
+                      <a:pPr lvl="0" indent="0" marL="0">
+                        <a:buNone/>
+                      </a:pPr>
+                      <a:r>
+                        <a:rPr/>
+                        <a:t>data frame → file</a:t>
+                      </a:r>
+                    </a:p>
+                  </a:txBody>
+                </a:tc>
+              </a:tr>
+            </a:tbl>
+          </a:graphicData>
+        </a:graphic>
+      </p:graphicFrame>
+      <p:sp>
+        <p:nvSpPr>
+          <p:cNvPr id="4" name="Content Placeholder 3"/>
+          <p:cNvSpPr>
+            <a:spLocks noGrp="1"/>
+          </p:cNvSpPr>
+          <p:nvPr>
+            <p:ph idx="2" sz="half"/>
+          </p:nvPr>
+        </p:nvSpPr>
+        <p:spPr/>
+        <p:txBody>
+          <a:bodyPr/>
+          <a:lstStyle/>
+          <a:p>
+            <a:pPr lvl="0" indent="0" marL="1270000">
+              <a:buNone/>
+            </a:pPr>
+            <a:r>
+              <a:rPr sz="2000" b="1"/>
+              <a:t>Warning</a:t>
+            </a:r>
+          </a:p>
+          <a:p>
+            <a:pPr lvl="0" indent="0" marL="1270000">
+              <a:buNone/>
+            </a:pPr>
+            <a:r>
+              <a:rPr sz="2000" b="1"/>
+              <a:t>⚠️ Watch out!</a:t>
+            </a:r>
+          </a:p>
+          <a:p>
+            <a:pPr lvl="0" indent="0" marL="1270000">
+              <a:buNone/>
+            </a:pPr>
+            <a:r>
+              <a:rPr sz="2000">
+                <a:latin typeface="Courier"/>
+              </a:rPr>
+              <a:t>write_csv()</a:t>
+            </a:r>
+            <a:r>
+              <a:rPr sz="2000"/>
+              <a:t> </a:t>
+            </a:r>
+            <a:r>
+              <a:rPr sz="2000" b="1"/>
+              <a:t>overwrites without asking</a:t>
+            </a:r>
+            <a:r>
+              <a:rPr sz="2000"/>
+              <a:t> — no warning, no undo. That is exactly why the target is </a:t>
+            </a:r>
+            <a:r>
+              <a:rPr sz="2000">
+                <a:latin typeface="Courier"/>
+              </a:rPr>
+              <a:t>output/</a:t>
+            </a:r>
+            <a:r>
+              <a:rPr sz="2000"/>
+              <a:t> and never </a:t>
+            </a:r>
+            <a:r>
+              <a:rPr sz="2000">
+                <a:latin typeface="Courier"/>
+              </a:rPr>
+              <a:t>data/</a:t>
+            </a:r>
+            <a:r>
+              <a:rPr sz="2000"/>
+              <a:t>: re-running your script should be free, and it is only free if the thing it clobbers is something the script can rebuild.</a:t>
+            </a:r>
+          </a:p>
+        </p:txBody>
+      </p:sp>
+      <p:sp>
+        <p:nvSpPr>
+          <p:cNvPr id="5" name="Text Placeholder 4"/>
+          <p:cNvSpPr>
+            <a:spLocks noGrp="1"/>
+          </p:cNvSpPr>
+          <p:nvPr>
+            <p:ph idx="3" sz="quarter" type="body"/>
+          </p:nvPr>
+        </p:nvSpPr>
+        <p:spPr/>
+        <p:txBody>
+          <a:bodyPr/>
+          <a:lstStyle/>
+          <a:p>
+            <a:pPr lvl="0" indent="0" marL="1270000">
+              <a:buNone/>
+            </a:pPr>
+            <a:r>
+              <a:rPr sz="2000" b="1"/>
+              <a:t>Note</a:t>
+            </a:r>
+          </a:p>
+          <a:p>
+            <a:pPr lvl="0" indent="0" marL="1270000">
+              <a:buNone/>
+            </a:pPr>
+            <a:r>
+              <a:rPr sz="2000" b="1"/>
+              <a:t>📖 Note the argument order</a:t>
+            </a:r>
+          </a:p>
+          <a:p>
+            <a:pPr lvl="0" indent="0" marL="1270000">
+              <a:buNone/>
+            </a:pPr>
+            <a:r>
+              <a:rPr sz="2000">
+                <a:latin typeface="Courier"/>
+              </a:rPr>
+              <a:t>write_csv(df, path)</a:t>
+            </a:r>
+            <a:r>
+              <a:rPr sz="2000"/>
+              <a:t> — </a:t>
+            </a:r>
+            <a:r>
+              <a:rPr sz="2000" b="1"/>
+              <a:t>data frame first</a:t>
+            </a:r>
+            <a:r>
+              <a:rPr sz="2000"/>
+              <a:t>, then where to put it. </a:t>
+            </a:r>
+            <a:r>
+              <a:rPr sz="2000">
+                <a:latin typeface="Courier"/>
+              </a:rPr>
+              <a:t>read_csv(path)</a:t>
+            </a:r>
+            <a:r>
+              <a:rPr sz="2000"/>
+              <a:t> takes only the path. Getting these backwards is one of the most common errors of the term.</a:t>
+            </a:r>
+          </a:p>
+        </p:txBody>
+      </p:sp>
+    </p:spTree>
+  </p:cSld>
+</p:sld>
+</file>
+
+<file path=ppt/slides/slide39.xml><?xml version="1.0" encoding="utf-8"?>
+<p:sld xmlns:a="http://schemas.openxmlformats.org/drawingml/2006/main" xmlns:r="http://schemas.openxmlformats.org/officeDocument/2006/relationships" xmlns:p="http://schemas.openxmlformats.org/presentationml/2006/main">
+  <p:cSld>
+    <p:spTree>
+      <p:nvGrpSpPr>
+        <p:cNvPr id="1" name=""/>
+        <p:cNvGrpSpPr/>
+        <p:nvPr/>
+      </p:nvGrpSpPr>
+      <p:grpSpPr>
+        <a:xfrm>
+          <a:off x="0" y="0"/>
+          <a:ext cx="0" cy="0"/>
+          <a:chOff x="0" y="0"/>
+          <a:chExt cx="0" cy="0"/>
+        </a:xfrm>
+      </p:grpSpPr>
+      <p:sp>
+        <p:nvSpPr>
+          <p:cNvPr id="2" name="Title 1"/>
+          <p:cNvSpPr>
+            <a:spLocks noGrp="1"/>
+          </p:cNvSpPr>
+          <p:nvPr>
+            <p:ph type="title"/>
+          </p:nvPr>
+        </p:nvSpPr>
+        <p:spPr>
+          <a:xfrm>
+            <a:off x="0" y="0"/>
+            <a:ext cx="9144000" cy="602780"/>
+          </a:xfrm>
+          <a:solidFill>
+            <a:srgbClr val="70121D"/>
+          </a:solidFill>
+        </p:spPr>
+        <p:txBody>
+          <a:bodyPr/>
+          <a:lstStyle/>
+          <a:p>
+            <a:pPr lvl="0" indent="0" marL="0">
+              <a:buNone/>
+            </a:pPr>
+            <a:r>
+              <a:rPr/>
+              <a:t>Naming your saved files</a:t>
+            </a:r>
+          </a:p>
+        </p:txBody>
+      </p:sp>
+      <p:sp>
+        <p:nvSpPr>
+          <p:cNvPr id="3" name="Content Placeholder 2"/>
+          <p:cNvSpPr>
+            <a:spLocks noGrp="1"/>
+          </p:cNvSpPr>
+          <p:nvPr>
+            <p:ph idx="1" sz="half"/>
+          </p:nvPr>
+        </p:nvSpPr>
+        <p:spPr/>
+        <p:txBody>
+          <a:bodyPr/>
+          <a:lstStyle/>
+          <a:p>
+            <a:pPr lvl="0"/>
+            <a:r>
+              <a:rPr/>
+              <a:t>Name the file for </a:t>
+            </a:r>
+            <a:r>
+              <a:rPr b="1"/>
+              <a:t>what happened to it</a:t>
+            </a:r>
+            <a:r>
+              <a:rPr/>
+              <a:t>: </a:t>
+            </a:r>
+            <a:r>
+              <a:rPr>
+                <a:latin typeface="Courier"/>
+              </a:rPr>
+              <a:t>pine_needles_cleaned.csv</a:t>
+            </a:r>
+            <a:r>
+              <a:rPr/>
+              <a:t>, not </a:t>
+            </a:r>
+            <a:r>
+              <a:rPr>
+                <a:latin typeface="Courier"/>
+              </a:rPr>
+              <a:t>pine2.csv</a:t>
             </a:r>
             <a:r>
               <a:rPr/>
@@ -12990,51 +15871,45 @@
               <a:rPr>
                 <a:latin typeface="Courier"/>
               </a:rPr>
-              <a:t>|&gt;</a:t>
-            </a:r>
+              <a:t>final.csv</a:t>
+            </a:r>
+          </a:p>
+          <a:p>
+            <a:pPr lvl="0"/>
             <a:r>
               <a:rPr/>
-              <a:t> at the </a:t>
-            </a:r>
-            <a:r>
-              <a:rPr i="1"/>
-              <a:t>start</a:t>
+              <a:t>If a script produces several stages, number them: </a:t>
+            </a:r>
+            <a:r>
+              <a:rPr>
+                <a:latin typeface="Courier"/>
+              </a:rPr>
+              <a:t>01_cleaned.csv</a:t>
             </a:r>
             <a:r>
               <a:rPr/>
-              <a:t> of a line?</a:t>
-            </a:r>
-          </a:p>
-          <a:p>
-            <a:pPr lvl="0" indent="-342900" marL="342900">
-              <a:buAutoNum type="arabicPeriod"/>
-            </a:pPr>
-            <a:r>
-              <a:rPr>
-                <a:latin typeface="Courier"/>
-              </a:rPr>
-              <a:t>?function_name</a:t>
-            </a:r>
+              <a:t>, </a:t>
+            </a:r>
+            <a:r>
+              <a:rPr>
+                <a:latin typeface="Courier"/>
+              </a:rPr>
+              <a:t>02_summarised.csv</a:t>
+            </a:r>
+          </a:p>
+          <a:p>
+            <a:pPr lvl="0"/>
             <a:r>
               <a:rPr/>
-              <a:t> opens the help page</a:t>
-            </a:r>
-          </a:p>
-          <a:p>
-            <a:pPr lvl="0" indent="-342900" marL="342900">
-              <a:buAutoNum type="arabicPeriod"/>
-            </a:pPr>
+              <a:t>Anyone re-running your script from scratch should get a </a:t>
+            </a:r>
+            <a:r>
+              <a:rPr b="1"/>
+              <a:t>byte-identical</a:t>
+            </a:r>
             <a:r>
               <a:rPr/>
-              <a:t>Bring the </a:t>
-            </a:r>
-            <a:r>
-              <a:rPr b="1"/>
-              <a:t>exact error</a:t>
-            </a:r>
-            <a:r>
-              <a:rPr/>
-              <a:t> (copy-paste it) to class or office hours</a:t>
+              <a:t> output file</a:t>
             </a:r>
           </a:p>
           <a:p>
@@ -13043,7 +15918,7 @@
             </a:pPr>
             <a:r>
               <a:rPr sz="2000" b="1"/>
-              <a:t>Note</a:t>
+              <a:t>Warning</a:t>
             </a:r>
           </a:p>
           <a:p>
@@ -13052,7 +15927,7 @@
             </a:pPr>
             <a:r>
               <a:rPr sz="2000" b="1"/>
-              <a:t>✅ Key idea</a:t>
+              <a:t>⚠️ Watch out!</a:t>
             </a:r>
           </a:p>
           <a:p>
@@ -13060,8 +15935,100 @@
               <a:buNone/>
             </a:pPr>
             <a:r>
-              <a:rPr sz="2000"/>
-              <a:t>Every working scientist googles error messages daily. Getting stuck is not failing — it is the job.</a:t>
+              <a:rPr sz="2000">
+                <a:latin typeface="Courier"/>
+              </a:rPr>
+              <a:t>final.csv</a:t>
+            </a:r>
+            <a:r>
+              <a:rPr sz="2000"/>
+              <a:t>, </a:t>
+            </a:r>
+            <a:r>
+              <a:rPr sz="2000">
+                <a:latin typeface="Courier"/>
+              </a:rPr>
+              <a:t>final_v2.csv</a:t>
+            </a:r>
+            <a:r>
+              <a:rPr sz="2000"/>
+              <a:t>, </a:t>
+            </a:r>
+            <a:r>
+              <a:rPr sz="2000">
+                <a:latin typeface="Courier"/>
+              </a:rPr>
+              <a:t>final_FINAL.csv</a:t>
+            </a:r>
+            <a:r>
+              <a:rPr sz="2000"/>
+              <a:t> — version control by filename. This is exactly the mess a project folder with clear names and a re-runnable script is meant to prevent.</a:t>
+            </a:r>
+          </a:p>
+        </p:txBody>
+      </p:sp>
+      <p:sp>
+        <p:nvSpPr>
+          <p:cNvPr id="4" name="Content Placeholder 3"/>
+          <p:cNvSpPr>
+            <a:spLocks noGrp="1"/>
+          </p:cNvSpPr>
+          <p:nvPr>
+            <p:ph idx="2" sz="half"/>
+          </p:nvPr>
+        </p:nvSpPr>
+        <p:spPr/>
+        <p:txBody>
+          <a:bodyPr/>
+          <a:lstStyle/>
+          <a:p>
+            <a:pPr lvl="0" indent="0" marL="1270000">
+              <a:buNone/>
+            </a:pPr>
+            <a:r>
+              <a:rPr sz="2000" b="1"/>
+              <a:t>Tip</a:t>
+            </a:r>
+          </a:p>
+          <a:p>
+            <a:pPr lvl="0" indent="0" marL="1270000">
+              <a:buNone/>
+            </a:pPr>
+            <a:r>
+              <a:rPr sz="2000" b="1"/>
+              <a:t>🖐 Try it yourself</a:t>
+            </a:r>
+          </a:p>
+          <a:p>
+            <a:pPr lvl="0" indent="0" marL="1270000">
+              <a:buNone/>
+            </a:pPr>
+            <a:r>
+              <a:rPr sz="2000"/>
+              <a:t>Delete your </a:t>
+            </a:r>
+            <a:r>
+              <a:rPr sz="2000">
+                <a:latin typeface="Courier"/>
+              </a:rPr>
+              <a:t>output/</a:t>
+            </a:r>
+            <a:r>
+              <a:rPr sz="2000"/>
+              <a:t> folder entirely, then re-run your script top to bottom.</a:t>
+            </a:r>
+          </a:p>
+          <a:p>
+            <a:pPr lvl="0" indent="0" marL="1270000">
+              <a:buNone/>
+            </a:pPr>
+            <a:r>
+              <a:rPr sz="2000"/>
+              <a:t>Everything should come back. </a:t>
+            </a:r>
+            <a:r>
+              <a:rPr sz="2000" b="1"/>
+              <a:t>If it doesn’t, something important only exists in your console history — and that is a bug in your script.</a:t>
             </a:r>
           </a:p>
         </p:txBody>
@@ -13155,6 +16122,27 @@
             </a:r>
           </a:p>
           <a:p>
+            <a:pPr lvl="0" indent="0" marL="0">
+              <a:buNone/>
+            </a:pPr>
+            <a:r>
+              <a:rPr>
+                <a:hlinkClick r:id="rId2"/>
+              </a:rPr>
+              <a:t>📥 Download the data</a:t>
+            </a:r>
+            <a:r>
+              <a:rPr/>
+              <a:t> </a:t>
+            </a:r>
+            <a:r>
+              <a:rPr>
+                <a:hlinkClick r:id="rId3"/>
+              </a:rPr>
+              <a:t>📥 The messy version</a:t>
+            </a:r>
+          </a:p>
+          <a:p>
             <a:pPr lvl="0" indent="0">
               <a:buNone/>
             </a:pPr>
@@ -13250,7 +16238,7 @@
                 </a:solidFill>
                 <a:latin typeface="Courier"/>
               </a:rPr>
-              <a:t># cleans variable names, excel poop, rounding issues</a:t>
+              <a:t># cleans messy column names, Excel artifacts, rounding</a:t>
             </a:r>
             <a:br/>
             <a:br/>
@@ -13288,7 +16276,7 @@
                 </a:solidFill>
                 <a:latin typeface="Courier"/>
               </a:rPr>
-              <a:t>"data/pine_needles.csv"</a:t>
+              <a:t>"data/pine_data.csv"</a:t>
             </a:r>
             <a:r>
               <a:rPr>
@@ -13334,7 +16322,7 @@
                 </a:solidFill>
                 <a:latin typeface="Courier"/>
               </a:rPr>
-              <a:t>"data/pine_needles.xlsx"</a:t>
+              <a:t>"data/pine_data.xlsx"</a:t>
             </a:r>
             <a:r>
               <a:rPr>
@@ -13534,6 +16522,742 @@
             <a:r>
               <a:rPr sz="2000"/>
               <a:t> line.</a:t>
+            </a:r>
+          </a:p>
+        </p:txBody>
+      </p:sp>
+    </p:spTree>
+  </p:cSld>
+</p:sld>
+</file>
+
+<file path=ppt/slides/slide40.xml><?xml version="1.0" encoding="utf-8"?>
+<p:sld xmlns:a="http://schemas.openxmlformats.org/drawingml/2006/main" xmlns:r="http://schemas.openxmlformats.org/officeDocument/2006/relationships" xmlns:p="http://schemas.openxmlformats.org/presentationml/2006/main">
+  <p:cSld>
+    <p:spTree>
+      <p:nvGrpSpPr>
+        <p:cNvPr id="1" name=""/>
+        <p:cNvGrpSpPr/>
+        <p:nvPr/>
+      </p:nvGrpSpPr>
+      <p:grpSpPr>
+        <a:xfrm>
+          <a:off x="0" y="0"/>
+          <a:ext cx="0" cy="0"/>
+          <a:chOff x="0" y="0"/>
+          <a:chExt cx="0" cy="0"/>
+        </a:xfrm>
+      </p:grpSpPr>
+      <p:sp>
+        <p:nvSpPr>
+          <p:cNvPr id="2" name="Title 1"/>
+          <p:cNvSpPr>
+            <a:spLocks noGrp="1"/>
+          </p:cNvSpPr>
+          <p:nvPr>
+            <p:ph type="title"/>
+          </p:nvPr>
+        </p:nvSpPr>
+        <p:spPr>
+          <a:xfrm>
+            <a:off x="0" y="0"/>
+            <a:ext cx="9144000" cy="602780"/>
+          </a:xfrm>
+          <a:solidFill>
+            <a:srgbClr val="70121D"/>
+          </a:solidFill>
+        </p:spPr>
+        <p:txBody>
+          <a:bodyPr/>
+          <a:lstStyle/>
+          <a:p>
+            <a:pPr lvl="0" indent="0" marL="0">
+              <a:buNone/>
+            </a:pPr>
+            <a:r>
+              <a:rPr/>
+              <a:t>Wrap-up</a:t>
+            </a:r>
+          </a:p>
+        </p:txBody>
+      </p:sp>
+      <p:sp>
+        <p:nvSpPr>
+          <p:cNvPr id="3" name="Content Placeholder 2"/>
+          <p:cNvSpPr>
+            <a:spLocks noGrp="1"/>
+          </p:cNvSpPr>
+          <p:nvPr>
+            <p:ph idx="1" sz="half"/>
+          </p:nvPr>
+        </p:nvSpPr>
+        <p:spPr/>
+        <p:txBody>
+          <a:bodyPr/>
+          <a:lstStyle/>
+          <a:p>
+            <a:pPr lvl="0" indent="0" marL="0">
+              <a:buNone/>
+            </a:pPr>
+            <a:r>
+              <a:rPr/>
+              <a:t>Today you:</a:t>
+            </a:r>
+          </a:p>
+          <a:p>
+            <a:pPr lvl="0"/>
+            <a:r>
+              <a:rPr/>
+              <a:t>Imported the same data from a </a:t>
+            </a:r>
+            <a:r>
+              <a:rPr>
+                <a:latin typeface="Courier"/>
+              </a:rPr>
+              <a:t>.csv</a:t>
+            </a:r>
+            <a:r>
+              <a:rPr/>
+              <a:t> </a:t>
+            </a:r>
+            <a:r>
+              <a:rPr b="1"/>
+              <a:t>and</a:t>
+            </a:r>
+            <a:r>
+              <a:rPr/>
+              <a:t> an </a:t>
+            </a:r>
+            <a:r>
+              <a:rPr>
+                <a:latin typeface="Courier"/>
+              </a:rPr>
+              <a:t>.xlsx</a:t>
+            </a:r>
+          </a:p>
+          <a:p>
+            <a:pPr lvl="0"/>
+            <a:r>
+              <a:rPr/>
+              <a:t>Used </a:t>
+            </a:r>
+            <a:r>
+              <a:rPr>
+                <a:latin typeface="Courier"/>
+              </a:rPr>
+              <a:t>filter()</a:t>
+            </a:r>
+            <a:r>
+              <a:rPr/>
+              <a:t>, </a:t>
+            </a:r>
+            <a:r>
+              <a:rPr>
+                <a:latin typeface="Courier"/>
+              </a:rPr>
+              <a:t>select()</a:t>
+            </a:r>
+            <a:r>
+              <a:rPr/>
+              <a:t>, </a:t>
+            </a:r>
+            <a:r>
+              <a:rPr>
+                <a:latin typeface="Courier"/>
+              </a:rPr>
+              <a:t>mutate()</a:t>
+            </a:r>
+            <a:r>
+              <a:rPr/>
+              <a:t>, and </a:t>
+            </a:r>
+            <a:r>
+              <a:rPr>
+                <a:latin typeface="Courier"/>
+              </a:rPr>
+              <a:t>arrange()</a:t>
+            </a:r>
+            <a:r>
+              <a:rPr/>
+              <a:t> — and chained them into a pipeline</a:t>
+            </a:r>
+          </a:p>
+          <a:p>
+            <a:pPr lvl="0"/>
+            <a:r>
+              <a:rPr/>
+              <a:t>Filtered with the full boolean toolkit: </a:t>
+            </a:r>
+            <a:r>
+              <a:rPr>
+                <a:latin typeface="Courier"/>
+              </a:rPr>
+              <a:t>==</a:t>
+            </a:r>
+            <a:r>
+              <a:rPr/>
+              <a:t>, </a:t>
+            </a:r>
+            <a:r>
+              <a:rPr>
+                <a:latin typeface="Courier"/>
+              </a:rPr>
+              <a:t>!=</a:t>
+            </a:r>
+            <a:r>
+              <a:rPr/>
+              <a:t>, </a:t>
+            </a:r>
+            <a:r>
+              <a:rPr>
+                <a:latin typeface="Courier"/>
+              </a:rPr>
+              <a:t>&gt;</a:t>
+            </a:r>
+            <a:r>
+              <a:rPr/>
+              <a:t>/</a:t>
+            </a:r>
+            <a:r>
+              <a:rPr>
+                <a:latin typeface="Courier"/>
+              </a:rPr>
+              <a:t>&lt;</a:t>
+            </a:r>
+            <a:r>
+              <a:rPr/>
+              <a:t>, </a:t>
+            </a:r>
+            <a:r>
+              <a:rPr>
+                <a:latin typeface="Courier"/>
+              </a:rPr>
+              <a:t>%in%</a:t>
+            </a:r>
+            <a:r>
+              <a:rPr/>
+              <a:t>, </a:t>
+            </a:r>
+            <a:r>
+              <a:rPr>
+                <a:latin typeface="Courier"/>
+              </a:rPr>
+              <a:t>is.na()</a:t>
+            </a:r>
+            <a:r>
+              <a:rPr/>
+              <a:t>, AND (</a:t>
+            </a:r>
+            <a:r>
+              <a:rPr>
+                <a:latin typeface="Courier"/>
+              </a:rPr>
+              <a:t>,</a:t>
+            </a:r>
+            <a:r>
+              <a:rPr/>
+              <a:t>) vs. OR (</a:t>
+            </a:r>
+            <a:r>
+              <a:rPr>
+                <a:latin typeface="Courier"/>
+              </a:rPr>
+              <a:t>|</a:t>
+            </a:r>
+            <a:r>
+              <a:rPr/>
+              <a:t>)</a:t>
+            </a:r>
+          </a:p>
+          <a:p>
+            <a:pPr lvl="0"/>
+            <a:r>
+              <a:rPr/>
+              <a:t>Recoded and binned columns with </a:t>
+            </a:r>
+            <a:r>
+              <a:rPr>
+                <a:latin typeface="Courier"/>
+              </a:rPr>
+              <a:t>case_when()</a:t>
+            </a:r>
+            <a:r>
+              <a:rPr/>
+              <a:t> — always ending in a </a:t>
+            </a:r>
+            <a:r>
+              <a:rPr>
+                <a:latin typeface="Courier"/>
+              </a:rPr>
+              <a:t>TRUE ~</a:t>
+            </a:r>
+            <a:r>
+              <a:rPr/>
+              <a:t> catch-all</a:t>
+            </a:r>
+          </a:p>
+          <a:p>
+            <a:pPr lvl="0"/>
+            <a:r>
+              <a:rPr/>
+              <a:t>Converted units and log-transformed a column with </a:t>
+            </a:r>
+            <a:r>
+              <a:rPr>
+                <a:latin typeface="Courier"/>
+              </a:rPr>
+              <a:t>mutate()</a:t>
+            </a:r>
+          </a:p>
+          <a:p>
+            <a:pPr lvl="0"/>
+            <a:r>
+              <a:rPr/>
+              <a:t>Caught and removed duplicate rows with </a:t>
+            </a:r>
+            <a:r>
+              <a:rPr>
+                <a:latin typeface="Courier"/>
+              </a:rPr>
+              <a:t>distinct()</a:t>
+            </a:r>
+          </a:p>
+          <a:p>
+            <a:pPr lvl="0"/>
+            <a:r>
+              <a:rPr/>
+              <a:t>Cleaned messy headers with </a:t>
+            </a:r>
+            <a:r>
+              <a:rPr>
+                <a:latin typeface="Courier"/>
+              </a:rPr>
+              <a:t>clean_names()</a:t>
+            </a:r>
+            <a:r>
+              <a:rPr/>
+              <a:t>, messy text with </a:t>
+            </a:r>
+            <a:r>
+              <a:rPr>
+                <a:latin typeface="Courier"/>
+              </a:rPr>
+              <a:t>str_to_lower()</a:t>
+            </a:r>
+            <a:r>
+              <a:rPr/>
+              <a:t>, and numbers-stored-as-text with </a:t>
+            </a:r>
+            <a:r>
+              <a:rPr>
+                <a:latin typeface="Courier"/>
+              </a:rPr>
+              <a:t>as.numeric()</a:t>
+            </a:r>
+          </a:p>
+          <a:p>
+            <a:pPr lvl="0"/>
+            <a:r>
+              <a:rPr/>
+              <a:t>Trimmed to the columns worth keeping and wrote the result to </a:t>
+            </a:r>
+            <a:r>
+              <a:rPr>
+                <a:latin typeface="Courier"/>
+              </a:rPr>
+              <a:t>output/</a:t>
+            </a:r>
+            <a:r>
+              <a:rPr/>
+              <a:t> — leaving </a:t>
+            </a:r>
+            <a:r>
+              <a:rPr>
+                <a:latin typeface="Courier"/>
+              </a:rPr>
+              <a:t>data/</a:t>
+            </a:r>
+            <a:r>
+              <a:rPr/>
+              <a:t> untouched</a:t>
+            </a:r>
+          </a:p>
+          <a:p>
+            <a:pPr lvl="0" indent="0" marL="1270000">
+              <a:buNone/>
+            </a:pPr>
+            <a:r>
+              <a:rPr sz="2000" b="1"/>
+              <a:t>Tip</a:t>
+            </a:r>
+          </a:p>
+          <a:p>
+            <a:pPr lvl="0" indent="0" marL="1270000">
+              <a:buNone/>
+            </a:pPr>
+            <a:r>
+              <a:rPr sz="2000" b="1"/>
+              <a:t>🖐 Before next class</a:t>
+            </a:r>
+          </a:p>
+          <a:p>
+            <a:pPr lvl="0" indent="0" marL="1270000">
+              <a:buNone/>
+            </a:pPr>
+            <a:r>
+              <a:rPr sz="2000"/>
+              <a:t>Finish the worksheet: take </a:t>
+            </a:r>
+            <a:r>
+              <a:rPr sz="2000">
+                <a:latin typeface="Courier"/>
+              </a:rPr>
+              <a:t>pine_needles_error.csv</a:t>
+            </a:r>
+            <a:r>
+              <a:rPr sz="2000"/>
+              <a:t> from </a:t>
+            </a:r>
+            <a:r>
+              <a:rPr sz="2000">
+                <a:latin typeface="Courier"/>
+              </a:rPr>
+              <a:t>data/</a:t>
+            </a:r>
+            <a:r>
+              <a:rPr sz="2000"/>
+              <a:t>, clean it end to end, </a:t>
+            </a:r>
+            <a:r>
+              <a:rPr sz="2000">
+                <a:latin typeface="Courier"/>
+              </a:rPr>
+              <a:t>select()</a:t>
+            </a:r>
+            <a:r>
+              <a:rPr sz="2000"/>
+              <a:t> the columns worth keeping, and write the result to </a:t>
+            </a:r>
+            <a:r>
+              <a:rPr sz="2000">
+                <a:latin typeface="Courier"/>
+              </a:rPr>
+              <a:t>output/</a:t>
+            </a:r>
+            <a:r>
+              <a:rPr sz="2000"/>
+              <a:t>. Then delete </a:t>
+            </a:r>
+            <a:r>
+              <a:rPr sz="2000">
+                <a:latin typeface="Courier"/>
+              </a:rPr>
+              <a:t>output/</a:t>
+            </a:r>
+            <a:r>
+              <a:rPr sz="2000"/>
+              <a:t>, re-run your script, and check that it all comes back.</a:t>
+            </a:r>
+          </a:p>
+        </p:txBody>
+      </p:sp>
+      <p:sp>
+        <p:nvSpPr>
+          <p:cNvPr id="4" name="Content Placeholder 3"/>
+          <p:cNvSpPr>
+            <a:spLocks noGrp="1"/>
+          </p:cNvSpPr>
+          <p:nvPr>
+            <p:ph idx="2" sz="half"/>
+          </p:nvPr>
+        </p:nvSpPr>
+        <p:spPr/>
+        <p:txBody>
+          <a:bodyPr/>
+          <a:lstStyle/>
+          <a:p>
+            <a:pPr lvl="0" indent="0" marL="1270000">
+              <a:buNone/>
+            </a:pPr>
+            <a:r>
+              <a:rPr sz="2000" b="1"/>
+              <a:t>Note</a:t>
+            </a:r>
+          </a:p>
+          <a:p>
+            <a:pPr lvl="0" indent="0" marL="1270000">
+              <a:buNone/>
+            </a:pPr>
+            <a:r>
+              <a:rPr sz="2000" b="1"/>
+              <a:t>Up next — Describing Your Data</a:t>
+            </a:r>
+          </a:p>
+          <a:p>
+            <a:pPr lvl="0"/>
+            <a:r>
+              <a:rPr sz="2000"/>
+              <a:t>Mean, median, variance, SD, SE</a:t>
+            </a:r>
+          </a:p>
+          <a:p>
+            <a:pPr lvl="0"/>
+            <a:r>
+              <a:rPr sz="2000"/>
+              <a:t>The </a:t>
+            </a:r>
+            <a:r>
+              <a:rPr sz="2000">
+                <a:latin typeface="Courier"/>
+              </a:rPr>
+              <a:t>length()</a:t>
+            </a:r>
+            <a:r>
+              <a:rPr sz="2000"/>
+              <a:t> trap and the </a:t>
+            </a:r>
+            <a:r>
+              <a:rPr sz="2000">
+                <a:latin typeface="Courier"/>
+              </a:rPr>
+              <a:t>sum(!is.na())</a:t>
+            </a:r>
+            <a:r>
+              <a:rPr sz="2000"/>
+              <a:t> fix</a:t>
+            </a:r>
+          </a:p>
+          <a:p>
+            <a:pPr lvl="0"/>
+            <a:r>
+              <a:rPr sz="2000">
+                <a:latin typeface="Courier"/>
+              </a:rPr>
+              <a:t>group_by()</a:t>
+            </a:r>
+            <a:r>
+              <a:rPr sz="2000"/>
+              <a:t> + </a:t>
+            </a:r>
+            <a:r>
+              <a:rPr sz="2000">
+                <a:latin typeface="Courier"/>
+              </a:rPr>
+              <a:t>summarize()</a:t>
+            </a:r>
+            <a:r>
+              <a:rPr sz="2000"/>
+              <a:t> for tidy group comparisons</a:t>
+            </a:r>
+          </a:p>
+        </p:txBody>
+      </p:sp>
+    </p:spTree>
+  </p:cSld>
+</p:sld>
+</file>
+
+<file path=ppt/slides/slide41.xml><?xml version="1.0" encoding="utf-8"?>
+<p:sld xmlns:a="http://schemas.openxmlformats.org/drawingml/2006/main" xmlns:r="http://schemas.openxmlformats.org/officeDocument/2006/relationships" xmlns:p="http://schemas.openxmlformats.org/presentationml/2006/main">
+  <p:cSld>
+    <p:spTree>
+      <p:nvGrpSpPr>
+        <p:cNvPr id="1" name=""/>
+        <p:cNvGrpSpPr/>
+        <p:nvPr/>
+      </p:nvGrpSpPr>
+      <p:grpSpPr>
+        <a:xfrm>
+          <a:off x="0" y="0"/>
+          <a:ext cx="0" cy="0"/>
+          <a:chOff x="0" y="0"/>
+          <a:chExt cx="0" cy="0"/>
+        </a:xfrm>
+      </p:grpSpPr>
+      <p:sp>
+        <p:nvSpPr>
+          <p:cNvPr id="2" name="Title 1"/>
+          <p:cNvSpPr>
+            <a:spLocks noGrp="1"/>
+          </p:cNvSpPr>
+          <p:nvPr>
+            <p:ph type="title"/>
+          </p:nvPr>
+        </p:nvSpPr>
+        <p:spPr>
+          <a:xfrm>
+            <a:off x="0" y="0"/>
+            <a:ext cx="9144000" cy="582780"/>
+          </a:xfrm>
+        </p:spPr>
+        <p:txBody>
+          <a:bodyPr/>
+          <a:lstStyle/>
+          <a:p>
+            <a:pPr lvl="0" indent="0" marL="0">
+              <a:buNone/>
+            </a:pPr>
+            <a:r>
+              <a:rPr/>
+              <a:t>Getting unstuck</a:t>
+            </a:r>
+          </a:p>
+        </p:txBody>
+      </p:sp>
+      <p:sp>
+        <p:nvSpPr>
+          <p:cNvPr id="3" name="Content Placeholder 2"/>
+          <p:cNvSpPr>
+            <a:spLocks noGrp="1"/>
+          </p:cNvSpPr>
+          <p:nvPr>
+            <p:ph idx="1"/>
+          </p:nvPr>
+        </p:nvSpPr>
+        <p:spPr/>
+        <p:txBody>
+          <a:bodyPr/>
+          <a:lstStyle/>
+          <a:p>
+            <a:pPr lvl="0" indent="0" marL="0">
+              <a:buNone/>
+            </a:pPr>
+            <a:r>
+              <a:rPr/>
+              <a:t>When code breaks — and it will, that is normal:</a:t>
+            </a:r>
+          </a:p>
+          <a:p>
+            <a:pPr lvl="0" indent="-342900" marL="342900">
+              <a:buAutoNum type="arabicPeriod"/>
+            </a:pPr>
+            <a:r>
+              <a:rPr/>
+              <a:t>Read the </a:t>
+            </a:r>
+            <a:r>
+              <a:rPr b="1"/>
+              <a:t>error message</a:t>
+            </a:r>
+            <a:r>
+              <a:rPr/>
+              <a:t> out loud; it usually names the line</a:t>
+            </a:r>
+          </a:p>
+          <a:p>
+            <a:pPr lvl="0" indent="-342900" marL="342900">
+              <a:buAutoNum type="arabicPeriod"/>
+            </a:pPr>
+            <a:r>
+              <a:rPr/>
+              <a:t>Check the usual suspects: </a:t>
+            </a:r>
+            <a:r>
+              <a:rPr>
+                <a:latin typeface="Courier"/>
+              </a:rPr>
+              <a:t>library(tidyverse)</a:t>
+            </a:r>
+            <a:r>
+              <a:rPr/>
+              <a:t> and </a:t>
+            </a:r>
+            <a:r>
+              <a:rPr>
+                <a:latin typeface="Courier"/>
+              </a:rPr>
+              <a:t>library(readxl)</a:t>
+            </a:r>
+            <a:r>
+              <a:rPr/>
+              <a:t> loaded? Spelling? A missing </a:t>
+            </a:r>
+            <a:r>
+              <a:rPr>
+                <a:latin typeface="Courier"/>
+              </a:rPr>
+              <a:t>)</a:t>
+            </a:r>
+            <a:r>
+              <a:rPr/>
+              <a:t> or </a:t>
+            </a:r>
+            <a:r>
+              <a:rPr>
+                <a:latin typeface="Courier"/>
+              </a:rPr>
+              <a:t>|&gt;</a:t>
+            </a:r>
+            <a:r>
+              <a:rPr/>
+              <a:t> at the </a:t>
+            </a:r>
+            <a:r>
+              <a:rPr i="1"/>
+              <a:t>start</a:t>
+            </a:r>
+            <a:r>
+              <a:rPr/>
+              <a:t> of a line?</a:t>
+            </a:r>
+          </a:p>
+          <a:p>
+            <a:pPr lvl="0" indent="-342900" marL="342900">
+              <a:buAutoNum type="arabicPeriod"/>
+            </a:pPr>
+            <a:r>
+              <a:rPr>
+                <a:latin typeface="Courier"/>
+              </a:rPr>
+              <a:t>?function_name</a:t>
+            </a:r>
+            <a:r>
+              <a:rPr/>
+              <a:t> opens the help page</a:t>
+            </a:r>
+          </a:p>
+          <a:p>
+            <a:pPr lvl="0" indent="-342900" marL="342900">
+              <a:buAutoNum type="arabicPeriod"/>
+            </a:pPr>
+            <a:r>
+              <a:rPr/>
+              <a:t>Bring the </a:t>
+            </a:r>
+            <a:r>
+              <a:rPr b="1"/>
+              <a:t>exact error</a:t>
+            </a:r>
+            <a:r>
+              <a:rPr/>
+              <a:t> (copy-paste it) to class or office hours</a:t>
+            </a:r>
+          </a:p>
+          <a:p>
+            <a:pPr lvl="0" indent="0" marL="1270000">
+              <a:buNone/>
+            </a:pPr>
+            <a:r>
+              <a:rPr sz="2000" b="1"/>
+              <a:t>Note</a:t>
+            </a:r>
+          </a:p>
+          <a:p>
+            <a:pPr lvl="0" indent="0" marL="1270000">
+              <a:buNone/>
+            </a:pPr>
+            <a:r>
+              <a:rPr sz="2000" b="1"/>
+              <a:t>✅ Key idea</a:t>
+            </a:r>
+          </a:p>
+          <a:p>
+            <a:pPr lvl="0" indent="0" marL="1270000">
+              <a:buNone/>
+            </a:pPr>
+            <a:r>
+              <a:rPr sz="2000"/>
+              <a:t>Every working scientist googles error messages daily. Getting stuck is not failing — it is the job.</a:t>
             </a:r>
           </a:p>
         </p:txBody>
@@ -13638,14 +17362,14 @@
               <a:rPr>
                 <a:latin typeface="Courier"/>
               </a:rPr>
-              <a:t>Rows: 48
+              <a:t>Rows: 64
 Columns: 6
-$ date      &lt;chr&gt; "3/20/25", "3/20/25", "3/20/25", "3/20/25", "3/20/25", "3/20…
-$ group     &lt;chr&gt; "cephalopods", "cephalopods", "cephalopods", "cephalopods", …
-$ n_s       &lt;chr&gt; "n", "n", "n", "n", "n", "n", "s", "s", "s", "s", "s", "s", …
-$ sun       &lt;chr&gt; "shady", "shady", "shady", "shady", "shady", "shady", "sunny…
-$ tree_no   &lt;dbl&gt; 1, 1, 1, 1, 1, 1, 1, 1, 1, 1, 1, 1, 2, 2, 2, 2, 2, 2, 2, 2, …
-$ length_mm &lt;dbl&gt; 20, 21, 23, 25, 21, 16, 15, 16, 14, 17, 13, 15, 19, 18, 20, …</a:t>
+$ source_file      &lt;chr&gt; "Bartell_Shingledecker_tree_needle_data_2026.csv", "B…
+$ team             &lt;chr&gt; "grace_jace", "grace_jace", "grace_jace", "grace_jace…
+$ replicate        &lt;dbl&gt; 1, 2, 3, 4, 5, 6, 7, 8, 1, 2, 3, 4, 5, 6, 7, 8, 1, 2,…
+$ side             &lt;chr&gt; "sunny", "sunny", "sunny", "sunny", "sunny", "sunny",…
+$ needle_length_mm &lt;dbl&gt; 18.44, 12.48, 17.73, 13.98, 14.18, 19.17, 10.92, 17.3…
+$ needle_width_mm  &lt;dbl&gt; 0.79, 0.99, 1.12, 0.94, 1.00, 0.99, 0.81, 1.29, 0.75,…</a:t>
             </a:r>
           </a:p>
           <a:p>
@@ -13679,7 +17403,7 @@
               <a:rPr>
                 <a:latin typeface="Courier"/>
               </a:rPr>
-              <a:t>[1] 48  6</a:t>
+              <a:t>[1] 64  6</a:t>
             </a:r>
           </a:p>
           <a:p>
@@ -13712,7 +17436,7 @@
               <a:rPr sz="2000">
                 <a:latin typeface="Courier"/>
               </a:rPr>
-              <a:t>date</a:t>
+              <a:t>source_file</a:t>
             </a:r>
             <a:r>
               <a:rPr sz="2000"/>
@@ -13722,7 +17446,7 @@
               <a:rPr sz="2000">
                 <a:latin typeface="Courier"/>
               </a:rPr>
-              <a:t>group</a:t>
+              <a:t>team</a:t>
             </a:r>
             <a:r>
               <a:rPr sz="2000"/>
@@ -13732,7 +17456,7 @@
               <a:rPr sz="2000">
                 <a:latin typeface="Courier"/>
               </a:rPr>
-              <a:t>n_s</a:t>
+              <a:t>replicate</a:t>
             </a:r>
             <a:r>
               <a:rPr sz="2000"/>
@@ -13742,7 +17466,7 @@
               <a:rPr sz="2000">
                 <a:latin typeface="Courier"/>
               </a:rPr>
-              <a:t>sun</a:t>
+              <a:t>side</a:t>
             </a:r>
             <a:r>
               <a:rPr sz="2000"/>
@@ -13752,7 +17476,7 @@
               <a:rPr sz="2000">
                 <a:latin typeface="Courier"/>
               </a:rPr>
-              <a:t>tree_no</a:t>
+              <a:t>needle_length_mm</a:t>
             </a:r>
             <a:r>
               <a:rPr sz="2000"/>
@@ -13762,11 +17486,11 @@
               <a:rPr sz="2000">
                 <a:latin typeface="Courier"/>
               </a:rPr>
-              <a:t>length_mm</a:t>
-            </a:r>
-            <a:r>
-              <a:rPr sz="2000"/>
-              <a:t> or what you call them.</a:t>
+              <a:t>needle_width_mm</a:t>
+            </a:r>
+            <a:r>
+              <a:rPr sz="2000"/>
+              <a:t>.</a:t>
             </a:r>
             <a:br/>
             <a:r>
@@ -13840,7 +17564,7 @@
               <a:rPr sz="2000">
                 <a:latin typeface="Courier"/>
               </a:rPr>
-              <a:t>tree_no</a:t>
+              <a:t>replicate</a:t>
             </a:r>
             <a:r>
               <a:rPr sz="2000"/>
@@ -14501,7 +18225,7 @@
                 </a:solidFill>
                 <a:latin typeface="Courier"/>
               </a:rPr>
-              <a:t># Keep only the shady (sheltered) side</a:t>
+              <a:t># Keep only the shady side</a:t>
             </a:r>
             <a:br/>
             <a:r>
@@ -14547,7 +18271,7 @@
                 </a:solidFill>
                 <a:latin typeface="Courier"/>
               </a:rPr>
-              <a:t>(n_s </a:t>
+              <a:t>(side </a:t>
             </a:r>
             <a:r>
               <a:rPr>
@@ -14574,7 +18298,7 @@
                 </a:solidFill>
                 <a:latin typeface="Courier"/>
               </a:rPr>
-              <a:t>"n"</a:t>
+              <a:t>"shady"</a:t>
             </a:r>
             <a:r>
               <a:rPr>
@@ -14631,14 +18355,14 @@
                 <a:latin typeface="Courier"/>
               </a:rPr>
               <a:t># A tibble: 6 × 6
-  date    group       n_s   sun   tree_no length_mm
-  &lt;chr&gt;   &lt;chr&gt;       &lt;chr&gt; &lt;chr&gt;   &lt;dbl&gt;     &lt;dbl&gt;
-1 3/20/25 cephalopods n     shady       1        20
-2 3/20/25 cephalopods n     shady       1        21
-3 3/20/25 cephalopods n     shady       1        23
-4 3/20/25 cephalopods n     shady       1        25
-5 3/20/25 cephalopods n     shady       1        21
-6 3/20/25 cephalopods n     shady       1        16</a:t>
+  source_file             team  replicate side  needle_length_mm needle_width_mm
+  &lt;chr&gt;                   &lt;chr&gt;     &lt;dbl&gt; &lt;chr&gt;            &lt;dbl&gt;           &lt;dbl&gt;
+1 Bartell_Shingledecker_… grac…         1 shady             16.6            0.75
+2 Bartell_Shingledecker_… grac…         2 shady             17.0            0.84
+3 Bartell_Shingledecker_… grac…         3 shady             14.3            0.86
+4 Bartell_Shingledecker_… grac…         4 shady             15.6            0.98
+5 Bartell_Shingledecker_… grac…         5 shady             15.1            1.35
+6 Bartell_Shingledecker_… grac…         6 shady             13.1            0.77</a:t>
             </a:r>
           </a:p>
           <a:p>
@@ -14652,7 +18376,7 @@
                 </a:solidFill>
                 <a:latin typeface="Courier"/>
               </a:rPr>
-              <a:t># Keep only needles longer than 20 mm</a:t>
+              <a:t># Keep only needles longer than 17 mm</a:t>
             </a:r>
             <a:br/>
             <a:r>
@@ -14698,7 +18422,7 @@
                 </a:solidFill>
                 <a:latin typeface="Courier"/>
               </a:rPr>
-              <a:t>(length_mm </a:t>
+              <a:t>(needle_length_mm </a:t>
             </a:r>
             <a:r>
               <a:rPr>
@@ -14725,7 +18449,7 @@
                 </a:solidFill>
                 <a:latin typeface="Courier"/>
               </a:rPr>
-              <a:t>20</a:t>
+              <a:t>17</a:t>
             </a:r>
             <a:r>
               <a:rPr>
@@ -14782,14 +18506,14 @@
                 <a:latin typeface="Courier"/>
               </a:rPr>
               <a:t># A tibble: 6 × 6
-  date    group       n_s   sun   tree_no length_mm
-  &lt;chr&gt;   &lt;chr&gt;       &lt;chr&gt; &lt;chr&gt;   &lt;dbl&gt;     &lt;dbl&gt;
-1 3/20/25 cephalopods n     shady       1        21
-2 3/20/25 cephalopods n     shady       1        23
-3 3/20/25 cephalopods n     shady       1        25
-4 3/20/25 cephalopods n     shady       1        21
-5 3/20/25 salmon      n     shady       2        23
-6 3/20/25 salmon      n     shady       2        21</a:t>
+  source_file             team  replicate side  needle_length_mm needle_width_mm
+  &lt;chr&gt;                   &lt;chr&gt;     &lt;dbl&gt; &lt;chr&gt;            &lt;dbl&gt;           &lt;dbl&gt;
+1 Bartell_Shingledecker_… grac…         1 sunny             18.4            0.79
+2 Bartell_Shingledecker_… grac…         3 sunny             17.7            1.12
+3 Bartell_Shingledecker_… grac…         6 sunny             19.2            0.99
+4 Bartell_Shingledecker_… grac…         8 sunny             17.3            1.29
+5 Bartell_Shingledecker_… grac…         7 shady             17.9            0.69
+6 heal_thome_pineneedles… bota…         2 shady             20.7            0.77</a:t>
             </a:r>
           </a:p>
           <a:p>
@@ -14833,13 +18557,13 @@
             </a:r>
             <a:r>
               <a:rPr sz="2000"/>
-              <a:t> tests equality. </a:t>
+              <a:t> tests equality — </a:t>
             </a:r>
             <a:r>
               <a:rPr sz="2000">
                 <a:latin typeface="Courier"/>
               </a:rPr>
-              <a:t>filter(n_s = "n")</a:t>
+              <a:t>filter(side = "shady")</a:t>
             </a:r>
             <a:r>
               <a:rPr sz="2000"/>
@@ -14847,7 +18571,7 @@
             </a:r>
           </a:p>
           <a:p>
-            <a:pPr lvl="0"/>
+            <a:pPr lvl="1"/>
             <a:r>
               <a:rPr sz="2000"/>
               <a:t>you want </a:t>
@@ -14856,7 +18580,7 @@
               <a:rPr sz="2000">
                 <a:latin typeface="Courier"/>
               </a:rPr>
-              <a:t>filter(n_s == "n")</a:t>
+              <a:t>filter(side == "shady")</a:t>
             </a:r>
             <a:r>
               <a:rPr sz="2000"/>
@@ -15316,7 +19040,7 @@
                 </a:solidFill>
                 <a:latin typeface="Courier"/>
               </a:rPr>
-              <a:t>(n_s </a:t>
+              <a:t>(side </a:t>
             </a:r>
             <a:r>
               <a:rPr>
@@ -15343,16 +19067,16 @@
                 </a:solidFill>
                 <a:latin typeface="Courier"/>
               </a:rPr>
-              <a:t>"s"</a:t>
-            </a:r>
-            <a:r>
-              <a:rPr>
-                <a:solidFill>
-                  <a:srgbClr val="003B4F"/>
-                </a:solidFill>
-                <a:latin typeface="Courier"/>
-              </a:rPr>
-              <a:t>, length_mm </a:t>
+              <a:t>"sunny"</a:t>
+            </a:r>
+            <a:r>
+              <a:rPr>
+                <a:solidFill>
+                  <a:srgbClr val="003B4F"/>
+                </a:solidFill>
+                <a:latin typeface="Courier"/>
+              </a:rPr>
+              <a:t>, needle_length_mm </a:t>
             </a:r>
             <a:r>
               <a:rPr>
@@ -15436,14 +19160,14 @@
                 <a:latin typeface="Courier"/>
               </a:rPr>
               <a:t># A tibble: 6 × 6
-  date    group       n_s   sun   tree_no length_mm
-  &lt;chr&gt;   &lt;chr&gt;       &lt;chr&gt; &lt;chr&gt;   &lt;dbl&gt;     &lt;dbl&gt;
-1 3/20/25 cephalopods s     sunny       1        16
-2 3/20/25 cephalopods s     sunny       1        17
-3 3/20/25 crayfish    s     sunny       3        16
-4 3/20/25 crayfish    s     sunny       3        17
-5 3/20/25 snail       s     sunny       4        17
-6 3/20/25 snail       s     sunny       4        16</a:t>
+  source_file             team  replicate side  needle_length_mm needle_width_mm
+  &lt;chr&gt;                   &lt;chr&gt;     &lt;dbl&gt; &lt;chr&gt;            &lt;dbl&gt;           &lt;dbl&gt;
+1 Bartell_Shingledecker_… grac…         1 sunny             18.4            0.79
+2 Bartell_Shingledecker_… grac…         3 sunny             17.7            1.12
+3 Bartell_Shingledecker_… grac…         6 sunny             19.2            0.99
+4 Bartell_Shingledecker_… grac…         8 sunny             17.3            1.29
+5 heal_thome_pineneedles… bota…         1 sunny             16.8            0.98
+6 heal_thome_pineneedles… bota…         2 sunny             18.7            1.07</a:t>
             </a:r>
           </a:p>
         </p:txBody>

--- a/docs/content/wrangling_data/wrangling_data_lecture.pptx
+++ b/docs/content/wrangling_data/wrangling_data_lecture.pptx
@@ -46,6 +46,7 @@
     <p:sldId id="294" r:id="rId40"/>
     <p:sldId id="295" r:id="rId41"/>
     <p:sldId id="296" r:id="rId42"/>
+    <p:sldId id="297" r:id="rId43"/>
   </p:sldIdLst>
   <p:sldSz cx="9144000" cy="5143500" type="screen16x9"/>
   <p:notesSz cx="6858000" cy="9144000"/>
@@ -5120,6 +5121,96 @@
               <a:t> missing values matter so much once you’re computing a sample size or a mean.</a:t>
             </a:r>
           </a:p>
+          <a:p>
+            <a:pPr lvl="0" indent="0" marL="1270000">
+              <a:buNone/>
+            </a:pPr>
+            <a:r>
+              <a:rPr sz="2000" b="1"/>
+              <a:t>Note</a:t>
+            </a:r>
+          </a:p>
+          <a:p>
+            <a:pPr lvl="0" indent="0" marL="1270000">
+              <a:buNone/>
+            </a:pPr>
+            <a:r>
+              <a:rPr sz="2000" b="1"/>
+              <a:t>📖 Reference</a:t>
+            </a:r>
+          </a:p>
+          <a:p>
+            <a:pPr lvl="0" indent="0" marL="1270000">
+              <a:buNone/>
+            </a:pPr>
+            <a:r>
+              <a:rPr sz="2000">
+                <a:hlinkClick r:id="rId2"/>
+              </a:rPr>
+              <a:t>📖 R4DS §12 — Logical vectors</a:t>
+            </a:r>
+            <a:r>
+              <a:rPr sz="2000"/>
+              <a:t> covers </a:t>
+            </a:r>
+            <a:r>
+              <a:rPr sz="2000">
+                <a:latin typeface="Courier"/>
+              </a:rPr>
+              <a:t>==</a:t>
+            </a:r>
+            <a:r>
+              <a:rPr sz="2000"/>
+              <a:t>, </a:t>
+            </a:r>
+            <a:r>
+              <a:rPr sz="2000">
+                <a:latin typeface="Courier"/>
+              </a:rPr>
+              <a:t>&amp;</a:t>
+            </a:r>
+            <a:r>
+              <a:rPr sz="2000"/>
+              <a:t>, </a:t>
+            </a:r>
+            <a:r>
+              <a:rPr sz="2000">
+                <a:latin typeface="Courier"/>
+              </a:rPr>
+              <a:t>|</a:t>
+            </a:r>
+            <a:r>
+              <a:rPr sz="2000"/>
+              <a:t>, </a:t>
+            </a:r>
+            <a:r>
+              <a:rPr sz="2000">
+                <a:latin typeface="Courier"/>
+              </a:rPr>
+              <a:t>%in%</a:t>
+            </a:r>
+            <a:r>
+              <a:rPr sz="2000"/>
+              <a:t> and </a:t>
+            </a:r>
+            <a:r>
+              <a:rPr sz="2000">
+                <a:latin typeface="Courier"/>
+              </a:rPr>
+              <a:t>is.na()</a:t>
+            </a:r>
+            <a:r>
+              <a:rPr sz="2000"/>
+              <a:t>.</a:t>
+            </a:r>
+            <a:br/>
+            <a:r>
+              <a:rPr sz="2000">
+                <a:hlinkClick r:id="rId3"/>
+              </a:rPr>
+              <a:t>📖 R4DS §18 — Missing values</a:t>
+            </a:r>
+          </a:p>
         </p:txBody>
       </p:sp>
     </p:spTree>
@@ -5807,11 +5898,14 @@
               <a:buNone/>
             </a:pPr>
             <a:r>
-              <a:rPr/>
+              <a:rPr>
+                <a:hlinkClick r:id="rId2"/>
+              </a:rPr>
               <a:t>📖 R4DS §3.3 — </a:t>
             </a:r>
             <a:r>
               <a:rPr>
+                <a:hlinkClick r:id="rId3"/>
                 <a:latin typeface="Courier"/>
               </a:rPr>
               <a:t>select()</a:t>
@@ -6900,6 +6994,17 @@
               <a:t> are the other two. Always say which one in your methods.</a:t>
             </a:r>
           </a:p>
+          <a:p>
+            <a:pPr lvl="0" indent="0" marL="1270000">
+              <a:buNone/>
+            </a:pPr>
+            <a:r>
+              <a:rPr sz="2000">
+                <a:hlinkClick r:id="rId2"/>
+              </a:rPr>
+              <a:t>📖 R4DS §13 — Numbers</a:t>
+            </a:r>
+          </a:p>
         </p:txBody>
       </p:sp>
     </p:spTree>
@@ -7983,6 +8088,37 @@
             <a:r>
               <a:rPr sz="2000"/>
               <a:t>, R never even looks at the later conditions for that row.</a:t>
+            </a:r>
+          </a:p>
+          <a:p>
+            <a:pPr lvl="0" indent="0" marL="1270000">
+              <a:buNone/>
+            </a:pPr>
+            <a:r>
+              <a:rPr sz="2000">
+                <a:hlinkClick r:id="rId2"/>
+              </a:rPr>
+              <a:t>📖 R4DS §12.5 — </a:t>
+            </a:r>
+            <a:r>
+              <a:rPr sz="2000">
+                <a:hlinkClick r:id="rId3"/>
+                <a:latin typeface="Courier"/>
+              </a:rPr>
+              <a:t>if_else()</a:t>
+            </a:r>
+            <a:r>
+              <a:rPr sz="2000">
+                <a:hlinkClick r:id="rId4"/>
+              </a:rPr>
+              <a:t> and </a:t>
+            </a:r>
+            <a:r>
+              <a:rPr sz="2000">
+                <a:hlinkClick r:id="rId5"/>
+                <a:latin typeface="Courier"/>
+              </a:rPr>
+              <a:t>case_when()</a:t>
             </a:r>
           </a:p>
         </p:txBody>
@@ -12357,6 +12493,17 @@
               <a:buNone/>
             </a:pPr>
             <a:r>
+              <a:rPr sz="2000">
+                <a:hlinkClick r:id="rId2"/>
+              </a:rPr>
+              <a:t>📖 R4DS §14 — Strings</a:t>
+            </a:r>
+          </a:p>
+          <a:p>
+            <a:pPr lvl="0" indent="0" marL="1270000">
+              <a:buNone/>
+            </a:pPr>
+            <a:r>
               <a:rPr sz="2000" b="1"/>
               <a:t>Tip</a:t>
             </a:r>
@@ -14603,6 +14750,24 @@
             <a:r>
               <a:rPr sz="2000"/>
               <a:t> — a “sentinel” code some field sheets use for missing. R has no idea it means missing until you tell it.</a:t>
+            </a:r>
+          </a:p>
+          <a:p>
+            <a:pPr lvl="0" indent="0" marL="1270000">
+              <a:buNone/>
+            </a:pPr>
+            <a:r>
+              <a:rPr sz="2000">
+                <a:hlinkClick r:id="rId2"/>
+              </a:rPr>
+              <a:t>📖 R4DS §13 — Numbers</a:t>
+            </a:r>
+            <a:br/>
+            <a:r>
+              <a:rPr sz="2000">
+                <a:hlinkClick r:id="rId3"/>
+              </a:rPr>
+              <a:t>📖 R4DS §18 — Missing values</a:t>
             </a:r>
           </a:p>
         </p:txBody>
@@ -15762,6 +15927,17 @@
               <a:t> takes only the path. Getting these backwards is one of the most common errors of the term.</a:t>
             </a:r>
           </a:p>
+          <a:p>
+            <a:pPr lvl="0" indent="0" marL="1270000">
+              <a:buNone/>
+            </a:pPr>
+            <a:r>
+              <a:rPr sz="2000">
+                <a:hlinkClick r:id="rId2"/>
+              </a:rPr>
+              <a:t>📖 R4DS §7.5 — Writing to a file</a:t>
+            </a:r>
+          </a:p>
         </p:txBody>
       </p:sp>
     </p:spTree>
@@ -16524,6 +16700,17 @@
               <a:t> line.</a:t>
             </a:r>
           </a:p>
+          <a:p>
+            <a:pPr lvl="0" indent="0" marL="1270000">
+              <a:buNone/>
+            </a:pPr>
+            <a:r>
+              <a:rPr sz="2000">
+                <a:hlinkClick r:id="rId4"/>
+              </a:rPr>
+              <a:t>📖 R4DS §7 — Data import</a:t>
+            </a:r>
+          </a:p>
         </p:txBody>
       </p:sp>
     </p:spTree>
@@ -17087,6 +17274,364 @@
         <p:spPr>
           <a:xfrm>
             <a:off x="0" y="0"/>
+            <a:ext cx="9144000" cy="602780"/>
+          </a:xfrm>
+          <a:solidFill>
+            <a:srgbClr val="70121D"/>
+          </a:solidFill>
+        </p:spPr>
+        <p:txBody>
+          <a:bodyPr/>
+          <a:lstStyle/>
+          <a:p>
+            <a:pPr lvl="0" indent="0" marL="0">
+              <a:buNone/>
+            </a:pPr>
+            <a:r>
+              <a:rPr/>
+              <a:t>Readings</a:t>
+            </a:r>
+          </a:p>
+        </p:txBody>
+      </p:sp>
+      <p:sp>
+        <p:nvSpPr>
+          <p:cNvPr id="3" name="Content Placeholder 2"/>
+          <p:cNvSpPr>
+            <a:spLocks noGrp="1"/>
+          </p:cNvSpPr>
+          <p:nvPr>
+            <p:ph idx="1" sz="half"/>
+          </p:nvPr>
+        </p:nvSpPr>
+        <p:spPr/>
+        <p:txBody>
+          <a:bodyPr/>
+          <a:lstStyle/>
+          <a:p>
+            <a:pPr lvl="0" indent="0" marL="0">
+              <a:buNone/>
+            </a:pPr>
+            <a:r>
+              <a:rPr b="1"/>
+              <a:t>Before next class</a:t>
+            </a:r>
+            <a:r>
+              <a:rPr/>
+              <a:t> — chapter PDFs are posted on </a:t>
+            </a:r>
+            <a:r>
+              <a:rPr b="1"/>
+              <a:t>Canvas</a:t>
+            </a:r>
+            <a:r>
+              <a:rPr/>
+              <a:t>:</a:t>
+            </a:r>
+          </a:p>
+          <a:p>
+            <a:pPr lvl="0"/>
+            <a:r>
+              <a:rPr b="1"/>
+              <a:t>Gotelli &amp; Ellison</a:t>
+            </a:r>
+            <a:r>
+              <a:rPr/>
+              <a:t>, </a:t>
+            </a:r>
+            <a:r>
+              <a:rPr i="1"/>
+              <a:t>A Primer of Ecological Statistics</a:t>
+            </a:r>
+            <a:r>
+              <a:rPr/>
+              <a:t> — </a:t>
+            </a:r>
+            <a:r>
+              <a:rPr b="1"/>
+              <a:t>Ch. 8</a:t>
+            </a:r>
+            <a:r>
+              <a:rPr/>
+              <a:t>, Managing and Curating Data (raw vs. processed data, the audit trail from field sheet to analysis)</a:t>
+            </a:r>
+          </a:p>
+          <a:p>
+            <a:pPr lvl="0"/>
+            <a:r>
+              <a:rPr b="1"/>
+              <a:t>Whitlock &amp; Schluter</a:t>
+            </a:r>
+            <a:r>
+              <a:rPr/>
+              <a:t>, </a:t>
+            </a:r>
+            <a:r>
+              <a:rPr i="1"/>
+              <a:t>The Analysis of Biological Data</a:t>
+            </a:r>
+            <a:r>
+              <a:rPr/>
+              <a:t> — </a:t>
+            </a:r>
+            <a:r>
+              <a:rPr b="1"/>
+              <a:t>Ch. 1</a:t>
+            </a:r>
+            <a:r>
+              <a:rPr/>
+              <a:t>, Statistics and Samples, §1.4 on types of variables — the categorical/numerical distinction behind </a:t>
+            </a:r>
+            <a:r>
+              <a:rPr>
+                <a:latin typeface="Courier"/>
+              </a:rPr>
+              <a:t>case_when()</a:t>
+            </a:r>
+            <a:r>
+              <a:rPr/>
+              <a:t> and every </a:t>
+            </a:r>
+            <a:r>
+              <a:rPr>
+                <a:latin typeface="Courier"/>
+              </a:rPr>
+              <a:t>group_by()</a:t>
+            </a:r>
+            <a:r>
+              <a:rPr/>
+              <a:t> to come</a:t>
+            </a:r>
+          </a:p>
+          <a:p>
+            <a:pPr lvl="0" indent="0" marL="1270000">
+              <a:buNone/>
+            </a:pPr>
+            <a:r>
+              <a:rPr sz="2000" b="1"/>
+              <a:t>Note</a:t>
+            </a:r>
+          </a:p>
+          <a:p>
+            <a:pPr lvl="0" indent="0" marL="1270000">
+              <a:buNone/>
+            </a:pPr>
+            <a:r>
+              <a:rPr sz="2000" b="1"/>
+              <a:t>✅ Key idea</a:t>
+            </a:r>
+          </a:p>
+          <a:p>
+            <a:pPr lvl="0" indent="0" marL="1270000">
+              <a:buNone/>
+            </a:pPr>
+            <a:r>
+              <a:rPr sz="2000"/>
+              <a:t>Neither statistics text teaches </a:t>
+            </a:r>
+            <a:r>
+              <a:rPr sz="2000">
+                <a:latin typeface="Courier"/>
+              </a:rPr>
+              <a:t>dplyr</a:t>
+            </a:r>
+            <a:r>
+              <a:rPr sz="2000"/>
+              <a:t> — that is what R4DS is for. Read the texts for </a:t>
+            </a:r>
+            <a:r>
+              <a:rPr sz="2000" i="1"/>
+              <a:t>why</a:t>
+            </a:r>
+            <a:r>
+              <a:rPr sz="2000"/>
+              <a:t> a clean, documented dataset matters, and R4DS for </a:t>
+            </a:r>
+            <a:r>
+              <a:rPr sz="2000" i="1"/>
+              <a:t>how</a:t>
+            </a:r>
+            <a:r>
+              <a:rPr sz="2000"/>
+              <a:t>.</a:t>
+            </a:r>
+          </a:p>
+        </p:txBody>
+      </p:sp>
+      <p:sp>
+        <p:nvSpPr>
+          <p:cNvPr id="4" name="Content Placeholder 3"/>
+          <p:cNvSpPr>
+            <a:spLocks noGrp="1"/>
+          </p:cNvSpPr>
+          <p:nvPr>
+            <p:ph idx="2" sz="half"/>
+          </p:nvPr>
+        </p:nvSpPr>
+        <p:spPr/>
+        <p:txBody>
+          <a:bodyPr/>
+          <a:lstStyle/>
+          <a:p>
+            <a:pPr lvl="0" indent="0" marL="1270000">
+              <a:buNone/>
+            </a:pPr>
+            <a:r>
+              <a:rPr sz="2000" b="1"/>
+              <a:t>Note</a:t>
+            </a:r>
+          </a:p>
+          <a:p>
+            <a:pPr lvl="0" indent="0" marL="1270000">
+              <a:buNone/>
+            </a:pPr>
+            <a:r>
+              <a:rPr sz="2000" b="1"/>
+              <a:t>📖 R for Data Science (2e)</a:t>
+            </a:r>
+          </a:p>
+          <a:p>
+            <a:pPr lvl="0" indent="0" marL="1270000">
+              <a:buNone/>
+            </a:pPr>
+            <a:r>
+              <a:rPr sz="2000"/>
+              <a:t>Free online at </a:t>
+            </a:r>
+            <a:r>
+              <a:rPr sz="2000">
+                <a:hlinkClick r:id="rId2"/>
+              </a:rPr>
+              <a:t>r4ds.hadley.nz</a:t>
+            </a:r>
+            <a:r>
+              <a:rPr sz="2000"/>
+              <a:t>:</a:t>
+            </a:r>
+          </a:p>
+          <a:p>
+            <a:pPr lvl="0"/>
+            <a:r>
+              <a:rPr sz="2000">
+                <a:hlinkClick r:id="rId3"/>
+              </a:rPr>
+              <a:t>§3 — Data transformation</a:t>
+            </a:r>
+            <a:r>
+              <a:rPr sz="2000"/>
+              <a:t> — the five verbs</a:t>
+            </a:r>
+          </a:p>
+          <a:p>
+            <a:pPr lvl="0"/>
+            <a:r>
+              <a:rPr sz="2000">
+                <a:hlinkClick r:id="rId4"/>
+              </a:rPr>
+              <a:t>§5 — Data tidying</a:t>
+            </a:r>
+          </a:p>
+          <a:p>
+            <a:pPr lvl="0"/>
+            <a:r>
+              <a:rPr sz="2000">
+                <a:hlinkClick r:id="rId5"/>
+              </a:rPr>
+              <a:t>§7 — Data import</a:t>
+            </a:r>
+          </a:p>
+          <a:p>
+            <a:pPr lvl="0"/>
+            <a:r>
+              <a:rPr sz="2000">
+                <a:hlinkClick r:id="rId6"/>
+              </a:rPr>
+              <a:t>§12 — Logical vectors</a:t>
+            </a:r>
+            <a:r>
+              <a:rPr sz="2000"/>
+              <a:t> — </a:t>
+            </a:r>
+            <a:r>
+              <a:rPr sz="2000">
+                <a:latin typeface="Courier"/>
+              </a:rPr>
+              <a:t>case_when()</a:t>
+            </a:r>
+          </a:p>
+          <a:p>
+            <a:pPr lvl="0"/>
+            <a:r>
+              <a:rPr sz="2000">
+                <a:hlinkClick r:id="rId7"/>
+              </a:rPr>
+              <a:t>§13 — Numbers</a:t>
+            </a:r>
+          </a:p>
+          <a:p>
+            <a:pPr lvl="0"/>
+            <a:r>
+              <a:rPr sz="2000">
+                <a:hlinkClick r:id="rId8"/>
+              </a:rPr>
+              <a:t>§14 — Strings</a:t>
+            </a:r>
+          </a:p>
+          <a:p>
+            <a:pPr lvl="0"/>
+            <a:r>
+              <a:rPr sz="2000">
+                <a:hlinkClick r:id="rId9"/>
+              </a:rPr>
+              <a:t>§18 — Missing values</a:t>
+            </a:r>
+          </a:p>
+          <a:p>
+            <a:pPr lvl="0"/>
+            <a:r>
+              <a:rPr sz="2000">
+                <a:hlinkClick r:id="rId10"/>
+              </a:rPr>
+              <a:t>§20 — Spreadsheets</a:t>
+            </a:r>
+          </a:p>
+        </p:txBody>
+      </p:sp>
+    </p:spTree>
+  </p:cSld>
+</p:sld>
+</file>
+
+<file path=ppt/slides/slide42.xml><?xml version="1.0" encoding="utf-8"?>
+<p:sld xmlns:a="http://schemas.openxmlformats.org/drawingml/2006/main" xmlns:r="http://schemas.openxmlformats.org/officeDocument/2006/relationships" xmlns:p="http://schemas.openxmlformats.org/presentationml/2006/main">
+  <p:cSld>
+    <p:spTree>
+      <p:nvGrpSpPr>
+        <p:cNvPr id="1" name=""/>
+        <p:cNvGrpSpPr/>
+        <p:nvPr/>
+      </p:nvGrpSpPr>
+      <p:grpSpPr>
+        <a:xfrm>
+          <a:off x="0" y="0"/>
+          <a:ext cx="0" cy="0"/>
+          <a:chOff x="0" y="0"/>
+          <a:chExt cx="0" cy="0"/>
+        </a:xfrm>
+      </p:grpSpPr>
+      <p:sp>
+        <p:nvSpPr>
+          <p:cNvPr id="2" name="Title 1"/>
+          <p:cNvSpPr>
+            <a:spLocks noGrp="1"/>
+          </p:cNvSpPr>
+          <p:nvPr>
+            <p:ph type="title"/>
+          </p:nvPr>
+        </p:nvSpPr>
+        <p:spPr>
+          <a:xfrm>
+            <a:off x="0" y="0"/>
             <a:ext cx="9144000" cy="582780"/>
           </a:xfrm>
         </p:spPr>
@@ -17231,6 +17776,17 @@
             <a:r>
               <a:rPr/>
               <a:t> (copy-paste it) to class or office hours</a:t>
+            </a:r>
+          </a:p>
+          <a:p>
+            <a:pPr lvl="0" indent="0" marL="0">
+              <a:buNone/>
+            </a:pPr>
+            <a:r>
+              <a:rPr>
+                <a:hlinkClick r:id="rId2"/>
+              </a:rPr>
+              <a:t>📖 R4DS §8 — Workflow: getting help</a:t>
             </a:r>
           </a:p>
           <a:p>
@@ -17604,6 +18160,21 @@
             <a:r>
               <a:rPr sz="2000"/>
               <a:t> an Excel import before doing anything else.</a:t>
+            </a:r>
+          </a:p>
+          <a:p>
+            <a:pPr lvl="0" indent="0" marL="1270000">
+              <a:buNone/>
+            </a:pPr>
+            <a:r>
+              <a:rPr sz="2000">
+                <a:hlinkClick r:id="rId2"/>
+              </a:rPr>
+              <a:t>📖 R4DS §20 — Spreadsheets</a:t>
+            </a:r>
+            <a:r>
+              <a:rPr sz="2000"/>
+              <a:t> is entirely about importing from Excel and Sheets.</a:t>
             </a:r>
           </a:p>
         </p:txBody>
@@ -18138,6 +18709,39 @@
             <a:r>
               <a:rPr sz="2000" b="1"/>
               <a:t>“then.”</a:t>
+            </a:r>
+          </a:p>
+          <a:p>
+            <a:pPr lvl="0" indent="0" marL="1270000">
+              <a:buNone/>
+            </a:pPr>
+            <a:r>
+              <a:rPr sz="2000" b="1"/>
+              <a:t>Note</a:t>
+            </a:r>
+          </a:p>
+          <a:p>
+            <a:pPr lvl="0" indent="0" marL="1270000">
+              <a:buNone/>
+            </a:pPr>
+            <a:r>
+              <a:rPr sz="2000" b="1"/>
+              <a:t>📖 Reference</a:t>
+            </a:r>
+          </a:p>
+          <a:p>
+            <a:pPr lvl="0" indent="0" marL="1270000">
+              <a:buNone/>
+            </a:pPr>
+            <a:r>
+              <a:rPr sz="2000">
+                <a:hlinkClick r:id="rId2"/>
+              </a:rPr>
+              <a:t>📖 R4DS §3 — Data transformation</a:t>
+            </a:r>
+            <a:r>
+              <a:rPr sz="2000"/>
+              <a:t> is the chapter for all five verbs and the pipe.</a:t>
             </a:r>
           </a:p>
         </p:txBody>

--- a/docs/content/wrangling_data/wrangling_data_lecture.pptx
+++ b/docs/content/wrangling_data/wrangling_data_lecture.pptx
@@ -46,7 +46,6 @@
     <p:sldId id="294" r:id="rId40"/>
     <p:sldId id="295" r:id="rId41"/>
     <p:sldId id="296" r:id="rId42"/>
-    <p:sldId id="297" r:id="rId43"/>
   </p:sldIdLst>
   <p:sldSz cx="9144000" cy="5143500" type="screen16x9"/>
   <p:notesSz cx="6858000" cy="9144000"/>
@@ -17593,227 +17592,6 @@
                 <a:hlinkClick r:id="rId10"/>
               </a:rPr>
               <a:t>§20 — Spreadsheets</a:t>
-            </a:r>
-          </a:p>
-        </p:txBody>
-      </p:sp>
-    </p:spTree>
-  </p:cSld>
-</p:sld>
-</file>
-
-<file path=ppt/slides/slide42.xml><?xml version="1.0" encoding="utf-8"?>
-<p:sld xmlns:a="http://schemas.openxmlformats.org/drawingml/2006/main" xmlns:r="http://schemas.openxmlformats.org/officeDocument/2006/relationships" xmlns:p="http://schemas.openxmlformats.org/presentationml/2006/main">
-  <p:cSld>
-    <p:spTree>
-      <p:nvGrpSpPr>
-        <p:cNvPr id="1" name=""/>
-        <p:cNvGrpSpPr/>
-        <p:nvPr/>
-      </p:nvGrpSpPr>
-      <p:grpSpPr>
-        <a:xfrm>
-          <a:off x="0" y="0"/>
-          <a:ext cx="0" cy="0"/>
-          <a:chOff x="0" y="0"/>
-          <a:chExt cx="0" cy="0"/>
-        </a:xfrm>
-      </p:grpSpPr>
-      <p:sp>
-        <p:nvSpPr>
-          <p:cNvPr id="2" name="Title 1"/>
-          <p:cNvSpPr>
-            <a:spLocks noGrp="1"/>
-          </p:cNvSpPr>
-          <p:nvPr>
-            <p:ph type="title"/>
-          </p:nvPr>
-        </p:nvSpPr>
-        <p:spPr>
-          <a:xfrm>
-            <a:off x="0" y="0"/>
-            <a:ext cx="9144000" cy="582780"/>
-          </a:xfrm>
-        </p:spPr>
-        <p:txBody>
-          <a:bodyPr/>
-          <a:lstStyle/>
-          <a:p>
-            <a:pPr lvl="0" indent="0" marL="0">
-              <a:buNone/>
-            </a:pPr>
-            <a:r>
-              <a:rPr/>
-              <a:t>Getting unstuck</a:t>
-            </a:r>
-          </a:p>
-        </p:txBody>
-      </p:sp>
-      <p:sp>
-        <p:nvSpPr>
-          <p:cNvPr id="3" name="Content Placeholder 2"/>
-          <p:cNvSpPr>
-            <a:spLocks noGrp="1"/>
-          </p:cNvSpPr>
-          <p:nvPr>
-            <p:ph idx="1"/>
-          </p:nvPr>
-        </p:nvSpPr>
-        <p:spPr/>
-        <p:txBody>
-          <a:bodyPr/>
-          <a:lstStyle/>
-          <a:p>
-            <a:pPr lvl="0" indent="0" marL="0">
-              <a:buNone/>
-            </a:pPr>
-            <a:r>
-              <a:rPr/>
-              <a:t>When code breaks — and it will, that is normal:</a:t>
-            </a:r>
-          </a:p>
-          <a:p>
-            <a:pPr lvl="0" indent="-342900" marL="342900">
-              <a:buAutoNum type="arabicPeriod"/>
-            </a:pPr>
-            <a:r>
-              <a:rPr/>
-              <a:t>Read the </a:t>
-            </a:r>
-            <a:r>
-              <a:rPr b="1"/>
-              <a:t>error message</a:t>
-            </a:r>
-            <a:r>
-              <a:rPr/>
-              <a:t> out loud; it usually names the line</a:t>
-            </a:r>
-          </a:p>
-          <a:p>
-            <a:pPr lvl="0" indent="-342900" marL="342900">
-              <a:buAutoNum type="arabicPeriod"/>
-            </a:pPr>
-            <a:r>
-              <a:rPr/>
-              <a:t>Check the usual suspects: </a:t>
-            </a:r>
-            <a:r>
-              <a:rPr>
-                <a:latin typeface="Courier"/>
-              </a:rPr>
-              <a:t>library(tidyverse)</a:t>
-            </a:r>
-            <a:r>
-              <a:rPr/>
-              <a:t> and </a:t>
-            </a:r>
-            <a:r>
-              <a:rPr>
-                <a:latin typeface="Courier"/>
-              </a:rPr>
-              <a:t>library(readxl)</a:t>
-            </a:r>
-            <a:r>
-              <a:rPr/>
-              <a:t> loaded? Spelling? A missing </a:t>
-            </a:r>
-            <a:r>
-              <a:rPr>
-                <a:latin typeface="Courier"/>
-              </a:rPr>
-              <a:t>)</a:t>
-            </a:r>
-            <a:r>
-              <a:rPr/>
-              <a:t> or </a:t>
-            </a:r>
-            <a:r>
-              <a:rPr>
-                <a:latin typeface="Courier"/>
-              </a:rPr>
-              <a:t>|&gt;</a:t>
-            </a:r>
-            <a:r>
-              <a:rPr/>
-              <a:t> at the </a:t>
-            </a:r>
-            <a:r>
-              <a:rPr i="1"/>
-              <a:t>start</a:t>
-            </a:r>
-            <a:r>
-              <a:rPr/>
-              <a:t> of a line?</a:t>
-            </a:r>
-          </a:p>
-          <a:p>
-            <a:pPr lvl="0" indent="-342900" marL="342900">
-              <a:buAutoNum type="arabicPeriod"/>
-            </a:pPr>
-            <a:r>
-              <a:rPr>
-                <a:latin typeface="Courier"/>
-              </a:rPr>
-              <a:t>?function_name</a:t>
-            </a:r>
-            <a:r>
-              <a:rPr/>
-              <a:t> opens the help page</a:t>
-            </a:r>
-          </a:p>
-          <a:p>
-            <a:pPr lvl="0" indent="-342900" marL="342900">
-              <a:buAutoNum type="arabicPeriod"/>
-            </a:pPr>
-            <a:r>
-              <a:rPr/>
-              <a:t>Bring the </a:t>
-            </a:r>
-            <a:r>
-              <a:rPr b="1"/>
-              <a:t>exact error</a:t>
-            </a:r>
-            <a:r>
-              <a:rPr/>
-              <a:t> (copy-paste it) to class or office hours</a:t>
-            </a:r>
-          </a:p>
-          <a:p>
-            <a:pPr lvl="0" indent="0" marL="0">
-              <a:buNone/>
-            </a:pPr>
-            <a:r>
-              <a:rPr>
-                <a:hlinkClick r:id="rId2"/>
-              </a:rPr>
-              <a:t>📖 R4DS §8 — Workflow: getting help</a:t>
-            </a:r>
-          </a:p>
-          <a:p>
-            <a:pPr lvl="0" indent="0" marL="1270000">
-              <a:buNone/>
-            </a:pPr>
-            <a:r>
-              <a:rPr sz="2000" b="1"/>
-              <a:t>Note</a:t>
-            </a:r>
-          </a:p>
-          <a:p>
-            <a:pPr lvl="0" indent="0" marL="1270000">
-              <a:buNone/>
-            </a:pPr>
-            <a:r>
-              <a:rPr sz="2000" b="1"/>
-              <a:t>✅ Key idea</a:t>
-            </a:r>
-          </a:p>
-          <a:p>
-            <a:pPr lvl="0" indent="0" marL="1270000">
-              <a:buNone/>
-            </a:pPr>
-            <a:r>
-              <a:rPr sz="2000"/>
-              <a:t>Every working scientist googles error messages daily. Getting stuck is not failing — it is the job.</a:t>
             </a:r>
           </a:p>
         </p:txBody>
